--- a/reference/archie/presentations/NPQG Video - Titles and Templates.pptx
+++ b/reference/archie/presentations/NPQG Video - Titles and Templates.pptx
@@ -9418,7 +9418,7 @@
 </file>
 
 <file path=ppt/slides/slide1.xml><?xml version="1.0" encoding="utf-8"?>
-<p:sld xmlns:a="http://schemas.openxmlformats.org/drawingml/2006/main" xmlns:r="http://schemas.openxmlformats.org/officeDocument/2006/relationships" xmlns:p="http://schemas.openxmlformats.org/presentationml/2006/main">
+<p:sld xmlns:a="http://schemas.openxmlformats.org/drawingml/2006/main" xmlns:a16="http://schemas.microsoft.com/office/drawing/2014/main" xmlns:ns3="http://schemas.microsoft.com/office/powerpoint/2010/main" xmlns:p="http://schemas.openxmlformats.org/presentationml/2006/main">
   <p:cSld>
     <p:bg>
       <p:bgPr>
@@ -9447,7 +9447,7 @@
           <p:cNvPr id="2" name="TextBox 1">
             <a:extLst>
               <a:ext uri="{FF2B5EF4-FFF2-40B4-BE49-F238E27FC236}">
-                <a16:creationId xmlns:a16="http://schemas.microsoft.com/office/drawing/2014/main" id="{1D77ACA5-3691-8FEB-0266-8D47BBCCF4C6}"/>
+                <a16:creationId id="{1D77ACA5-3691-8FEB-0266-8D47BBCCF4C6}"/>
               </a:ext>
             </a:extLst>
           </p:cNvPr>
@@ -9521,10 +9521,166 @@
           </a:p>
         </p:txBody>
       </p:sp>
+      <p:sp>
+        <p:nvSpPr>
+          <p:cNvPr id="3" name="Footer Placeholder 3"/>
+          <p:cNvSpPr txBox="1">
+            <a:spLocks/>
+          </p:cNvSpPr>
+          <p:nvPr/>
+        </p:nvSpPr>
+        <p:spPr>
+          <a:xfrm>
+            <a:off x="10942204" y="6481737"/>
+            <a:ext cx="1217443" cy="365125"/>
+          </a:xfrm>
+          <a:prstGeom prst="rect">
+            <a:avLst/>
+          </a:prstGeom>
+        </p:spPr>
+        <p:txBody>
+          <a:bodyPr vert="horz" lIns="91440" tIns="45720" rIns="91440" bIns="45720" rtlCol="0" anchor="ctr"/>
+          <a:lstStyle>
+            <a:defPPr>
+              <a:defRPr lang="en-US"/>
+            </a:defPPr>
+            <a:lvl1pPr marL="0" algn="ctr" defTabSz="914400" rtl="0" eaLnBrk="1" latinLnBrk="0" hangingPunct="1">
+              <a:defRPr sz="1200" kern="1200">
+                <a:solidFill>
+                  <a:schemeClr val="tx1">
+                    <a:tint val="75000"/>
+                  </a:schemeClr>
+                </a:solidFill>
+                <a:latin typeface="+mn-lt"/>
+                <a:ea typeface="+mn-ea"/>
+                <a:cs typeface="+mn-cs"/>
+              </a:defRPr>
+            </a:lvl1pPr>
+            <a:lvl2pPr marL="457200" algn="l" defTabSz="914400" rtl="0" eaLnBrk="1" latinLnBrk="0" hangingPunct="1">
+              <a:defRPr sz="1800" kern="1200">
+                <a:solidFill>
+                  <a:schemeClr val="tx1"/>
+                </a:solidFill>
+                <a:latin typeface="+mn-lt"/>
+                <a:ea typeface="+mn-ea"/>
+                <a:cs typeface="+mn-cs"/>
+              </a:defRPr>
+            </a:lvl2pPr>
+            <a:lvl3pPr marL="914400" algn="l" defTabSz="914400" rtl="0" eaLnBrk="1" latinLnBrk="0" hangingPunct="1">
+              <a:defRPr sz="1800" kern="1200">
+                <a:solidFill>
+                  <a:schemeClr val="tx1"/>
+                </a:solidFill>
+                <a:latin typeface="+mn-lt"/>
+                <a:ea typeface="+mn-ea"/>
+                <a:cs typeface="+mn-cs"/>
+              </a:defRPr>
+            </a:lvl3pPr>
+            <a:lvl4pPr marL="1371600" algn="l" defTabSz="914400" rtl="0" eaLnBrk="1" latinLnBrk="0" hangingPunct="1">
+              <a:defRPr sz="1800" kern="1200">
+                <a:solidFill>
+                  <a:schemeClr val="tx1"/>
+                </a:solidFill>
+                <a:latin typeface="+mn-lt"/>
+                <a:ea typeface="+mn-ea"/>
+                <a:cs typeface="+mn-cs"/>
+              </a:defRPr>
+            </a:lvl4pPr>
+            <a:lvl5pPr marL="1828800" algn="l" defTabSz="914400" rtl="0" eaLnBrk="1" latinLnBrk="0" hangingPunct="1">
+              <a:defRPr sz="1800" kern="1200">
+                <a:solidFill>
+                  <a:schemeClr val="tx1"/>
+                </a:solidFill>
+                <a:latin typeface="+mn-lt"/>
+                <a:ea typeface="+mn-ea"/>
+                <a:cs typeface="+mn-cs"/>
+              </a:defRPr>
+            </a:lvl5pPr>
+            <a:lvl6pPr marL="2286000" algn="l" defTabSz="914400" rtl="0" eaLnBrk="1" latinLnBrk="0" hangingPunct="1">
+              <a:defRPr sz="1800" kern="1200">
+                <a:solidFill>
+                  <a:schemeClr val="tx1"/>
+                </a:solidFill>
+                <a:latin typeface="+mn-lt"/>
+                <a:ea typeface="+mn-ea"/>
+                <a:cs typeface="+mn-cs"/>
+              </a:defRPr>
+            </a:lvl6pPr>
+            <a:lvl7pPr marL="2743200" algn="l" defTabSz="914400" rtl="0" eaLnBrk="1" latinLnBrk="0" hangingPunct="1">
+              <a:defRPr sz="1800" kern="1200">
+                <a:solidFill>
+                  <a:schemeClr val="tx1"/>
+                </a:solidFill>
+                <a:latin typeface="+mn-lt"/>
+                <a:ea typeface="+mn-ea"/>
+                <a:cs typeface="+mn-cs"/>
+              </a:defRPr>
+            </a:lvl7pPr>
+            <a:lvl8pPr marL="3200400" algn="l" defTabSz="914400" rtl="0" eaLnBrk="1" latinLnBrk="0" hangingPunct="1">
+              <a:defRPr sz="1800" kern="1200">
+                <a:solidFill>
+                  <a:schemeClr val="tx1"/>
+                </a:solidFill>
+                <a:latin typeface="+mn-lt"/>
+                <a:ea typeface="+mn-ea"/>
+                <a:cs typeface="+mn-cs"/>
+              </a:defRPr>
+            </a:lvl8pPr>
+            <a:lvl9pPr marL="3657600" algn="l" defTabSz="914400" rtl="0" eaLnBrk="1" latinLnBrk="0" hangingPunct="1">
+              <a:defRPr sz="1800" kern="1200">
+                <a:solidFill>
+                  <a:schemeClr val="tx1"/>
+                </a:solidFill>
+                <a:latin typeface="+mn-lt"/>
+                <a:ea typeface="+mn-ea"/>
+                <a:cs typeface="+mn-cs"/>
+              </a:defRPr>
+            </a:lvl9pPr>
+          </a:lstStyle>
+          <a:p>
+            <a:pPr marL="0" marR="0" lvl="0" indent="0" algn="ctr" defTabSz="914400" rtl="0" eaLnBrk="1" fontAlgn="auto" latinLnBrk="0" hangingPunct="1">
+              <a:lnSpc>
+                <a:spcPct val="100000"/>
+              </a:lnSpc>
+              <a:spcBef>
+                <a:spcPts val="0"/>
+              </a:spcBef>
+              <a:spcAft>
+                <a:spcPts val="0"/>
+              </a:spcAft>
+              <a:buClrTx/>
+              <a:buSzTx/>
+              <a:buFontTx/>
+              <a:buNone/>
+              <a:tabLst/>
+              <a:defRPr/>
+            </a:pPr>
+            <a:r>
+              <a:rPr kumimoji="0" lang="en-US" sz="1200" b="0" i="0" u="none" strike="noStrike" kern="1200" cap="none" spc="0" normalizeH="0" baseline="0" noProof="0" dirty="0">
+                <a:ln>
+                  <a:noFill/>
+                </a:ln>
+                <a:solidFill>
+                  <a:prstClr val="black">
+                    <a:tint val="75000"/>
+                  </a:prstClr>
+                </a:solidFill>
+                <a:effectLst/>
+                <a:uLnTx/>
+                <a:uFillTx/>
+                <a:latin typeface="Helvetica Neue" panose="02000503000000020004" pitchFamily="2" charset="0"/>
+                <a:ea typeface="Helvetica Neue" panose="02000503000000020004" pitchFamily="2" charset="0"/>
+                <a:cs typeface="Helvetica Neue" panose="02000503000000020004" pitchFamily="2" charset="0"/>
+              </a:rPr>
+              <a:t>architrino.com</a:t>
+            </a:r>
+          </a:p>
+        </p:txBody>
+      </p:sp>
     </p:spTree>
     <p:extLst>
       <p:ext uri="{BB962C8B-B14F-4D97-AF65-F5344CB8AC3E}">
-        <p14:creationId xmlns:p14="http://schemas.microsoft.com/office/powerpoint/2010/main" val="3310603461"/>
+        <ns3:creationId val="3310603461"/>
       </p:ext>
     </p:extLst>
   </p:cSld>
@@ -9535,7 +9691,7 @@
 </file>
 
 <file path=ppt/slides/slide10.xml><?xml version="1.0" encoding="utf-8"?>
-<p:sld xmlns:a="http://schemas.openxmlformats.org/drawingml/2006/main" xmlns:r="http://schemas.openxmlformats.org/officeDocument/2006/relationships" xmlns:p="http://schemas.openxmlformats.org/presentationml/2006/main">
+<p:sld xmlns:a="http://schemas.openxmlformats.org/drawingml/2006/main" xmlns:a16="http://schemas.microsoft.com/office/drawing/2014/main" xmlns:ns3="http://schemas.microsoft.com/office/powerpoint/2010/main" xmlns:p="http://schemas.openxmlformats.org/presentationml/2006/main">
   <p:cSld>
     <p:bg>
       <p:bgPr>
@@ -9564,7 +9720,7 @@
           <p:cNvPr id="2" name="TextBox 1">
             <a:extLst>
               <a:ext uri="{FF2B5EF4-FFF2-40B4-BE49-F238E27FC236}">
-                <a16:creationId xmlns:a16="http://schemas.microsoft.com/office/drawing/2014/main" id="{1D77ACA5-3691-8FEB-0266-8D47BBCCF4C6}"/>
+                <a16:creationId id="{1D77ACA5-3691-8FEB-0266-8D47BBCCF4C6}"/>
               </a:ext>
             </a:extLst>
           </p:cNvPr>
@@ -9608,7 +9764,7 @@
                 <a:ea typeface="Helvetica Neue Thin" panose="020B0403020202020204" pitchFamily="34" charset="0"/>
                 <a:cs typeface="Helvetica Neue" panose="02000503000000020004" pitchFamily="2" charset="0"/>
               </a:rPr>
-              <a:t>neoclassical.ai</a:t>
+              <a:t/>
             </a:r>
           </a:p>
           <a:p>
@@ -9746,10 +9902,166 @@
           </a:p>
         </p:txBody>
       </p:sp>
+      <p:sp>
+        <p:nvSpPr>
+          <p:cNvPr id="3" name="Footer Placeholder 3"/>
+          <p:cNvSpPr txBox="1">
+            <a:spLocks/>
+          </p:cNvSpPr>
+          <p:nvPr/>
+        </p:nvSpPr>
+        <p:spPr>
+          <a:xfrm>
+            <a:off x="10942204" y="6481737"/>
+            <a:ext cx="1217443" cy="365125"/>
+          </a:xfrm>
+          <a:prstGeom prst="rect">
+            <a:avLst/>
+          </a:prstGeom>
+        </p:spPr>
+        <p:txBody>
+          <a:bodyPr vert="horz" lIns="91440" tIns="45720" rIns="91440" bIns="45720" rtlCol="0" anchor="ctr"/>
+          <a:lstStyle>
+            <a:defPPr>
+              <a:defRPr lang="en-US"/>
+            </a:defPPr>
+            <a:lvl1pPr marL="0" algn="ctr" defTabSz="914400" rtl="0" eaLnBrk="1" latinLnBrk="0" hangingPunct="1">
+              <a:defRPr sz="1200" kern="1200">
+                <a:solidFill>
+                  <a:schemeClr val="tx1">
+                    <a:tint val="75000"/>
+                  </a:schemeClr>
+                </a:solidFill>
+                <a:latin typeface="+mn-lt"/>
+                <a:ea typeface="+mn-ea"/>
+                <a:cs typeface="+mn-cs"/>
+              </a:defRPr>
+            </a:lvl1pPr>
+            <a:lvl2pPr marL="457200" algn="l" defTabSz="914400" rtl="0" eaLnBrk="1" latinLnBrk="0" hangingPunct="1">
+              <a:defRPr sz="1800" kern="1200">
+                <a:solidFill>
+                  <a:schemeClr val="tx1"/>
+                </a:solidFill>
+                <a:latin typeface="+mn-lt"/>
+                <a:ea typeface="+mn-ea"/>
+                <a:cs typeface="+mn-cs"/>
+              </a:defRPr>
+            </a:lvl2pPr>
+            <a:lvl3pPr marL="914400" algn="l" defTabSz="914400" rtl="0" eaLnBrk="1" latinLnBrk="0" hangingPunct="1">
+              <a:defRPr sz="1800" kern="1200">
+                <a:solidFill>
+                  <a:schemeClr val="tx1"/>
+                </a:solidFill>
+                <a:latin typeface="+mn-lt"/>
+                <a:ea typeface="+mn-ea"/>
+                <a:cs typeface="+mn-cs"/>
+              </a:defRPr>
+            </a:lvl3pPr>
+            <a:lvl4pPr marL="1371600" algn="l" defTabSz="914400" rtl="0" eaLnBrk="1" latinLnBrk="0" hangingPunct="1">
+              <a:defRPr sz="1800" kern="1200">
+                <a:solidFill>
+                  <a:schemeClr val="tx1"/>
+                </a:solidFill>
+                <a:latin typeface="+mn-lt"/>
+                <a:ea typeface="+mn-ea"/>
+                <a:cs typeface="+mn-cs"/>
+              </a:defRPr>
+            </a:lvl4pPr>
+            <a:lvl5pPr marL="1828800" algn="l" defTabSz="914400" rtl="0" eaLnBrk="1" latinLnBrk="0" hangingPunct="1">
+              <a:defRPr sz="1800" kern="1200">
+                <a:solidFill>
+                  <a:schemeClr val="tx1"/>
+                </a:solidFill>
+                <a:latin typeface="+mn-lt"/>
+                <a:ea typeface="+mn-ea"/>
+                <a:cs typeface="+mn-cs"/>
+              </a:defRPr>
+            </a:lvl5pPr>
+            <a:lvl6pPr marL="2286000" algn="l" defTabSz="914400" rtl="0" eaLnBrk="1" latinLnBrk="0" hangingPunct="1">
+              <a:defRPr sz="1800" kern="1200">
+                <a:solidFill>
+                  <a:schemeClr val="tx1"/>
+                </a:solidFill>
+                <a:latin typeface="+mn-lt"/>
+                <a:ea typeface="+mn-ea"/>
+                <a:cs typeface="+mn-cs"/>
+              </a:defRPr>
+            </a:lvl6pPr>
+            <a:lvl7pPr marL="2743200" algn="l" defTabSz="914400" rtl="0" eaLnBrk="1" latinLnBrk="0" hangingPunct="1">
+              <a:defRPr sz="1800" kern="1200">
+                <a:solidFill>
+                  <a:schemeClr val="tx1"/>
+                </a:solidFill>
+                <a:latin typeface="+mn-lt"/>
+                <a:ea typeface="+mn-ea"/>
+                <a:cs typeface="+mn-cs"/>
+              </a:defRPr>
+            </a:lvl7pPr>
+            <a:lvl8pPr marL="3200400" algn="l" defTabSz="914400" rtl="0" eaLnBrk="1" latinLnBrk="0" hangingPunct="1">
+              <a:defRPr sz="1800" kern="1200">
+                <a:solidFill>
+                  <a:schemeClr val="tx1"/>
+                </a:solidFill>
+                <a:latin typeface="+mn-lt"/>
+                <a:ea typeface="+mn-ea"/>
+                <a:cs typeface="+mn-cs"/>
+              </a:defRPr>
+            </a:lvl8pPr>
+            <a:lvl9pPr marL="3657600" algn="l" defTabSz="914400" rtl="0" eaLnBrk="1" latinLnBrk="0" hangingPunct="1">
+              <a:defRPr sz="1800" kern="1200">
+                <a:solidFill>
+                  <a:schemeClr val="tx1"/>
+                </a:solidFill>
+                <a:latin typeface="+mn-lt"/>
+                <a:ea typeface="+mn-ea"/>
+                <a:cs typeface="+mn-cs"/>
+              </a:defRPr>
+            </a:lvl9pPr>
+          </a:lstStyle>
+          <a:p>
+            <a:pPr marL="0" marR="0" lvl="0" indent="0" algn="ctr" defTabSz="914400" rtl="0" eaLnBrk="1" fontAlgn="auto" latinLnBrk="0" hangingPunct="1">
+              <a:lnSpc>
+                <a:spcPct val="100000"/>
+              </a:lnSpc>
+              <a:spcBef>
+                <a:spcPts val="0"/>
+              </a:spcBef>
+              <a:spcAft>
+                <a:spcPts val="0"/>
+              </a:spcAft>
+              <a:buClrTx/>
+              <a:buSzTx/>
+              <a:buFontTx/>
+              <a:buNone/>
+              <a:tabLst/>
+              <a:defRPr/>
+            </a:pPr>
+            <a:r>
+              <a:rPr kumimoji="0" lang="en-US" sz="1200" b="0" i="0" u="none" strike="noStrike" kern="1200" cap="none" spc="0" normalizeH="0" baseline="0" noProof="0" dirty="0">
+                <a:ln>
+                  <a:noFill/>
+                </a:ln>
+                <a:solidFill>
+                  <a:prstClr val="black">
+                    <a:tint val="75000"/>
+                  </a:prstClr>
+                </a:solidFill>
+                <a:effectLst/>
+                <a:uLnTx/>
+                <a:uFillTx/>
+                <a:latin typeface="Helvetica Neue" panose="02000503000000020004" pitchFamily="2" charset="0"/>
+                <a:ea typeface="Helvetica Neue" panose="02000503000000020004" pitchFamily="2" charset="0"/>
+                <a:cs typeface="Helvetica Neue" panose="02000503000000020004" pitchFamily="2" charset="0"/>
+              </a:rPr>
+              <a:t>architrino.com</a:t>
+            </a:r>
+          </a:p>
+        </p:txBody>
+      </p:sp>
     </p:spTree>
     <p:extLst>
       <p:ext uri="{BB962C8B-B14F-4D97-AF65-F5344CB8AC3E}">
-        <p14:creationId xmlns:p14="http://schemas.microsoft.com/office/powerpoint/2010/main" val="2356624188"/>
+        <ns3:creationId val="2356624188"/>
       </p:ext>
     </p:extLst>
   </p:cSld>
@@ -9760,7 +10072,7 @@
 </file>
 
 <file path=ppt/slides/slide11.xml><?xml version="1.0" encoding="utf-8"?>
-<p:sld xmlns:a="http://schemas.openxmlformats.org/drawingml/2006/main" xmlns:r="http://schemas.openxmlformats.org/officeDocument/2006/relationships" xmlns:p="http://schemas.openxmlformats.org/presentationml/2006/main">
+<p:sld xmlns:a="http://schemas.openxmlformats.org/drawingml/2006/main" xmlns:a16="http://schemas.microsoft.com/office/drawing/2014/main" xmlns:ns3="http://schemas.microsoft.com/office/powerpoint/2010/main" xmlns:p="http://schemas.openxmlformats.org/presentationml/2006/main">
   <p:cSld>
     <p:bg>
       <p:bgPr>
@@ -9789,7 +10101,7 @@
           <p:cNvPr id="2" name="TextBox 1">
             <a:extLst>
               <a:ext uri="{FF2B5EF4-FFF2-40B4-BE49-F238E27FC236}">
-                <a16:creationId xmlns:a16="http://schemas.microsoft.com/office/drawing/2014/main" id="{1D77ACA5-3691-8FEB-0266-8D47BBCCF4C6}"/>
+                <a16:creationId id="{1D77ACA5-3691-8FEB-0266-8D47BBCCF4C6}"/>
               </a:ext>
             </a:extLst>
           </p:cNvPr>
@@ -9833,7 +10145,7 @@
                 <a:ea typeface="Helvetica Neue Thin" panose="020B0403020202020204" pitchFamily="34" charset="0"/>
                 <a:cs typeface="Helvetica Neue" panose="02000503000000020004" pitchFamily="2" charset="0"/>
               </a:rPr>
-              <a:t>neoclassical.ai</a:t>
+              <a:t/>
             </a:r>
           </a:p>
           <a:p>
@@ -9971,10 +10283,166 @@
           </a:p>
         </p:txBody>
       </p:sp>
+      <p:sp>
+        <p:nvSpPr>
+          <p:cNvPr id="3" name="Footer Placeholder 3"/>
+          <p:cNvSpPr txBox="1">
+            <a:spLocks/>
+          </p:cNvSpPr>
+          <p:nvPr/>
+        </p:nvSpPr>
+        <p:spPr>
+          <a:xfrm>
+            <a:off x="10942204" y="6481737"/>
+            <a:ext cx="1217443" cy="365125"/>
+          </a:xfrm>
+          <a:prstGeom prst="rect">
+            <a:avLst/>
+          </a:prstGeom>
+        </p:spPr>
+        <p:txBody>
+          <a:bodyPr vert="horz" lIns="91440" tIns="45720" rIns="91440" bIns="45720" rtlCol="0" anchor="ctr"/>
+          <a:lstStyle>
+            <a:defPPr>
+              <a:defRPr lang="en-US"/>
+            </a:defPPr>
+            <a:lvl1pPr marL="0" algn="ctr" defTabSz="914400" rtl="0" eaLnBrk="1" latinLnBrk="0" hangingPunct="1">
+              <a:defRPr sz="1200" kern="1200">
+                <a:solidFill>
+                  <a:schemeClr val="tx1">
+                    <a:tint val="75000"/>
+                  </a:schemeClr>
+                </a:solidFill>
+                <a:latin typeface="+mn-lt"/>
+                <a:ea typeface="+mn-ea"/>
+                <a:cs typeface="+mn-cs"/>
+              </a:defRPr>
+            </a:lvl1pPr>
+            <a:lvl2pPr marL="457200" algn="l" defTabSz="914400" rtl="0" eaLnBrk="1" latinLnBrk="0" hangingPunct="1">
+              <a:defRPr sz="1800" kern="1200">
+                <a:solidFill>
+                  <a:schemeClr val="tx1"/>
+                </a:solidFill>
+                <a:latin typeface="+mn-lt"/>
+                <a:ea typeface="+mn-ea"/>
+                <a:cs typeface="+mn-cs"/>
+              </a:defRPr>
+            </a:lvl2pPr>
+            <a:lvl3pPr marL="914400" algn="l" defTabSz="914400" rtl="0" eaLnBrk="1" latinLnBrk="0" hangingPunct="1">
+              <a:defRPr sz="1800" kern="1200">
+                <a:solidFill>
+                  <a:schemeClr val="tx1"/>
+                </a:solidFill>
+                <a:latin typeface="+mn-lt"/>
+                <a:ea typeface="+mn-ea"/>
+                <a:cs typeface="+mn-cs"/>
+              </a:defRPr>
+            </a:lvl3pPr>
+            <a:lvl4pPr marL="1371600" algn="l" defTabSz="914400" rtl="0" eaLnBrk="1" latinLnBrk="0" hangingPunct="1">
+              <a:defRPr sz="1800" kern="1200">
+                <a:solidFill>
+                  <a:schemeClr val="tx1"/>
+                </a:solidFill>
+                <a:latin typeface="+mn-lt"/>
+                <a:ea typeface="+mn-ea"/>
+                <a:cs typeface="+mn-cs"/>
+              </a:defRPr>
+            </a:lvl4pPr>
+            <a:lvl5pPr marL="1828800" algn="l" defTabSz="914400" rtl="0" eaLnBrk="1" latinLnBrk="0" hangingPunct="1">
+              <a:defRPr sz="1800" kern="1200">
+                <a:solidFill>
+                  <a:schemeClr val="tx1"/>
+                </a:solidFill>
+                <a:latin typeface="+mn-lt"/>
+                <a:ea typeface="+mn-ea"/>
+                <a:cs typeface="+mn-cs"/>
+              </a:defRPr>
+            </a:lvl5pPr>
+            <a:lvl6pPr marL="2286000" algn="l" defTabSz="914400" rtl="0" eaLnBrk="1" latinLnBrk="0" hangingPunct="1">
+              <a:defRPr sz="1800" kern="1200">
+                <a:solidFill>
+                  <a:schemeClr val="tx1"/>
+                </a:solidFill>
+                <a:latin typeface="+mn-lt"/>
+                <a:ea typeface="+mn-ea"/>
+                <a:cs typeface="+mn-cs"/>
+              </a:defRPr>
+            </a:lvl6pPr>
+            <a:lvl7pPr marL="2743200" algn="l" defTabSz="914400" rtl="0" eaLnBrk="1" latinLnBrk="0" hangingPunct="1">
+              <a:defRPr sz="1800" kern="1200">
+                <a:solidFill>
+                  <a:schemeClr val="tx1"/>
+                </a:solidFill>
+                <a:latin typeface="+mn-lt"/>
+                <a:ea typeface="+mn-ea"/>
+                <a:cs typeface="+mn-cs"/>
+              </a:defRPr>
+            </a:lvl7pPr>
+            <a:lvl8pPr marL="3200400" algn="l" defTabSz="914400" rtl="0" eaLnBrk="1" latinLnBrk="0" hangingPunct="1">
+              <a:defRPr sz="1800" kern="1200">
+                <a:solidFill>
+                  <a:schemeClr val="tx1"/>
+                </a:solidFill>
+                <a:latin typeface="+mn-lt"/>
+                <a:ea typeface="+mn-ea"/>
+                <a:cs typeface="+mn-cs"/>
+              </a:defRPr>
+            </a:lvl8pPr>
+            <a:lvl9pPr marL="3657600" algn="l" defTabSz="914400" rtl="0" eaLnBrk="1" latinLnBrk="0" hangingPunct="1">
+              <a:defRPr sz="1800" kern="1200">
+                <a:solidFill>
+                  <a:schemeClr val="tx1"/>
+                </a:solidFill>
+                <a:latin typeface="+mn-lt"/>
+                <a:ea typeface="+mn-ea"/>
+                <a:cs typeface="+mn-cs"/>
+              </a:defRPr>
+            </a:lvl9pPr>
+          </a:lstStyle>
+          <a:p>
+            <a:pPr marL="0" marR="0" lvl="0" indent="0" algn="ctr" defTabSz="914400" rtl="0" eaLnBrk="1" fontAlgn="auto" latinLnBrk="0" hangingPunct="1">
+              <a:lnSpc>
+                <a:spcPct val="100000"/>
+              </a:lnSpc>
+              <a:spcBef>
+                <a:spcPts val="0"/>
+              </a:spcBef>
+              <a:spcAft>
+                <a:spcPts val="0"/>
+              </a:spcAft>
+              <a:buClrTx/>
+              <a:buSzTx/>
+              <a:buFontTx/>
+              <a:buNone/>
+              <a:tabLst/>
+              <a:defRPr/>
+            </a:pPr>
+            <a:r>
+              <a:rPr kumimoji="0" lang="en-US" sz="1200" b="0" i="0" u="none" strike="noStrike" kern="1200" cap="none" spc="0" normalizeH="0" baseline="0" noProof="0" dirty="0">
+                <a:ln>
+                  <a:noFill/>
+                </a:ln>
+                <a:solidFill>
+                  <a:prstClr val="black">
+                    <a:tint val="75000"/>
+                  </a:prstClr>
+                </a:solidFill>
+                <a:effectLst/>
+                <a:uLnTx/>
+                <a:uFillTx/>
+                <a:latin typeface="Helvetica Neue" panose="02000503000000020004" pitchFamily="2" charset="0"/>
+                <a:ea typeface="Helvetica Neue" panose="02000503000000020004" pitchFamily="2" charset="0"/>
+                <a:cs typeface="Helvetica Neue" panose="02000503000000020004" pitchFamily="2" charset="0"/>
+              </a:rPr>
+              <a:t>architrino.com</a:t>
+            </a:r>
+          </a:p>
+        </p:txBody>
+      </p:sp>
     </p:spTree>
     <p:extLst>
       <p:ext uri="{BB962C8B-B14F-4D97-AF65-F5344CB8AC3E}">
-        <p14:creationId xmlns:p14="http://schemas.microsoft.com/office/powerpoint/2010/main" val="3173046040"/>
+        <ns3:creationId val="3173046040"/>
       </p:ext>
     </p:extLst>
   </p:cSld>
@@ -9985,7 +10453,7 @@
 </file>
 
 <file path=ppt/slides/slide12.xml><?xml version="1.0" encoding="utf-8"?>
-<p:sld xmlns:a="http://schemas.openxmlformats.org/drawingml/2006/main" xmlns:r="http://schemas.openxmlformats.org/officeDocument/2006/relationships" xmlns:p="http://schemas.openxmlformats.org/presentationml/2006/main">
+<p:sld xmlns:a="http://schemas.openxmlformats.org/drawingml/2006/main" xmlns:a16="http://schemas.microsoft.com/office/drawing/2014/main" xmlns:ns3="http://schemas.microsoft.com/office/powerpoint/2010/main" xmlns:p="http://schemas.openxmlformats.org/presentationml/2006/main">
   <p:cSld>
     <p:bg>
       <p:bgPr>
@@ -10014,7 +10482,7 @@
           <p:cNvPr id="2" name="TextBox 1">
             <a:extLst>
               <a:ext uri="{FF2B5EF4-FFF2-40B4-BE49-F238E27FC236}">
-                <a16:creationId xmlns:a16="http://schemas.microsoft.com/office/drawing/2014/main" id="{1D77ACA5-3691-8FEB-0266-8D47BBCCF4C6}"/>
+                <a16:creationId id="{1D77ACA5-3691-8FEB-0266-8D47BBCCF4C6}"/>
               </a:ext>
             </a:extLst>
           </p:cNvPr>
@@ -10058,7 +10526,7 @@
                 <a:ea typeface="Helvetica Neue Thin" panose="020B0403020202020204" pitchFamily="34" charset="0"/>
                 <a:cs typeface="Helvetica Neue" panose="02000503000000020004" pitchFamily="2" charset="0"/>
               </a:rPr>
-              <a:t>neoclassical.ai</a:t>
+              <a:t/>
             </a:r>
           </a:p>
           <a:p>
@@ -10196,10 +10664,166 @@
           </a:p>
         </p:txBody>
       </p:sp>
+      <p:sp>
+        <p:nvSpPr>
+          <p:cNvPr id="3" name="Footer Placeholder 3"/>
+          <p:cNvSpPr txBox="1">
+            <a:spLocks/>
+          </p:cNvSpPr>
+          <p:nvPr/>
+        </p:nvSpPr>
+        <p:spPr>
+          <a:xfrm>
+            <a:off x="10942204" y="6481737"/>
+            <a:ext cx="1217443" cy="365125"/>
+          </a:xfrm>
+          <a:prstGeom prst="rect">
+            <a:avLst/>
+          </a:prstGeom>
+        </p:spPr>
+        <p:txBody>
+          <a:bodyPr vert="horz" lIns="91440" tIns="45720" rIns="91440" bIns="45720" rtlCol="0" anchor="ctr"/>
+          <a:lstStyle>
+            <a:defPPr>
+              <a:defRPr lang="en-US"/>
+            </a:defPPr>
+            <a:lvl1pPr marL="0" algn="ctr" defTabSz="914400" rtl="0" eaLnBrk="1" latinLnBrk="0" hangingPunct="1">
+              <a:defRPr sz="1200" kern="1200">
+                <a:solidFill>
+                  <a:schemeClr val="tx1">
+                    <a:tint val="75000"/>
+                  </a:schemeClr>
+                </a:solidFill>
+                <a:latin typeface="+mn-lt"/>
+                <a:ea typeface="+mn-ea"/>
+                <a:cs typeface="+mn-cs"/>
+              </a:defRPr>
+            </a:lvl1pPr>
+            <a:lvl2pPr marL="457200" algn="l" defTabSz="914400" rtl="0" eaLnBrk="1" latinLnBrk="0" hangingPunct="1">
+              <a:defRPr sz="1800" kern="1200">
+                <a:solidFill>
+                  <a:schemeClr val="tx1"/>
+                </a:solidFill>
+                <a:latin typeface="+mn-lt"/>
+                <a:ea typeface="+mn-ea"/>
+                <a:cs typeface="+mn-cs"/>
+              </a:defRPr>
+            </a:lvl2pPr>
+            <a:lvl3pPr marL="914400" algn="l" defTabSz="914400" rtl="0" eaLnBrk="1" latinLnBrk="0" hangingPunct="1">
+              <a:defRPr sz="1800" kern="1200">
+                <a:solidFill>
+                  <a:schemeClr val="tx1"/>
+                </a:solidFill>
+                <a:latin typeface="+mn-lt"/>
+                <a:ea typeface="+mn-ea"/>
+                <a:cs typeface="+mn-cs"/>
+              </a:defRPr>
+            </a:lvl3pPr>
+            <a:lvl4pPr marL="1371600" algn="l" defTabSz="914400" rtl="0" eaLnBrk="1" latinLnBrk="0" hangingPunct="1">
+              <a:defRPr sz="1800" kern="1200">
+                <a:solidFill>
+                  <a:schemeClr val="tx1"/>
+                </a:solidFill>
+                <a:latin typeface="+mn-lt"/>
+                <a:ea typeface="+mn-ea"/>
+                <a:cs typeface="+mn-cs"/>
+              </a:defRPr>
+            </a:lvl4pPr>
+            <a:lvl5pPr marL="1828800" algn="l" defTabSz="914400" rtl="0" eaLnBrk="1" latinLnBrk="0" hangingPunct="1">
+              <a:defRPr sz="1800" kern="1200">
+                <a:solidFill>
+                  <a:schemeClr val="tx1"/>
+                </a:solidFill>
+                <a:latin typeface="+mn-lt"/>
+                <a:ea typeface="+mn-ea"/>
+                <a:cs typeface="+mn-cs"/>
+              </a:defRPr>
+            </a:lvl5pPr>
+            <a:lvl6pPr marL="2286000" algn="l" defTabSz="914400" rtl="0" eaLnBrk="1" latinLnBrk="0" hangingPunct="1">
+              <a:defRPr sz="1800" kern="1200">
+                <a:solidFill>
+                  <a:schemeClr val="tx1"/>
+                </a:solidFill>
+                <a:latin typeface="+mn-lt"/>
+                <a:ea typeface="+mn-ea"/>
+                <a:cs typeface="+mn-cs"/>
+              </a:defRPr>
+            </a:lvl6pPr>
+            <a:lvl7pPr marL="2743200" algn="l" defTabSz="914400" rtl="0" eaLnBrk="1" latinLnBrk="0" hangingPunct="1">
+              <a:defRPr sz="1800" kern="1200">
+                <a:solidFill>
+                  <a:schemeClr val="tx1"/>
+                </a:solidFill>
+                <a:latin typeface="+mn-lt"/>
+                <a:ea typeface="+mn-ea"/>
+                <a:cs typeface="+mn-cs"/>
+              </a:defRPr>
+            </a:lvl7pPr>
+            <a:lvl8pPr marL="3200400" algn="l" defTabSz="914400" rtl="0" eaLnBrk="1" latinLnBrk="0" hangingPunct="1">
+              <a:defRPr sz="1800" kern="1200">
+                <a:solidFill>
+                  <a:schemeClr val="tx1"/>
+                </a:solidFill>
+                <a:latin typeface="+mn-lt"/>
+                <a:ea typeface="+mn-ea"/>
+                <a:cs typeface="+mn-cs"/>
+              </a:defRPr>
+            </a:lvl8pPr>
+            <a:lvl9pPr marL="3657600" algn="l" defTabSz="914400" rtl="0" eaLnBrk="1" latinLnBrk="0" hangingPunct="1">
+              <a:defRPr sz="1800" kern="1200">
+                <a:solidFill>
+                  <a:schemeClr val="tx1"/>
+                </a:solidFill>
+                <a:latin typeface="+mn-lt"/>
+                <a:ea typeface="+mn-ea"/>
+                <a:cs typeface="+mn-cs"/>
+              </a:defRPr>
+            </a:lvl9pPr>
+          </a:lstStyle>
+          <a:p>
+            <a:pPr marL="0" marR="0" lvl="0" indent="0" algn="ctr" defTabSz="914400" rtl="0" eaLnBrk="1" fontAlgn="auto" latinLnBrk="0" hangingPunct="1">
+              <a:lnSpc>
+                <a:spcPct val="100000"/>
+              </a:lnSpc>
+              <a:spcBef>
+                <a:spcPts val="0"/>
+              </a:spcBef>
+              <a:spcAft>
+                <a:spcPts val="0"/>
+              </a:spcAft>
+              <a:buClrTx/>
+              <a:buSzTx/>
+              <a:buFontTx/>
+              <a:buNone/>
+              <a:tabLst/>
+              <a:defRPr/>
+            </a:pPr>
+            <a:r>
+              <a:rPr kumimoji="0" lang="en-US" sz="1200" b="0" i="0" u="none" strike="noStrike" kern="1200" cap="none" spc="0" normalizeH="0" baseline="0" noProof="0" dirty="0">
+                <a:ln>
+                  <a:noFill/>
+                </a:ln>
+                <a:solidFill>
+                  <a:prstClr val="black">
+                    <a:tint val="75000"/>
+                  </a:prstClr>
+                </a:solidFill>
+                <a:effectLst/>
+                <a:uLnTx/>
+                <a:uFillTx/>
+                <a:latin typeface="Helvetica Neue" panose="02000503000000020004" pitchFamily="2" charset="0"/>
+                <a:ea typeface="Helvetica Neue" panose="02000503000000020004" pitchFamily="2" charset="0"/>
+                <a:cs typeface="Helvetica Neue" panose="02000503000000020004" pitchFamily="2" charset="0"/>
+              </a:rPr>
+              <a:t>architrino.com</a:t>
+            </a:r>
+          </a:p>
+        </p:txBody>
+      </p:sp>
     </p:spTree>
     <p:extLst>
       <p:ext uri="{BB962C8B-B14F-4D97-AF65-F5344CB8AC3E}">
-        <p14:creationId xmlns:p14="http://schemas.microsoft.com/office/powerpoint/2010/main" val="3452473203"/>
+        <ns3:creationId val="3452473203"/>
       </p:ext>
     </p:extLst>
   </p:cSld>
@@ -10210,7 +10834,7 @@
 </file>
 
 <file path=ppt/slides/slide13.xml><?xml version="1.0" encoding="utf-8"?>
-<p:sld xmlns:a="http://schemas.openxmlformats.org/drawingml/2006/main" xmlns:r="http://schemas.openxmlformats.org/officeDocument/2006/relationships" xmlns:p="http://schemas.openxmlformats.org/presentationml/2006/main">
+<p:sld xmlns:a="http://schemas.openxmlformats.org/drawingml/2006/main" xmlns:a16="http://schemas.microsoft.com/office/drawing/2014/main" xmlns:ns3="http://schemas.microsoft.com/office/powerpoint/2010/main" xmlns:p="http://schemas.openxmlformats.org/presentationml/2006/main">
   <p:cSld>
     <p:bg>
       <p:bgPr>
@@ -10239,7 +10863,7 @@
           <p:cNvPr id="2" name="TextBox 1">
             <a:extLst>
               <a:ext uri="{FF2B5EF4-FFF2-40B4-BE49-F238E27FC236}">
-                <a16:creationId xmlns:a16="http://schemas.microsoft.com/office/drawing/2014/main" id="{1D77ACA5-3691-8FEB-0266-8D47BBCCF4C6}"/>
+                <a16:creationId id="{1D77ACA5-3691-8FEB-0266-8D47BBCCF4C6}"/>
               </a:ext>
             </a:extLst>
           </p:cNvPr>
@@ -10283,7 +10907,7 @@
                 <a:ea typeface="Helvetica Neue Thin" panose="020B0403020202020204" pitchFamily="34" charset="0"/>
                 <a:cs typeface="Helvetica Neue" panose="02000503000000020004" pitchFamily="2" charset="0"/>
               </a:rPr>
-              <a:t>neoclassical.ai</a:t>
+              <a:t/>
             </a:r>
           </a:p>
           <a:p>
@@ -10363,7 +10987,7 @@
                 <a:ea typeface="Helvetica Neue Condensed Black" panose="02000503000000020004" pitchFamily="2" charset="0"/>
                 <a:cs typeface="Helvetica Neue Condensed Black" panose="02000503000000020004" pitchFamily="2" charset="0"/>
               </a:rPr>
-              <a:t>Point Potentials Experiment </a:t>
+              <a:t>Architrinos Experiment </a:t>
             </a:r>
             <a:r>
               <a:rPr kumimoji="0" lang="en-US" sz="11500" b="1" i="0" u="none" strike="noStrike" kern="1200" cap="none" spc="0" normalizeH="0" baseline="0" noProof="0" dirty="0">
@@ -10385,10 +11009,166 @@
           </a:p>
         </p:txBody>
       </p:sp>
+      <p:sp>
+        <p:nvSpPr>
+          <p:cNvPr id="3" name="Footer Placeholder 3"/>
+          <p:cNvSpPr txBox="1">
+            <a:spLocks/>
+          </p:cNvSpPr>
+          <p:nvPr/>
+        </p:nvSpPr>
+        <p:spPr>
+          <a:xfrm>
+            <a:off x="10942204" y="6481737"/>
+            <a:ext cx="1217443" cy="365125"/>
+          </a:xfrm>
+          <a:prstGeom prst="rect">
+            <a:avLst/>
+          </a:prstGeom>
+        </p:spPr>
+        <p:txBody>
+          <a:bodyPr vert="horz" lIns="91440" tIns="45720" rIns="91440" bIns="45720" rtlCol="0" anchor="ctr"/>
+          <a:lstStyle>
+            <a:defPPr>
+              <a:defRPr lang="en-US"/>
+            </a:defPPr>
+            <a:lvl1pPr marL="0" algn="ctr" defTabSz="914400" rtl="0" eaLnBrk="1" latinLnBrk="0" hangingPunct="1">
+              <a:defRPr sz="1200" kern="1200">
+                <a:solidFill>
+                  <a:schemeClr val="tx1">
+                    <a:tint val="75000"/>
+                  </a:schemeClr>
+                </a:solidFill>
+                <a:latin typeface="+mn-lt"/>
+                <a:ea typeface="+mn-ea"/>
+                <a:cs typeface="+mn-cs"/>
+              </a:defRPr>
+            </a:lvl1pPr>
+            <a:lvl2pPr marL="457200" algn="l" defTabSz="914400" rtl="0" eaLnBrk="1" latinLnBrk="0" hangingPunct="1">
+              <a:defRPr sz="1800" kern="1200">
+                <a:solidFill>
+                  <a:schemeClr val="tx1"/>
+                </a:solidFill>
+                <a:latin typeface="+mn-lt"/>
+                <a:ea typeface="+mn-ea"/>
+                <a:cs typeface="+mn-cs"/>
+              </a:defRPr>
+            </a:lvl2pPr>
+            <a:lvl3pPr marL="914400" algn="l" defTabSz="914400" rtl="0" eaLnBrk="1" latinLnBrk="0" hangingPunct="1">
+              <a:defRPr sz="1800" kern="1200">
+                <a:solidFill>
+                  <a:schemeClr val="tx1"/>
+                </a:solidFill>
+                <a:latin typeface="+mn-lt"/>
+                <a:ea typeface="+mn-ea"/>
+                <a:cs typeface="+mn-cs"/>
+              </a:defRPr>
+            </a:lvl3pPr>
+            <a:lvl4pPr marL="1371600" algn="l" defTabSz="914400" rtl="0" eaLnBrk="1" latinLnBrk="0" hangingPunct="1">
+              <a:defRPr sz="1800" kern="1200">
+                <a:solidFill>
+                  <a:schemeClr val="tx1"/>
+                </a:solidFill>
+                <a:latin typeface="+mn-lt"/>
+                <a:ea typeface="+mn-ea"/>
+                <a:cs typeface="+mn-cs"/>
+              </a:defRPr>
+            </a:lvl4pPr>
+            <a:lvl5pPr marL="1828800" algn="l" defTabSz="914400" rtl="0" eaLnBrk="1" latinLnBrk="0" hangingPunct="1">
+              <a:defRPr sz="1800" kern="1200">
+                <a:solidFill>
+                  <a:schemeClr val="tx1"/>
+                </a:solidFill>
+                <a:latin typeface="+mn-lt"/>
+                <a:ea typeface="+mn-ea"/>
+                <a:cs typeface="+mn-cs"/>
+              </a:defRPr>
+            </a:lvl5pPr>
+            <a:lvl6pPr marL="2286000" algn="l" defTabSz="914400" rtl="0" eaLnBrk="1" latinLnBrk="0" hangingPunct="1">
+              <a:defRPr sz="1800" kern="1200">
+                <a:solidFill>
+                  <a:schemeClr val="tx1"/>
+                </a:solidFill>
+                <a:latin typeface="+mn-lt"/>
+                <a:ea typeface="+mn-ea"/>
+                <a:cs typeface="+mn-cs"/>
+              </a:defRPr>
+            </a:lvl6pPr>
+            <a:lvl7pPr marL="2743200" algn="l" defTabSz="914400" rtl="0" eaLnBrk="1" latinLnBrk="0" hangingPunct="1">
+              <a:defRPr sz="1800" kern="1200">
+                <a:solidFill>
+                  <a:schemeClr val="tx1"/>
+                </a:solidFill>
+                <a:latin typeface="+mn-lt"/>
+                <a:ea typeface="+mn-ea"/>
+                <a:cs typeface="+mn-cs"/>
+              </a:defRPr>
+            </a:lvl7pPr>
+            <a:lvl8pPr marL="3200400" algn="l" defTabSz="914400" rtl="0" eaLnBrk="1" latinLnBrk="0" hangingPunct="1">
+              <a:defRPr sz="1800" kern="1200">
+                <a:solidFill>
+                  <a:schemeClr val="tx1"/>
+                </a:solidFill>
+                <a:latin typeface="+mn-lt"/>
+                <a:ea typeface="+mn-ea"/>
+                <a:cs typeface="+mn-cs"/>
+              </a:defRPr>
+            </a:lvl8pPr>
+            <a:lvl9pPr marL="3657600" algn="l" defTabSz="914400" rtl="0" eaLnBrk="1" latinLnBrk="0" hangingPunct="1">
+              <a:defRPr sz="1800" kern="1200">
+                <a:solidFill>
+                  <a:schemeClr val="tx1"/>
+                </a:solidFill>
+                <a:latin typeface="+mn-lt"/>
+                <a:ea typeface="+mn-ea"/>
+                <a:cs typeface="+mn-cs"/>
+              </a:defRPr>
+            </a:lvl9pPr>
+          </a:lstStyle>
+          <a:p>
+            <a:pPr marL="0" marR="0" lvl="0" indent="0" algn="ctr" defTabSz="914400" rtl="0" eaLnBrk="1" fontAlgn="auto" latinLnBrk="0" hangingPunct="1">
+              <a:lnSpc>
+                <a:spcPct val="100000"/>
+              </a:lnSpc>
+              <a:spcBef>
+                <a:spcPts val="0"/>
+              </a:spcBef>
+              <a:spcAft>
+                <a:spcPts val="0"/>
+              </a:spcAft>
+              <a:buClrTx/>
+              <a:buSzTx/>
+              <a:buFontTx/>
+              <a:buNone/>
+              <a:tabLst/>
+              <a:defRPr/>
+            </a:pPr>
+            <a:r>
+              <a:rPr kumimoji="0" lang="en-US" sz="1200" b="0" i="0" u="none" strike="noStrike" kern="1200" cap="none" spc="0" normalizeH="0" baseline="0" noProof="0" dirty="0">
+                <a:ln>
+                  <a:noFill/>
+                </a:ln>
+                <a:solidFill>
+                  <a:prstClr val="black">
+                    <a:tint val="75000"/>
+                  </a:prstClr>
+                </a:solidFill>
+                <a:effectLst/>
+                <a:uLnTx/>
+                <a:uFillTx/>
+                <a:latin typeface="Helvetica Neue" panose="02000503000000020004" pitchFamily="2" charset="0"/>
+                <a:ea typeface="Helvetica Neue" panose="02000503000000020004" pitchFamily="2" charset="0"/>
+                <a:cs typeface="Helvetica Neue" panose="02000503000000020004" pitchFamily="2" charset="0"/>
+              </a:rPr>
+              <a:t>architrino.com</a:t>
+            </a:r>
+          </a:p>
+        </p:txBody>
+      </p:sp>
     </p:spTree>
     <p:extLst>
       <p:ext uri="{BB962C8B-B14F-4D97-AF65-F5344CB8AC3E}">
-        <p14:creationId xmlns:p14="http://schemas.microsoft.com/office/powerpoint/2010/main" val="921020280"/>
+        <ns3:creationId val="921020280"/>
       </p:ext>
     </p:extLst>
   </p:cSld>
@@ -10399,7 +11179,7 @@
 </file>
 
 <file path=ppt/slides/slide14.xml><?xml version="1.0" encoding="utf-8"?>
-<p:sld xmlns:a="http://schemas.openxmlformats.org/drawingml/2006/main" xmlns:r="http://schemas.openxmlformats.org/officeDocument/2006/relationships" xmlns:p="http://schemas.openxmlformats.org/presentationml/2006/main">
+<p:sld xmlns:a="http://schemas.openxmlformats.org/drawingml/2006/main" xmlns:a16="http://schemas.microsoft.com/office/drawing/2014/main" xmlns:ns4="http://schemas.microsoft.com/office/powerpoint/2010/main" xmlns:p="http://schemas.openxmlformats.org/presentationml/2006/main" xmlns:r="http://schemas.openxmlformats.org/officeDocument/2006/relationships">
   <p:cSld>
     <p:bg>
       <p:bgPr>
@@ -10428,7 +11208,7 @@
           <p:cNvPr id="2" name="TextBox 1">
             <a:extLst>
               <a:ext uri="{FF2B5EF4-FFF2-40B4-BE49-F238E27FC236}">
-                <a16:creationId xmlns:a16="http://schemas.microsoft.com/office/drawing/2014/main" id="{1D77ACA5-3691-8FEB-0266-8D47BBCCF4C6}"/>
+                <a16:creationId id="{1D77ACA5-3691-8FEB-0266-8D47BBCCF4C6}"/>
               </a:ext>
             </a:extLst>
           </p:cNvPr>
@@ -10472,7 +11252,7 @@
                 <a:ea typeface="Helvetica Neue Thin" panose="020B0403020202020204" pitchFamily="34" charset="0"/>
                 <a:cs typeface="Helvetica Neue" panose="02000503000000020004" pitchFamily="2" charset="0"/>
               </a:rPr>
-              <a:t>neoclassical.ai</a:t>
+              <a:t/>
             </a:r>
           </a:p>
           <a:p>
@@ -10599,7 +11379,7 @@
             <a:hlinkClick r:id="" action="ppaction://media"/>
             <a:extLst>
               <a:ext uri="{FF2B5EF4-FFF2-40B4-BE49-F238E27FC236}">
-                <a16:creationId xmlns:a16="http://schemas.microsoft.com/office/drawing/2014/main" id="{517B54EF-D7B1-E948-D130-5B2C54B785CA}"/>
+                <a16:creationId id="{517B54EF-D7B1-E948-D130-5B2C54B785CA}"/>
               </a:ext>
             </a:extLst>
           </p:cNvPr>
@@ -10610,7 +11390,7 @@
             <a:audioFile r:link="rId2"/>
             <p:extLst>
               <p:ext uri="{DAA4B4D4-6D71-4841-9C94-3DE7FCFB9230}">
-                <p14:media xmlns:p14="http://schemas.microsoft.com/office/powerpoint/2010/main" r:embed="rId1"/>
+                <ns4:media r:embed="rId1"/>
               </p:ext>
             </p:extLst>
           </p:nvPr>
@@ -10631,10 +11411,166 @@
           </a:prstGeom>
         </p:spPr>
       </p:pic>
+      <p:sp>
+        <p:nvSpPr>
+          <p:cNvPr id="3" name="Footer Placeholder 3"/>
+          <p:cNvSpPr txBox="1">
+            <a:spLocks/>
+          </p:cNvSpPr>
+          <p:nvPr/>
+        </p:nvSpPr>
+        <p:spPr>
+          <a:xfrm>
+            <a:off x="10942204" y="6481737"/>
+            <a:ext cx="1217443" cy="365125"/>
+          </a:xfrm>
+          <a:prstGeom prst="rect">
+            <a:avLst/>
+          </a:prstGeom>
+        </p:spPr>
+        <p:txBody>
+          <a:bodyPr vert="horz" lIns="91440" tIns="45720" rIns="91440" bIns="45720" rtlCol="0" anchor="ctr"/>
+          <a:lstStyle>
+            <a:defPPr>
+              <a:defRPr lang="en-US"/>
+            </a:defPPr>
+            <a:lvl1pPr marL="0" algn="ctr" defTabSz="914400" rtl="0" eaLnBrk="1" latinLnBrk="0" hangingPunct="1">
+              <a:defRPr sz="1200" kern="1200">
+                <a:solidFill>
+                  <a:schemeClr val="tx1">
+                    <a:tint val="75000"/>
+                  </a:schemeClr>
+                </a:solidFill>
+                <a:latin typeface="+mn-lt"/>
+                <a:ea typeface="+mn-ea"/>
+                <a:cs typeface="+mn-cs"/>
+              </a:defRPr>
+            </a:lvl1pPr>
+            <a:lvl2pPr marL="457200" algn="l" defTabSz="914400" rtl="0" eaLnBrk="1" latinLnBrk="0" hangingPunct="1">
+              <a:defRPr sz="1800" kern="1200">
+                <a:solidFill>
+                  <a:schemeClr val="tx1"/>
+                </a:solidFill>
+                <a:latin typeface="+mn-lt"/>
+                <a:ea typeface="+mn-ea"/>
+                <a:cs typeface="+mn-cs"/>
+              </a:defRPr>
+            </a:lvl2pPr>
+            <a:lvl3pPr marL="914400" algn="l" defTabSz="914400" rtl="0" eaLnBrk="1" latinLnBrk="0" hangingPunct="1">
+              <a:defRPr sz="1800" kern="1200">
+                <a:solidFill>
+                  <a:schemeClr val="tx1"/>
+                </a:solidFill>
+                <a:latin typeface="+mn-lt"/>
+                <a:ea typeface="+mn-ea"/>
+                <a:cs typeface="+mn-cs"/>
+              </a:defRPr>
+            </a:lvl3pPr>
+            <a:lvl4pPr marL="1371600" algn="l" defTabSz="914400" rtl="0" eaLnBrk="1" latinLnBrk="0" hangingPunct="1">
+              <a:defRPr sz="1800" kern="1200">
+                <a:solidFill>
+                  <a:schemeClr val="tx1"/>
+                </a:solidFill>
+                <a:latin typeface="+mn-lt"/>
+                <a:ea typeface="+mn-ea"/>
+                <a:cs typeface="+mn-cs"/>
+              </a:defRPr>
+            </a:lvl4pPr>
+            <a:lvl5pPr marL="1828800" algn="l" defTabSz="914400" rtl="0" eaLnBrk="1" latinLnBrk="0" hangingPunct="1">
+              <a:defRPr sz="1800" kern="1200">
+                <a:solidFill>
+                  <a:schemeClr val="tx1"/>
+                </a:solidFill>
+                <a:latin typeface="+mn-lt"/>
+                <a:ea typeface="+mn-ea"/>
+                <a:cs typeface="+mn-cs"/>
+              </a:defRPr>
+            </a:lvl5pPr>
+            <a:lvl6pPr marL="2286000" algn="l" defTabSz="914400" rtl="0" eaLnBrk="1" latinLnBrk="0" hangingPunct="1">
+              <a:defRPr sz="1800" kern="1200">
+                <a:solidFill>
+                  <a:schemeClr val="tx1"/>
+                </a:solidFill>
+                <a:latin typeface="+mn-lt"/>
+                <a:ea typeface="+mn-ea"/>
+                <a:cs typeface="+mn-cs"/>
+              </a:defRPr>
+            </a:lvl6pPr>
+            <a:lvl7pPr marL="2743200" algn="l" defTabSz="914400" rtl="0" eaLnBrk="1" latinLnBrk="0" hangingPunct="1">
+              <a:defRPr sz="1800" kern="1200">
+                <a:solidFill>
+                  <a:schemeClr val="tx1"/>
+                </a:solidFill>
+                <a:latin typeface="+mn-lt"/>
+                <a:ea typeface="+mn-ea"/>
+                <a:cs typeface="+mn-cs"/>
+              </a:defRPr>
+            </a:lvl7pPr>
+            <a:lvl8pPr marL="3200400" algn="l" defTabSz="914400" rtl="0" eaLnBrk="1" latinLnBrk="0" hangingPunct="1">
+              <a:defRPr sz="1800" kern="1200">
+                <a:solidFill>
+                  <a:schemeClr val="tx1"/>
+                </a:solidFill>
+                <a:latin typeface="+mn-lt"/>
+                <a:ea typeface="+mn-ea"/>
+                <a:cs typeface="+mn-cs"/>
+              </a:defRPr>
+            </a:lvl8pPr>
+            <a:lvl9pPr marL="3657600" algn="l" defTabSz="914400" rtl="0" eaLnBrk="1" latinLnBrk="0" hangingPunct="1">
+              <a:defRPr sz="1800" kern="1200">
+                <a:solidFill>
+                  <a:schemeClr val="tx1"/>
+                </a:solidFill>
+                <a:latin typeface="+mn-lt"/>
+                <a:ea typeface="+mn-ea"/>
+                <a:cs typeface="+mn-cs"/>
+              </a:defRPr>
+            </a:lvl9pPr>
+          </a:lstStyle>
+          <a:p>
+            <a:pPr marL="0" marR="0" lvl="0" indent="0" algn="ctr" defTabSz="914400" rtl="0" eaLnBrk="1" fontAlgn="auto" latinLnBrk="0" hangingPunct="1">
+              <a:lnSpc>
+                <a:spcPct val="100000"/>
+              </a:lnSpc>
+              <a:spcBef>
+                <a:spcPts val="0"/>
+              </a:spcBef>
+              <a:spcAft>
+                <a:spcPts val="0"/>
+              </a:spcAft>
+              <a:buClrTx/>
+              <a:buSzTx/>
+              <a:buFontTx/>
+              <a:buNone/>
+              <a:tabLst/>
+              <a:defRPr/>
+            </a:pPr>
+            <a:r>
+              <a:rPr kumimoji="0" lang="en-US" sz="1200" b="0" i="0" u="none" strike="noStrike" kern="1200" cap="none" spc="0" normalizeH="0" baseline="0" noProof="0" dirty="0">
+                <a:ln>
+                  <a:noFill/>
+                </a:ln>
+                <a:solidFill>
+                  <a:prstClr val="black">
+                    <a:tint val="75000"/>
+                  </a:prstClr>
+                </a:solidFill>
+                <a:effectLst/>
+                <a:uLnTx/>
+                <a:uFillTx/>
+                <a:latin typeface="Helvetica Neue" panose="02000503000000020004" pitchFamily="2" charset="0"/>
+                <a:ea typeface="Helvetica Neue" panose="02000503000000020004" pitchFamily="2" charset="0"/>
+                <a:cs typeface="Helvetica Neue" panose="02000503000000020004" pitchFamily="2" charset="0"/>
+              </a:rPr>
+              <a:t>architrino.com</a:t>
+            </a:r>
+          </a:p>
+        </p:txBody>
+      </p:sp>
     </p:spTree>
     <p:extLst>
       <p:ext uri="{BB962C8B-B14F-4D97-AF65-F5344CB8AC3E}">
-        <p14:creationId xmlns:p14="http://schemas.microsoft.com/office/powerpoint/2010/main" val="1542055332"/>
+        <ns4:creationId val="1542055332"/>
       </p:ext>
     </p:extLst>
   </p:cSld>
@@ -10729,7 +11665,7 @@
 </file>
 
 <file path=ppt/slides/slide15.xml><?xml version="1.0" encoding="utf-8"?>
-<p:sld xmlns:a="http://schemas.openxmlformats.org/drawingml/2006/main" xmlns:r="http://schemas.openxmlformats.org/officeDocument/2006/relationships" xmlns:p="http://schemas.openxmlformats.org/presentationml/2006/main">
+<p:sld xmlns:a="http://schemas.openxmlformats.org/drawingml/2006/main" xmlns:a16="http://schemas.microsoft.com/office/drawing/2014/main" xmlns:ns3="http://schemas.microsoft.com/office/drawing/2017/decorative" xmlns:ns4="http://schemas.microsoft.com/office/powerpoint/2015/main" xmlns:ns5="http://schemas.microsoft.com/office/powerpoint/2010/main" xmlns:p="http://schemas.openxmlformats.org/presentationml/2006/main">
   <p:cSld>
     <p:bg>
       <p:bgPr>
@@ -10744,7 +11680,7 @@
         <p:cNvPr id="1" name="">
           <a:extLst>
             <a:ext uri="{FF2B5EF4-FFF2-40B4-BE49-F238E27FC236}">
-              <a16:creationId xmlns:a16="http://schemas.microsoft.com/office/drawing/2014/main" id="{98DABE02-FEC0-2F1C-7988-24EADFD765AB}"/>
+              <a16:creationId id="{98DABE02-FEC0-2F1C-7988-24EADFD765AB}"/>
             </a:ext>
           </a:extLst>
         </p:cNvPr>
@@ -10764,10 +11700,10 @@
           <p:cNvPr id="9" name="Rectangle 8">
             <a:extLst>
               <a:ext uri="{FF2B5EF4-FFF2-40B4-BE49-F238E27FC236}">
-                <a16:creationId xmlns:a16="http://schemas.microsoft.com/office/drawing/2014/main" id="{BD731982-FC66-60FC-160D-1276BA6354E5}"/>
+                <a16:creationId id="{BD731982-FC66-60FC-160D-1276BA6354E5}"/>
               </a:ext>
               <a:ext uri="{C183D7F6-B498-43B3-948B-1728B52AA6E4}">
-                <adec:decorative xmlns:adec="http://schemas.microsoft.com/office/drawing/2017/decorative" val="1"/>
+                <ns3:decorative val="1"/>
               </a:ext>
             </a:extLst>
           </p:cNvPr>
@@ -10777,7 +11713,7 @@
           <p:nvPr>
             <p:extLst>
               <p:ext uri="{386F3935-93C4-4BCD-93E2-E3B085C9AB24}">
-                <p16:designElem xmlns:p16="http://schemas.microsoft.com/office/powerpoint/2015/main" val="1"/>
+                <ns4:designElem val="1"/>
               </p:ext>
             </p:extLst>
           </p:nvPr>
@@ -10856,10 +11792,10 @@
           <p:cNvPr id="11" name="Rectangle 10">
             <a:extLst>
               <a:ext uri="{FF2B5EF4-FFF2-40B4-BE49-F238E27FC236}">
-                <a16:creationId xmlns:a16="http://schemas.microsoft.com/office/drawing/2014/main" id="{A9BBF2ED-75A8-CF2B-116D-772D13AE96EB}"/>
+                <a16:creationId id="{A9BBF2ED-75A8-CF2B-116D-772D13AE96EB}"/>
               </a:ext>
               <a:ext uri="{C183D7F6-B498-43B3-948B-1728B52AA6E4}">
-                <adec:decorative xmlns:adec="http://schemas.microsoft.com/office/drawing/2017/decorative" val="1"/>
+                <ns3:decorative val="1"/>
               </a:ext>
             </a:extLst>
           </p:cNvPr>
@@ -10869,7 +11805,7 @@
           <p:nvPr>
             <p:extLst>
               <p:ext uri="{386F3935-93C4-4BCD-93E2-E3B085C9AB24}">
-                <p16:designElem xmlns:p16="http://schemas.microsoft.com/office/powerpoint/2015/main" val="1"/>
+                <ns4:designElem val="1"/>
               </p:ext>
             </p:extLst>
           </p:nvPr>
@@ -10956,7 +11892,7 @@
           <p:cNvPr id="2" name="Title 1">
             <a:extLst>
               <a:ext uri="{FF2B5EF4-FFF2-40B4-BE49-F238E27FC236}">
-                <a16:creationId xmlns:a16="http://schemas.microsoft.com/office/drawing/2014/main" id="{40212831-CBF6-4E57-77FE-DD87FF067B1B}"/>
+                <a16:creationId id="{40212831-CBF6-4E57-77FE-DD87FF067B1B}"/>
               </a:ext>
             </a:extLst>
           </p:cNvPr>
@@ -10995,7 +11931,7 @@
           <p:cNvPr id="3" name="Subtitle 2">
             <a:extLst>
               <a:ext uri="{FF2B5EF4-FFF2-40B4-BE49-F238E27FC236}">
-                <a16:creationId xmlns:a16="http://schemas.microsoft.com/office/drawing/2014/main" id="{C3870AC6-70BC-82C8-1E9B-7DE0338EA5D5}"/>
+                <a16:creationId id="{C3870AC6-70BC-82C8-1E9B-7DE0338EA5D5}"/>
               </a:ext>
             </a:extLst>
           </p:cNvPr>
@@ -11030,10 +11966,10 @@
           <p:cNvPr id="13" name="Straight Connector 12">
             <a:extLst>
               <a:ext uri="{FF2B5EF4-FFF2-40B4-BE49-F238E27FC236}">
-                <a16:creationId xmlns:a16="http://schemas.microsoft.com/office/drawing/2014/main" id="{CBCD6E9C-4871-0110-73B4-D22E7F58AC6C}"/>
+                <a16:creationId id="{CBCD6E9C-4871-0110-73B4-D22E7F58AC6C}"/>
               </a:ext>
               <a:ext uri="{C183D7F6-B498-43B3-948B-1728B52AA6E4}">
-                <adec:decorative xmlns:adec="http://schemas.microsoft.com/office/drawing/2017/decorative" val="1"/>
+                <ns3:decorative val="1"/>
               </a:ext>
             </a:extLst>
           </p:cNvPr>
@@ -11043,7 +11979,7 @@
           <p:nvPr>
             <p:extLst>
               <p:ext uri="{386F3935-93C4-4BCD-93E2-E3B085C9AB24}">
-                <p16:designElem xmlns:p16="http://schemas.microsoft.com/office/powerpoint/2015/main" val="1"/>
+                <ns4:designElem val="1"/>
               </p:ext>
             </p:extLst>
           </p:nvPr>
@@ -11084,7 +12020,7 @@
           <p:cNvPr id="4" name="Footer Placeholder 3">
             <a:extLst>
               <a:ext uri="{FF2B5EF4-FFF2-40B4-BE49-F238E27FC236}">
-                <a16:creationId xmlns:a16="http://schemas.microsoft.com/office/drawing/2014/main" id="{5A99E6CE-07A3-B231-3F78-D9BC59EF8852}"/>
+                <a16:creationId id="{5A99E6CE-07A3-B231-3F78-D9BC59EF8852}"/>
               </a:ext>
             </a:extLst>
           </p:cNvPr>
@@ -11141,7 +12077,163 @@
                 <a:ea typeface="Helvetica Neue" panose="02000503000000020004" pitchFamily="2" charset="0"/>
                 <a:cs typeface="Helvetica Neue" panose="02000503000000020004" pitchFamily="2" charset="0"/>
               </a:rPr>
-              <a:t>J Mark Morris – neoclassical.ai</a:t>
+              <a:t>J Mark Morris</a:t>
+            </a:r>
+          </a:p>
+        </p:txBody>
+      </p:sp>
+      <p:sp>
+        <p:nvSpPr>
+          <p:cNvPr id="14" name="Footer Placeholder 3"/>
+          <p:cNvSpPr txBox="1">
+            <a:spLocks/>
+          </p:cNvSpPr>
+          <p:nvPr/>
+        </p:nvSpPr>
+        <p:spPr>
+          <a:xfrm>
+            <a:off x="10942204" y="6481737"/>
+            <a:ext cx="1217443" cy="365125"/>
+          </a:xfrm>
+          <a:prstGeom prst="rect">
+            <a:avLst/>
+          </a:prstGeom>
+        </p:spPr>
+        <p:txBody>
+          <a:bodyPr vert="horz" lIns="91440" tIns="45720" rIns="91440" bIns="45720" rtlCol="0" anchor="ctr"/>
+          <a:lstStyle>
+            <a:defPPr>
+              <a:defRPr lang="en-US"/>
+            </a:defPPr>
+            <a:lvl1pPr marL="0" algn="ctr" defTabSz="914400" rtl="0" eaLnBrk="1" latinLnBrk="0" hangingPunct="1">
+              <a:defRPr sz="1200" kern="1200">
+                <a:solidFill>
+                  <a:schemeClr val="tx1">
+                    <a:tint val="75000"/>
+                  </a:schemeClr>
+                </a:solidFill>
+                <a:latin typeface="+mn-lt"/>
+                <a:ea typeface="+mn-ea"/>
+                <a:cs typeface="+mn-cs"/>
+              </a:defRPr>
+            </a:lvl1pPr>
+            <a:lvl2pPr marL="457200" algn="l" defTabSz="914400" rtl="0" eaLnBrk="1" latinLnBrk="0" hangingPunct="1">
+              <a:defRPr sz="1800" kern="1200">
+                <a:solidFill>
+                  <a:schemeClr val="tx1"/>
+                </a:solidFill>
+                <a:latin typeface="+mn-lt"/>
+                <a:ea typeface="+mn-ea"/>
+                <a:cs typeface="+mn-cs"/>
+              </a:defRPr>
+            </a:lvl2pPr>
+            <a:lvl3pPr marL="914400" algn="l" defTabSz="914400" rtl="0" eaLnBrk="1" latinLnBrk="0" hangingPunct="1">
+              <a:defRPr sz="1800" kern="1200">
+                <a:solidFill>
+                  <a:schemeClr val="tx1"/>
+                </a:solidFill>
+                <a:latin typeface="+mn-lt"/>
+                <a:ea typeface="+mn-ea"/>
+                <a:cs typeface="+mn-cs"/>
+              </a:defRPr>
+            </a:lvl3pPr>
+            <a:lvl4pPr marL="1371600" algn="l" defTabSz="914400" rtl="0" eaLnBrk="1" latinLnBrk="0" hangingPunct="1">
+              <a:defRPr sz="1800" kern="1200">
+                <a:solidFill>
+                  <a:schemeClr val="tx1"/>
+                </a:solidFill>
+                <a:latin typeface="+mn-lt"/>
+                <a:ea typeface="+mn-ea"/>
+                <a:cs typeface="+mn-cs"/>
+              </a:defRPr>
+            </a:lvl4pPr>
+            <a:lvl5pPr marL="1828800" algn="l" defTabSz="914400" rtl="0" eaLnBrk="1" latinLnBrk="0" hangingPunct="1">
+              <a:defRPr sz="1800" kern="1200">
+                <a:solidFill>
+                  <a:schemeClr val="tx1"/>
+                </a:solidFill>
+                <a:latin typeface="+mn-lt"/>
+                <a:ea typeface="+mn-ea"/>
+                <a:cs typeface="+mn-cs"/>
+              </a:defRPr>
+            </a:lvl5pPr>
+            <a:lvl6pPr marL="2286000" algn="l" defTabSz="914400" rtl="0" eaLnBrk="1" latinLnBrk="0" hangingPunct="1">
+              <a:defRPr sz="1800" kern="1200">
+                <a:solidFill>
+                  <a:schemeClr val="tx1"/>
+                </a:solidFill>
+                <a:latin typeface="+mn-lt"/>
+                <a:ea typeface="+mn-ea"/>
+                <a:cs typeface="+mn-cs"/>
+              </a:defRPr>
+            </a:lvl6pPr>
+            <a:lvl7pPr marL="2743200" algn="l" defTabSz="914400" rtl="0" eaLnBrk="1" latinLnBrk="0" hangingPunct="1">
+              <a:defRPr sz="1800" kern="1200">
+                <a:solidFill>
+                  <a:schemeClr val="tx1"/>
+                </a:solidFill>
+                <a:latin typeface="+mn-lt"/>
+                <a:ea typeface="+mn-ea"/>
+                <a:cs typeface="+mn-cs"/>
+              </a:defRPr>
+            </a:lvl7pPr>
+            <a:lvl8pPr marL="3200400" algn="l" defTabSz="914400" rtl="0" eaLnBrk="1" latinLnBrk="0" hangingPunct="1">
+              <a:defRPr sz="1800" kern="1200">
+                <a:solidFill>
+                  <a:schemeClr val="tx1"/>
+                </a:solidFill>
+                <a:latin typeface="+mn-lt"/>
+                <a:ea typeface="+mn-ea"/>
+                <a:cs typeface="+mn-cs"/>
+              </a:defRPr>
+            </a:lvl8pPr>
+            <a:lvl9pPr marL="3657600" algn="l" defTabSz="914400" rtl="0" eaLnBrk="1" latinLnBrk="0" hangingPunct="1">
+              <a:defRPr sz="1800" kern="1200">
+                <a:solidFill>
+                  <a:schemeClr val="tx1"/>
+                </a:solidFill>
+                <a:latin typeface="+mn-lt"/>
+                <a:ea typeface="+mn-ea"/>
+                <a:cs typeface="+mn-cs"/>
+              </a:defRPr>
+            </a:lvl9pPr>
+          </a:lstStyle>
+          <a:p>
+            <a:pPr marL="0" marR="0" lvl="0" indent="0" algn="ctr" defTabSz="914400" rtl="0" eaLnBrk="1" fontAlgn="auto" latinLnBrk="0" hangingPunct="1">
+              <a:lnSpc>
+                <a:spcPct val="100000"/>
+              </a:lnSpc>
+              <a:spcBef>
+                <a:spcPts val="0"/>
+              </a:spcBef>
+              <a:spcAft>
+                <a:spcPts val="0"/>
+              </a:spcAft>
+              <a:buClrTx/>
+              <a:buSzTx/>
+              <a:buFontTx/>
+              <a:buNone/>
+              <a:tabLst/>
+              <a:defRPr/>
+            </a:pPr>
+            <a:r>
+              <a:rPr kumimoji="0" lang="en-US" sz="1200" b="0" i="0" u="none" strike="noStrike" kern="1200" cap="none" spc="0" normalizeH="0" baseline="0" noProof="0" dirty="0">
+                <a:ln>
+                  <a:noFill/>
+                </a:ln>
+                <a:solidFill>
+                  <a:prstClr val="black">
+                    <a:tint val="75000"/>
+                  </a:prstClr>
+                </a:solidFill>
+                <a:effectLst/>
+                <a:uLnTx/>
+                <a:uFillTx/>
+                <a:latin typeface="Helvetica Neue" panose="02000503000000020004" pitchFamily="2" charset="0"/>
+                <a:ea typeface="Helvetica Neue" panose="02000503000000020004" pitchFamily="2" charset="0"/>
+                <a:cs typeface="Helvetica Neue" panose="02000503000000020004" pitchFamily="2" charset="0"/>
+              </a:rPr>
+              <a:t>architrino.com</a:t>
             </a:r>
           </a:p>
         </p:txBody>
@@ -11149,7 +12241,7 @@
     </p:spTree>
     <p:extLst>
       <p:ext uri="{BB962C8B-B14F-4D97-AF65-F5344CB8AC3E}">
-        <p14:creationId xmlns:p14="http://schemas.microsoft.com/office/powerpoint/2010/main" val="4156127991"/>
+        <ns5:creationId val="4156127991"/>
       </p:ext>
     </p:extLst>
   </p:cSld>
@@ -11160,7 +12252,7 @@
 </file>
 
 <file path=ppt/slides/slide16.xml><?xml version="1.0" encoding="utf-8"?>
-<p:sld xmlns:a="http://schemas.openxmlformats.org/drawingml/2006/main" xmlns:r="http://schemas.openxmlformats.org/officeDocument/2006/relationships" xmlns:p="http://schemas.openxmlformats.org/presentationml/2006/main">
+<p:sld xmlns:a="http://schemas.openxmlformats.org/drawingml/2006/main" xmlns:a16="http://schemas.microsoft.com/office/drawing/2014/main" xmlns:ns3="http://schemas.microsoft.com/office/powerpoint/2010/main" xmlns:p="http://schemas.openxmlformats.org/presentationml/2006/main">
   <p:cSld>
     <p:bg>
       <p:bgPr>
@@ -11175,7 +12267,7 @@
         <p:cNvPr id="1" name="">
           <a:extLst>
             <a:ext uri="{FF2B5EF4-FFF2-40B4-BE49-F238E27FC236}">
-              <a16:creationId xmlns:a16="http://schemas.microsoft.com/office/drawing/2014/main" id="{B4E97244-526B-D579-3264-791A5D9EC1C9}"/>
+              <a16:creationId id="{B4E97244-526B-D579-3264-791A5D9EC1C9}"/>
             </a:ext>
           </a:extLst>
         </p:cNvPr>
@@ -11195,7 +12287,7 @@
           <p:cNvPr id="2" name="TextBox 1">
             <a:extLst>
               <a:ext uri="{FF2B5EF4-FFF2-40B4-BE49-F238E27FC236}">
-                <a16:creationId xmlns:a16="http://schemas.microsoft.com/office/drawing/2014/main" id="{3E3321C3-8FFD-6191-310D-A33C5C540DA8}"/>
+                <a16:creationId id="{3E3321C3-8FFD-6191-310D-A33C5C540DA8}"/>
               </a:ext>
             </a:extLst>
           </p:cNvPr>
@@ -11239,7 +12331,7 @@
                 <a:ea typeface="Helvetica Neue Thin" panose="020B0403020202020204" pitchFamily="34" charset="0"/>
                 <a:cs typeface="Helvetica Neue" panose="02000503000000020004" pitchFamily="2" charset="0"/>
               </a:rPr>
-              <a:t>neoclassical.ai</a:t>
+              <a:t/>
             </a:r>
           </a:p>
           <a:p>
@@ -11364,7 +12456,7 @@
           <p:cNvPr id="4" name="TextBox 3">
             <a:extLst>
               <a:ext uri="{FF2B5EF4-FFF2-40B4-BE49-F238E27FC236}">
-                <a16:creationId xmlns:a16="http://schemas.microsoft.com/office/drawing/2014/main" id="{6D6D88E4-3EDA-D4DA-2E0A-9AA83030F9E2}"/>
+                <a16:creationId id="{6D6D88E4-3EDA-D4DA-2E0A-9AA83030F9E2}"/>
               </a:ext>
             </a:extLst>
           </p:cNvPr>
@@ -11577,10 +12669,166 @@
           </a:p>
         </p:txBody>
       </p:sp>
+      <p:sp>
+        <p:nvSpPr>
+          <p:cNvPr id="3" name="Footer Placeholder 3"/>
+          <p:cNvSpPr txBox="1">
+            <a:spLocks/>
+          </p:cNvSpPr>
+          <p:nvPr/>
+        </p:nvSpPr>
+        <p:spPr>
+          <a:xfrm>
+            <a:off x="10942204" y="6481737"/>
+            <a:ext cx="1217443" cy="365125"/>
+          </a:xfrm>
+          <a:prstGeom prst="rect">
+            <a:avLst/>
+          </a:prstGeom>
+        </p:spPr>
+        <p:txBody>
+          <a:bodyPr vert="horz" lIns="91440" tIns="45720" rIns="91440" bIns="45720" rtlCol="0" anchor="ctr"/>
+          <a:lstStyle>
+            <a:defPPr>
+              <a:defRPr lang="en-US"/>
+            </a:defPPr>
+            <a:lvl1pPr marL="0" algn="ctr" defTabSz="914400" rtl="0" eaLnBrk="1" latinLnBrk="0" hangingPunct="1">
+              <a:defRPr sz="1200" kern="1200">
+                <a:solidFill>
+                  <a:schemeClr val="tx1">
+                    <a:tint val="75000"/>
+                  </a:schemeClr>
+                </a:solidFill>
+                <a:latin typeface="+mn-lt"/>
+                <a:ea typeface="+mn-ea"/>
+                <a:cs typeface="+mn-cs"/>
+              </a:defRPr>
+            </a:lvl1pPr>
+            <a:lvl2pPr marL="457200" algn="l" defTabSz="914400" rtl="0" eaLnBrk="1" latinLnBrk="0" hangingPunct="1">
+              <a:defRPr sz="1800" kern="1200">
+                <a:solidFill>
+                  <a:schemeClr val="tx1"/>
+                </a:solidFill>
+                <a:latin typeface="+mn-lt"/>
+                <a:ea typeface="+mn-ea"/>
+                <a:cs typeface="+mn-cs"/>
+              </a:defRPr>
+            </a:lvl2pPr>
+            <a:lvl3pPr marL="914400" algn="l" defTabSz="914400" rtl="0" eaLnBrk="1" latinLnBrk="0" hangingPunct="1">
+              <a:defRPr sz="1800" kern="1200">
+                <a:solidFill>
+                  <a:schemeClr val="tx1"/>
+                </a:solidFill>
+                <a:latin typeface="+mn-lt"/>
+                <a:ea typeface="+mn-ea"/>
+                <a:cs typeface="+mn-cs"/>
+              </a:defRPr>
+            </a:lvl3pPr>
+            <a:lvl4pPr marL="1371600" algn="l" defTabSz="914400" rtl="0" eaLnBrk="1" latinLnBrk="0" hangingPunct="1">
+              <a:defRPr sz="1800" kern="1200">
+                <a:solidFill>
+                  <a:schemeClr val="tx1"/>
+                </a:solidFill>
+                <a:latin typeface="+mn-lt"/>
+                <a:ea typeface="+mn-ea"/>
+                <a:cs typeface="+mn-cs"/>
+              </a:defRPr>
+            </a:lvl4pPr>
+            <a:lvl5pPr marL="1828800" algn="l" defTabSz="914400" rtl="0" eaLnBrk="1" latinLnBrk="0" hangingPunct="1">
+              <a:defRPr sz="1800" kern="1200">
+                <a:solidFill>
+                  <a:schemeClr val="tx1"/>
+                </a:solidFill>
+                <a:latin typeface="+mn-lt"/>
+                <a:ea typeface="+mn-ea"/>
+                <a:cs typeface="+mn-cs"/>
+              </a:defRPr>
+            </a:lvl5pPr>
+            <a:lvl6pPr marL="2286000" algn="l" defTabSz="914400" rtl="0" eaLnBrk="1" latinLnBrk="0" hangingPunct="1">
+              <a:defRPr sz="1800" kern="1200">
+                <a:solidFill>
+                  <a:schemeClr val="tx1"/>
+                </a:solidFill>
+                <a:latin typeface="+mn-lt"/>
+                <a:ea typeface="+mn-ea"/>
+                <a:cs typeface="+mn-cs"/>
+              </a:defRPr>
+            </a:lvl6pPr>
+            <a:lvl7pPr marL="2743200" algn="l" defTabSz="914400" rtl="0" eaLnBrk="1" latinLnBrk="0" hangingPunct="1">
+              <a:defRPr sz="1800" kern="1200">
+                <a:solidFill>
+                  <a:schemeClr val="tx1"/>
+                </a:solidFill>
+                <a:latin typeface="+mn-lt"/>
+                <a:ea typeface="+mn-ea"/>
+                <a:cs typeface="+mn-cs"/>
+              </a:defRPr>
+            </a:lvl7pPr>
+            <a:lvl8pPr marL="3200400" algn="l" defTabSz="914400" rtl="0" eaLnBrk="1" latinLnBrk="0" hangingPunct="1">
+              <a:defRPr sz="1800" kern="1200">
+                <a:solidFill>
+                  <a:schemeClr val="tx1"/>
+                </a:solidFill>
+                <a:latin typeface="+mn-lt"/>
+                <a:ea typeface="+mn-ea"/>
+                <a:cs typeface="+mn-cs"/>
+              </a:defRPr>
+            </a:lvl8pPr>
+            <a:lvl9pPr marL="3657600" algn="l" defTabSz="914400" rtl="0" eaLnBrk="1" latinLnBrk="0" hangingPunct="1">
+              <a:defRPr sz="1800" kern="1200">
+                <a:solidFill>
+                  <a:schemeClr val="tx1"/>
+                </a:solidFill>
+                <a:latin typeface="+mn-lt"/>
+                <a:ea typeface="+mn-ea"/>
+                <a:cs typeface="+mn-cs"/>
+              </a:defRPr>
+            </a:lvl9pPr>
+          </a:lstStyle>
+          <a:p>
+            <a:pPr marL="0" marR="0" lvl="0" indent="0" algn="ctr" defTabSz="914400" rtl="0" eaLnBrk="1" fontAlgn="auto" latinLnBrk="0" hangingPunct="1">
+              <a:lnSpc>
+                <a:spcPct val="100000"/>
+              </a:lnSpc>
+              <a:spcBef>
+                <a:spcPts val="0"/>
+              </a:spcBef>
+              <a:spcAft>
+                <a:spcPts val="0"/>
+              </a:spcAft>
+              <a:buClrTx/>
+              <a:buSzTx/>
+              <a:buFontTx/>
+              <a:buNone/>
+              <a:tabLst/>
+              <a:defRPr/>
+            </a:pPr>
+            <a:r>
+              <a:rPr kumimoji="0" lang="en-US" sz="1200" b="0" i="0" u="none" strike="noStrike" kern="1200" cap="none" spc="0" normalizeH="0" baseline="0" noProof="0" dirty="0">
+                <a:ln>
+                  <a:noFill/>
+                </a:ln>
+                <a:solidFill>
+                  <a:prstClr val="black">
+                    <a:tint val="75000"/>
+                  </a:prstClr>
+                </a:solidFill>
+                <a:effectLst/>
+                <a:uLnTx/>
+                <a:uFillTx/>
+                <a:latin typeface="Helvetica Neue" panose="02000503000000020004" pitchFamily="2" charset="0"/>
+                <a:ea typeface="Helvetica Neue" panose="02000503000000020004" pitchFamily="2" charset="0"/>
+                <a:cs typeface="Helvetica Neue" panose="02000503000000020004" pitchFamily="2" charset="0"/>
+              </a:rPr>
+              <a:t>architrino.com</a:t>
+            </a:r>
+          </a:p>
+        </p:txBody>
+      </p:sp>
     </p:spTree>
     <p:extLst>
       <p:ext uri="{BB962C8B-B14F-4D97-AF65-F5344CB8AC3E}">
-        <p14:creationId xmlns:p14="http://schemas.microsoft.com/office/powerpoint/2010/main" val="1400325508"/>
+        <ns3:creationId val="1400325508"/>
       </p:ext>
     </p:extLst>
   </p:cSld>
@@ -11591,7 +12839,7 @@
 </file>
 
 <file path=ppt/slides/slide17.xml><?xml version="1.0" encoding="utf-8"?>
-<p:sld xmlns:a="http://schemas.openxmlformats.org/drawingml/2006/main" xmlns:r="http://schemas.openxmlformats.org/officeDocument/2006/relationships" xmlns:p="http://schemas.openxmlformats.org/presentationml/2006/main">
+<p:sld xmlns:a="http://schemas.openxmlformats.org/drawingml/2006/main" xmlns:a16="http://schemas.microsoft.com/office/drawing/2014/main" xmlns:ns3="http://schemas.microsoft.com/office/powerpoint/2010/main" xmlns:p="http://schemas.openxmlformats.org/presentationml/2006/main">
   <p:cSld>
     <p:bg>
       <p:bgPr>
@@ -11606,7 +12854,7 @@
         <p:cNvPr id="1" name="">
           <a:extLst>
             <a:ext uri="{FF2B5EF4-FFF2-40B4-BE49-F238E27FC236}">
-              <a16:creationId xmlns:a16="http://schemas.microsoft.com/office/drawing/2014/main" id="{3CA06703-8282-FBA4-B131-78D3E40119E3}"/>
+              <a16:creationId id="{3CA06703-8282-FBA4-B131-78D3E40119E3}"/>
             </a:ext>
           </a:extLst>
         </p:cNvPr>
@@ -11626,7 +12874,7 @@
           <p:cNvPr id="2" name="TextBox 1">
             <a:extLst>
               <a:ext uri="{FF2B5EF4-FFF2-40B4-BE49-F238E27FC236}">
-                <a16:creationId xmlns:a16="http://schemas.microsoft.com/office/drawing/2014/main" id="{D6FE6A9C-5863-591F-3901-98E63EEE2FD9}"/>
+                <a16:creationId id="{D6FE6A9C-5863-591F-3901-98E63EEE2FD9}"/>
               </a:ext>
             </a:extLst>
           </p:cNvPr>
@@ -11670,7 +12918,7 @@
                 <a:ea typeface="Helvetica Neue Thin" panose="020B0403020202020204" pitchFamily="34" charset="0"/>
                 <a:cs typeface="Helvetica Neue" panose="02000503000000020004" pitchFamily="2" charset="0"/>
               </a:rPr>
-              <a:t>neoclassical.ai</a:t>
+              <a:t/>
             </a:r>
           </a:p>
           <a:p>
@@ -11816,7 +13064,7 @@
           <p:cNvPr id="4" name="TextBox 3">
             <a:extLst>
               <a:ext uri="{FF2B5EF4-FFF2-40B4-BE49-F238E27FC236}">
-                <a16:creationId xmlns:a16="http://schemas.microsoft.com/office/drawing/2014/main" id="{92F36F80-43EE-02DA-E127-D996EF1B6D71}"/>
+                <a16:creationId id="{92F36F80-43EE-02DA-E127-D996EF1B6D71}"/>
               </a:ext>
             </a:extLst>
           </p:cNvPr>
@@ -12029,10 +13277,166 @@
           </a:p>
         </p:txBody>
       </p:sp>
+      <p:sp>
+        <p:nvSpPr>
+          <p:cNvPr id="3" name="Footer Placeholder 3"/>
+          <p:cNvSpPr txBox="1">
+            <a:spLocks/>
+          </p:cNvSpPr>
+          <p:nvPr/>
+        </p:nvSpPr>
+        <p:spPr>
+          <a:xfrm>
+            <a:off x="10942204" y="6481737"/>
+            <a:ext cx="1217443" cy="365125"/>
+          </a:xfrm>
+          <a:prstGeom prst="rect">
+            <a:avLst/>
+          </a:prstGeom>
+        </p:spPr>
+        <p:txBody>
+          <a:bodyPr vert="horz" lIns="91440" tIns="45720" rIns="91440" bIns="45720" rtlCol="0" anchor="ctr"/>
+          <a:lstStyle>
+            <a:defPPr>
+              <a:defRPr lang="en-US"/>
+            </a:defPPr>
+            <a:lvl1pPr marL="0" algn="ctr" defTabSz="914400" rtl="0" eaLnBrk="1" latinLnBrk="0" hangingPunct="1">
+              <a:defRPr sz="1200" kern="1200">
+                <a:solidFill>
+                  <a:schemeClr val="tx1">
+                    <a:tint val="75000"/>
+                  </a:schemeClr>
+                </a:solidFill>
+                <a:latin typeface="+mn-lt"/>
+                <a:ea typeface="+mn-ea"/>
+                <a:cs typeface="+mn-cs"/>
+              </a:defRPr>
+            </a:lvl1pPr>
+            <a:lvl2pPr marL="457200" algn="l" defTabSz="914400" rtl="0" eaLnBrk="1" latinLnBrk="0" hangingPunct="1">
+              <a:defRPr sz="1800" kern="1200">
+                <a:solidFill>
+                  <a:schemeClr val="tx1"/>
+                </a:solidFill>
+                <a:latin typeface="+mn-lt"/>
+                <a:ea typeface="+mn-ea"/>
+                <a:cs typeface="+mn-cs"/>
+              </a:defRPr>
+            </a:lvl2pPr>
+            <a:lvl3pPr marL="914400" algn="l" defTabSz="914400" rtl="0" eaLnBrk="1" latinLnBrk="0" hangingPunct="1">
+              <a:defRPr sz="1800" kern="1200">
+                <a:solidFill>
+                  <a:schemeClr val="tx1"/>
+                </a:solidFill>
+                <a:latin typeface="+mn-lt"/>
+                <a:ea typeface="+mn-ea"/>
+                <a:cs typeface="+mn-cs"/>
+              </a:defRPr>
+            </a:lvl3pPr>
+            <a:lvl4pPr marL="1371600" algn="l" defTabSz="914400" rtl="0" eaLnBrk="1" latinLnBrk="0" hangingPunct="1">
+              <a:defRPr sz="1800" kern="1200">
+                <a:solidFill>
+                  <a:schemeClr val="tx1"/>
+                </a:solidFill>
+                <a:latin typeface="+mn-lt"/>
+                <a:ea typeface="+mn-ea"/>
+                <a:cs typeface="+mn-cs"/>
+              </a:defRPr>
+            </a:lvl4pPr>
+            <a:lvl5pPr marL="1828800" algn="l" defTabSz="914400" rtl="0" eaLnBrk="1" latinLnBrk="0" hangingPunct="1">
+              <a:defRPr sz="1800" kern="1200">
+                <a:solidFill>
+                  <a:schemeClr val="tx1"/>
+                </a:solidFill>
+                <a:latin typeface="+mn-lt"/>
+                <a:ea typeface="+mn-ea"/>
+                <a:cs typeface="+mn-cs"/>
+              </a:defRPr>
+            </a:lvl5pPr>
+            <a:lvl6pPr marL="2286000" algn="l" defTabSz="914400" rtl="0" eaLnBrk="1" latinLnBrk="0" hangingPunct="1">
+              <a:defRPr sz="1800" kern="1200">
+                <a:solidFill>
+                  <a:schemeClr val="tx1"/>
+                </a:solidFill>
+                <a:latin typeface="+mn-lt"/>
+                <a:ea typeface="+mn-ea"/>
+                <a:cs typeface="+mn-cs"/>
+              </a:defRPr>
+            </a:lvl6pPr>
+            <a:lvl7pPr marL="2743200" algn="l" defTabSz="914400" rtl="0" eaLnBrk="1" latinLnBrk="0" hangingPunct="1">
+              <a:defRPr sz="1800" kern="1200">
+                <a:solidFill>
+                  <a:schemeClr val="tx1"/>
+                </a:solidFill>
+                <a:latin typeface="+mn-lt"/>
+                <a:ea typeface="+mn-ea"/>
+                <a:cs typeface="+mn-cs"/>
+              </a:defRPr>
+            </a:lvl7pPr>
+            <a:lvl8pPr marL="3200400" algn="l" defTabSz="914400" rtl="0" eaLnBrk="1" latinLnBrk="0" hangingPunct="1">
+              <a:defRPr sz="1800" kern="1200">
+                <a:solidFill>
+                  <a:schemeClr val="tx1"/>
+                </a:solidFill>
+                <a:latin typeface="+mn-lt"/>
+                <a:ea typeface="+mn-ea"/>
+                <a:cs typeface="+mn-cs"/>
+              </a:defRPr>
+            </a:lvl8pPr>
+            <a:lvl9pPr marL="3657600" algn="l" defTabSz="914400" rtl="0" eaLnBrk="1" latinLnBrk="0" hangingPunct="1">
+              <a:defRPr sz="1800" kern="1200">
+                <a:solidFill>
+                  <a:schemeClr val="tx1"/>
+                </a:solidFill>
+                <a:latin typeface="+mn-lt"/>
+                <a:ea typeface="+mn-ea"/>
+                <a:cs typeface="+mn-cs"/>
+              </a:defRPr>
+            </a:lvl9pPr>
+          </a:lstStyle>
+          <a:p>
+            <a:pPr marL="0" marR="0" lvl="0" indent="0" algn="ctr" defTabSz="914400" rtl="0" eaLnBrk="1" fontAlgn="auto" latinLnBrk="0" hangingPunct="1">
+              <a:lnSpc>
+                <a:spcPct val="100000"/>
+              </a:lnSpc>
+              <a:spcBef>
+                <a:spcPts val="0"/>
+              </a:spcBef>
+              <a:spcAft>
+                <a:spcPts val="0"/>
+              </a:spcAft>
+              <a:buClrTx/>
+              <a:buSzTx/>
+              <a:buFontTx/>
+              <a:buNone/>
+              <a:tabLst/>
+              <a:defRPr/>
+            </a:pPr>
+            <a:r>
+              <a:rPr kumimoji="0" lang="en-US" sz="1200" b="0" i="0" u="none" strike="noStrike" kern="1200" cap="none" spc="0" normalizeH="0" baseline="0" noProof="0" dirty="0">
+                <a:ln>
+                  <a:noFill/>
+                </a:ln>
+                <a:solidFill>
+                  <a:prstClr val="black">
+                    <a:tint val="75000"/>
+                  </a:prstClr>
+                </a:solidFill>
+                <a:effectLst/>
+                <a:uLnTx/>
+                <a:uFillTx/>
+                <a:latin typeface="Helvetica Neue" panose="02000503000000020004" pitchFamily="2" charset="0"/>
+                <a:ea typeface="Helvetica Neue" panose="02000503000000020004" pitchFamily="2" charset="0"/>
+                <a:cs typeface="Helvetica Neue" panose="02000503000000020004" pitchFamily="2" charset="0"/>
+              </a:rPr>
+              <a:t>architrino.com</a:t>
+            </a:r>
+          </a:p>
+        </p:txBody>
+      </p:sp>
     </p:spTree>
     <p:extLst>
       <p:ext uri="{BB962C8B-B14F-4D97-AF65-F5344CB8AC3E}">
-        <p14:creationId xmlns:p14="http://schemas.microsoft.com/office/powerpoint/2010/main" val="828785009"/>
+        <ns3:creationId val="828785009"/>
       </p:ext>
     </p:extLst>
   </p:cSld>
@@ -12043,7 +13447,7 @@
 </file>
 
 <file path=ppt/slides/slide18.xml><?xml version="1.0" encoding="utf-8"?>
-<p:sld xmlns:a="http://schemas.openxmlformats.org/drawingml/2006/main" xmlns:r="http://schemas.openxmlformats.org/officeDocument/2006/relationships" xmlns:p="http://schemas.openxmlformats.org/presentationml/2006/main">
+<p:sld xmlns:a="http://schemas.openxmlformats.org/drawingml/2006/main" xmlns:a16="http://schemas.microsoft.com/office/drawing/2014/main" xmlns:ns3="http://schemas.microsoft.com/office/powerpoint/2010/main" xmlns:p="http://schemas.openxmlformats.org/presentationml/2006/main">
   <p:cSld>
     <p:bg>
       <p:bgPr>
@@ -12058,7 +13462,7 @@
         <p:cNvPr id="1" name="">
           <a:extLst>
             <a:ext uri="{FF2B5EF4-FFF2-40B4-BE49-F238E27FC236}">
-              <a16:creationId xmlns:a16="http://schemas.microsoft.com/office/drawing/2014/main" id="{BE1882C9-77CE-BA45-5FB6-7F6B1C00FBDB}"/>
+              <a16:creationId id="{BE1882C9-77CE-BA45-5FB6-7F6B1C00FBDB}"/>
             </a:ext>
           </a:extLst>
         </p:cNvPr>
@@ -12078,7 +13482,7 @@
           <p:cNvPr id="2" name="TextBox 1">
             <a:extLst>
               <a:ext uri="{FF2B5EF4-FFF2-40B4-BE49-F238E27FC236}">
-                <a16:creationId xmlns:a16="http://schemas.microsoft.com/office/drawing/2014/main" id="{3F9FD831-7748-830F-C71E-E247DF4D6136}"/>
+                <a16:creationId id="{3F9FD831-7748-830F-C71E-E247DF4D6136}"/>
               </a:ext>
             </a:extLst>
           </p:cNvPr>
@@ -12122,7 +13526,7 @@
                 <a:ea typeface="Helvetica Neue Thin" panose="020B0403020202020204" pitchFamily="34" charset="0"/>
                 <a:cs typeface="Helvetica Neue" panose="02000503000000020004" pitchFamily="2" charset="0"/>
               </a:rPr>
-              <a:t>neoclassical.ai</a:t>
+              <a:t/>
             </a:r>
           </a:p>
           <a:p>
@@ -12275,10 +13679,166 @@
           </a:p>
         </p:txBody>
       </p:sp>
+      <p:sp>
+        <p:nvSpPr>
+          <p:cNvPr id="3" name="Footer Placeholder 3"/>
+          <p:cNvSpPr txBox="1">
+            <a:spLocks/>
+          </p:cNvSpPr>
+          <p:nvPr/>
+        </p:nvSpPr>
+        <p:spPr>
+          <a:xfrm>
+            <a:off x="10942204" y="6481737"/>
+            <a:ext cx="1217443" cy="365125"/>
+          </a:xfrm>
+          <a:prstGeom prst="rect">
+            <a:avLst/>
+          </a:prstGeom>
+        </p:spPr>
+        <p:txBody>
+          <a:bodyPr vert="horz" lIns="91440" tIns="45720" rIns="91440" bIns="45720" rtlCol="0" anchor="ctr"/>
+          <a:lstStyle>
+            <a:defPPr>
+              <a:defRPr lang="en-US"/>
+            </a:defPPr>
+            <a:lvl1pPr marL="0" algn="ctr" defTabSz="914400" rtl="0" eaLnBrk="1" latinLnBrk="0" hangingPunct="1">
+              <a:defRPr sz="1200" kern="1200">
+                <a:solidFill>
+                  <a:schemeClr val="tx1">
+                    <a:tint val="75000"/>
+                  </a:schemeClr>
+                </a:solidFill>
+                <a:latin typeface="+mn-lt"/>
+                <a:ea typeface="+mn-ea"/>
+                <a:cs typeface="+mn-cs"/>
+              </a:defRPr>
+            </a:lvl1pPr>
+            <a:lvl2pPr marL="457200" algn="l" defTabSz="914400" rtl="0" eaLnBrk="1" latinLnBrk="0" hangingPunct="1">
+              <a:defRPr sz="1800" kern="1200">
+                <a:solidFill>
+                  <a:schemeClr val="tx1"/>
+                </a:solidFill>
+                <a:latin typeface="+mn-lt"/>
+                <a:ea typeface="+mn-ea"/>
+                <a:cs typeface="+mn-cs"/>
+              </a:defRPr>
+            </a:lvl2pPr>
+            <a:lvl3pPr marL="914400" algn="l" defTabSz="914400" rtl="0" eaLnBrk="1" latinLnBrk="0" hangingPunct="1">
+              <a:defRPr sz="1800" kern="1200">
+                <a:solidFill>
+                  <a:schemeClr val="tx1"/>
+                </a:solidFill>
+                <a:latin typeface="+mn-lt"/>
+                <a:ea typeface="+mn-ea"/>
+                <a:cs typeface="+mn-cs"/>
+              </a:defRPr>
+            </a:lvl3pPr>
+            <a:lvl4pPr marL="1371600" algn="l" defTabSz="914400" rtl="0" eaLnBrk="1" latinLnBrk="0" hangingPunct="1">
+              <a:defRPr sz="1800" kern="1200">
+                <a:solidFill>
+                  <a:schemeClr val="tx1"/>
+                </a:solidFill>
+                <a:latin typeface="+mn-lt"/>
+                <a:ea typeface="+mn-ea"/>
+                <a:cs typeface="+mn-cs"/>
+              </a:defRPr>
+            </a:lvl4pPr>
+            <a:lvl5pPr marL="1828800" algn="l" defTabSz="914400" rtl="0" eaLnBrk="1" latinLnBrk="0" hangingPunct="1">
+              <a:defRPr sz="1800" kern="1200">
+                <a:solidFill>
+                  <a:schemeClr val="tx1"/>
+                </a:solidFill>
+                <a:latin typeface="+mn-lt"/>
+                <a:ea typeface="+mn-ea"/>
+                <a:cs typeface="+mn-cs"/>
+              </a:defRPr>
+            </a:lvl5pPr>
+            <a:lvl6pPr marL="2286000" algn="l" defTabSz="914400" rtl="0" eaLnBrk="1" latinLnBrk="0" hangingPunct="1">
+              <a:defRPr sz="1800" kern="1200">
+                <a:solidFill>
+                  <a:schemeClr val="tx1"/>
+                </a:solidFill>
+                <a:latin typeface="+mn-lt"/>
+                <a:ea typeface="+mn-ea"/>
+                <a:cs typeface="+mn-cs"/>
+              </a:defRPr>
+            </a:lvl6pPr>
+            <a:lvl7pPr marL="2743200" algn="l" defTabSz="914400" rtl="0" eaLnBrk="1" latinLnBrk="0" hangingPunct="1">
+              <a:defRPr sz="1800" kern="1200">
+                <a:solidFill>
+                  <a:schemeClr val="tx1"/>
+                </a:solidFill>
+                <a:latin typeface="+mn-lt"/>
+                <a:ea typeface="+mn-ea"/>
+                <a:cs typeface="+mn-cs"/>
+              </a:defRPr>
+            </a:lvl7pPr>
+            <a:lvl8pPr marL="3200400" algn="l" defTabSz="914400" rtl="0" eaLnBrk="1" latinLnBrk="0" hangingPunct="1">
+              <a:defRPr sz="1800" kern="1200">
+                <a:solidFill>
+                  <a:schemeClr val="tx1"/>
+                </a:solidFill>
+                <a:latin typeface="+mn-lt"/>
+                <a:ea typeface="+mn-ea"/>
+                <a:cs typeface="+mn-cs"/>
+              </a:defRPr>
+            </a:lvl8pPr>
+            <a:lvl9pPr marL="3657600" algn="l" defTabSz="914400" rtl="0" eaLnBrk="1" latinLnBrk="0" hangingPunct="1">
+              <a:defRPr sz="1800" kern="1200">
+                <a:solidFill>
+                  <a:schemeClr val="tx1"/>
+                </a:solidFill>
+                <a:latin typeface="+mn-lt"/>
+                <a:ea typeface="+mn-ea"/>
+                <a:cs typeface="+mn-cs"/>
+              </a:defRPr>
+            </a:lvl9pPr>
+          </a:lstStyle>
+          <a:p>
+            <a:pPr marL="0" marR="0" lvl="0" indent="0" algn="ctr" defTabSz="914400" rtl="0" eaLnBrk="1" fontAlgn="auto" latinLnBrk="0" hangingPunct="1">
+              <a:lnSpc>
+                <a:spcPct val="100000"/>
+              </a:lnSpc>
+              <a:spcBef>
+                <a:spcPts val="0"/>
+              </a:spcBef>
+              <a:spcAft>
+                <a:spcPts val="0"/>
+              </a:spcAft>
+              <a:buClrTx/>
+              <a:buSzTx/>
+              <a:buFontTx/>
+              <a:buNone/>
+              <a:tabLst/>
+              <a:defRPr/>
+            </a:pPr>
+            <a:r>
+              <a:rPr kumimoji="0" lang="en-US" sz="1200" b="0" i="0" u="none" strike="noStrike" kern="1200" cap="none" spc="0" normalizeH="0" baseline="0" noProof="0" dirty="0">
+                <a:ln>
+                  <a:noFill/>
+                </a:ln>
+                <a:solidFill>
+                  <a:prstClr val="black">
+                    <a:tint val="75000"/>
+                  </a:prstClr>
+                </a:solidFill>
+                <a:effectLst/>
+                <a:uLnTx/>
+                <a:uFillTx/>
+                <a:latin typeface="Helvetica Neue" panose="02000503000000020004" pitchFamily="2" charset="0"/>
+                <a:ea typeface="Helvetica Neue" panose="02000503000000020004" pitchFamily="2" charset="0"/>
+                <a:cs typeface="Helvetica Neue" panose="02000503000000020004" pitchFamily="2" charset="0"/>
+              </a:rPr>
+              <a:t>architrino.com</a:t>
+            </a:r>
+          </a:p>
+        </p:txBody>
+      </p:sp>
     </p:spTree>
     <p:extLst>
       <p:ext uri="{BB962C8B-B14F-4D97-AF65-F5344CB8AC3E}">
-        <p14:creationId xmlns:p14="http://schemas.microsoft.com/office/powerpoint/2010/main" val="1509306095"/>
+        <ns3:creationId val="1509306095"/>
       </p:ext>
     </p:extLst>
   </p:cSld>
@@ -12289,7 +13849,7 @@
 </file>
 
 <file path=ppt/slides/slide19.xml><?xml version="1.0" encoding="utf-8"?>
-<p:sld xmlns:a="http://schemas.openxmlformats.org/drawingml/2006/main" xmlns:r="http://schemas.openxmlformats.org/officeDocument/2006/relationships" xmlns:p="http://schemas.openxmlformats.org/presentationml/2006/main">
+<p:sld xmlns:a="http://schemas.openxmlformats.org/drawingml/2006/main" xmlns:a16="http://schemas.microsoft.com/office/drawing/2014/main" xmlns:ns3="http://schemas.microsoft.com/office/powerpoint/2010/main" xmlns:p="http://schemas.openxmlformats.org/presentationml/2006/main">
   <p:cSld>
     <p:bg>
       <p:bgPr>
@@ -12304,7 +13864,7 @@
         <p:cNvPr id="1" name="">
           <a:extLst>
             <a:ext uri="{FF2B5EF4-FFF2-40B4-BE49-F238E27FC236}">
-              <a16:creationId xmlns:a16="http://schemas.microsoft.com/office/drawing/2014/main" id="{D7FFE285-9A08-F2F9-EF12-7400E3796776}"/>
+              <a16:creationId id="{D7FFE285-9A08-F2F9-EF12-7400E3796776}"/>
             </a:ext>
           </a:extLst>
         </p:cNvPr>
@@ -12324,7 +13884,7 @@
           <p:cNvPr id="2" name="TextBox 1">
             <a:extLst>
               <a:ext uri="{FF2B5EF4-FFF2-40B4-BE49-F238E27FC236}">
-                <a16:creationId xmlns:a16="http://schemas.microsoft.com/office/drawing/2014/main" id="{AF5FD3ED-5619-E4E8-F86D-E93273D443B3}"/>
+                <a16:creationId id="{AF5FD3ED-5619-E4E8-F86D-E93273D443B3}"/>
               </a:ext>
             </a:extLst>
           </p:cNvPr>
@@ -12368,7 +13928,7 @@
                 <a:ea typeface="Helvetica Neue Thin" panose="020B0403020202020204" pitchFamily="34" charset="0"/>
                 <a:cs typeface="Helvetica Neue" panose="02000503000000020004" pitchFamily="2" charset="0"/>
               </a:rPr>
-              <a:t>neoclassical.ai</a:t>
+              <a:t/>
             </a:r>
           </a:p>
           <a:p>
@@ -12492,10 +14052,166 @@
           </a:p>
         </p:txBody>
       </p:sp>
+      <p:sp>
+        <p:nvSpPr>
+          <p:cNvPr id="3" name="Footer Placeholder 3"/>
+          <p:cNvSpPr txBox="1">
+            <a:spLocks/>
+          </p:cNvSpPr>
+          <p:nvPr/>
+        </p:nvSpPr>
+        <p:spPr>
+          <a:xfrm>
+            <a:off x="10942204" y="6481737"/>
+            <a:ext cx="1217443" cy="365125"/>
+          </a:xfrm>
+          <a:prstGeom prst="rect">
+            <a:avLst/>
+          </a:prstGeom>
+        </p:spPr>
+        <p:txBody>
+          <a:bodyPr vert="horz" lIns="91440" tIns="45720" rIns="91440" bIns="45720" rtlCol="0" anchor="ctr"/>
+          <a:lstStyle>
+            <a:defPPr>
+              <a:defRPr lang="en-US"/>
+            </a:defPPr>
+            <a:lvl1pPr marL="0" algn="ctr" defTabSz="914400" rtl="0" eaLnBrk="1" latinLnBrk="0" hangingPunct="1">
+              <a:defRPr sz="1200" kern="1200">
+                <a:solidFill>
+                  <a:schemeClr val="tx1">
+                    <a:tint val="75000"/>
+                  </a:schemeClr>
+                </a:solidFill>
+                <a:latin typeface="+mn-lt"/>
+                <a:ea typeface="+mn-ea"/>
+                <a:cs typeface="+mn-cs"/>
+              </a:defRPr>
+            </a:lvl1pPr>
+            <a:lvl2pPr marL="457200" algn="l" defTabSz="914400" rtl="0" eaLnBrk="1" latinLnBrk="0" hangingPunct="1">
+              <a:defRPr sz="1800" kern="1200">
+                <a:solidFill>
+                  <a:schemeClr val="tx1"/>
+                </a:solidFill>
+                <a:latin typeface="+mn-lt"/>
+                <a:ea typeface="+mn-ea"/>
+                <a:cs typeface="+mn-cs"/>
+              </a:defRPr>
+            </a:lvl2pPr>
+            <a:lvl3pPr marL="914400" algn="l" defTabSz="914400" rtl="0" eaLnBrk="1" latinLnBrk="0" hangingPunct="1">
+              <a:defRPr sz="1800" kern="1200">
+                <a:solidFill>
+                  <a:schemeClr val="tx1"/>
+                </a:solidFill>
+                <a:latin typeface="+mn-lt"/>
+                <a:ea typeface="+mn-ea"/>
+                <a:cs typeface="+mn-cs"/>
+              </a:defRPr>
+            </a:lvl3pPr>
+            <a:lvl4pPr marL="1371600" algn="l" defTabSz="914400" rtl="0" eaLnBrk="1" latinLnBrk="0" hangingPunct="1">
+              <a:defRPr sz="1800" kern="1200">
+                <a:solidFill>
+                  <a:schemeClr val="tx1"/>
+                </a:solidFill>
+                <a:latin typeface="+mn-lt"/>
+                <a:ea typeface="+mn-ea"/>
+                <a:cs typeface="+mn-cs"/>
+              </a:defRPr>
+            </a:lvl4pPr>
+            <a:lvl5pPr marL="1828800" algn="l" defTabSz="914400" rtl="0" eaLnBrk="1" latinLnBrk="0" hangingPunct="1">
+              <a:defRPr sz="1800" kern="1200">
+                <a:solidFill>
+                  <a:schemeClr val="tx1"/>
+                </a:solidFill>
+                <a:latin typeface="+mn-lt"/>
+                <a:ea typeface="+mn-ea"/>
+                <a:cs typeface="+mn-cs"/>
+              </a:defRPr>
+            </a:lvl5pPr>
+            <a:lvl6pPr marL="2286000" algn="l" defTabSz="914400" rtl="0" eaLnBrk="1" latinLnBrk="0" hangingPunct="1">
+              <a:defRPr sz="1800" kern="1200">
+                <a:solidFill>
+                  <a:schemeClr val="tx1"/>
+                </a:solidFill>
+                <a:latin typeface="+mn-lt"/>
+                <a:ea typeface="+mn-ea"/>
+                <a:cs typeface="+mn-cs"/>
+              </a:defRPr>
+            </a:lvl6pPr>
+            <a:lvl7pPr marL="2743200" algn="l" defTabSz="914400" rtl="0" eaLnBrk="1" latinLnBrk="0" hangingPunct="1">
+              <a:defRPr sz="1800" kern="1200">
+                <a:solidFill>
+                  <a:schemeClr val="tx1"/>
+                </a:solidFill>
+                <a:latin typeface="+mn-lt"/>
+                <a:ea typeface="+mn-ea"/>
+                <a:cs typeface="+mn-cs"/>
+              </a:defRPr>
+            </a:lvl7pPr>
+            <a:lvl8pPr marL="3200400" algn="l" defTabSz="914400" rtl="0" eaLnBrk="1" latinLnBrk="0" hangingPunct="1">
+              <a:defRPr sz="1800" kern="1200">
+                <a:solidFill>
+                  <a:schemeClr val="tx1"/>
+                </a:solidFill>
+                <a:latin typeface="+mn-lt"/>
+                <a:ea typeface="+mn-ea"/>
+                <a:cs typeface="+mn-cs"/>
+              </a:defRPr>
+            </a:lvl8pPr>
+            <a:lvl9pPr marL="3657600" algn="l" defTabSz="914400" rtl="0" eaLnBrk="1" latinLnBrk="0" hangingPunct="1">
+              <a:defRPr sz="1800" kern="1200">
+                <a:solidFill>
+                  <a:schemeClr val="tx1"/>
+                </a:solidFill>
+                <a:latin typeface="+mn-lt"/>
+                <a:ea typeface="+mn-ea"/>
+                <a:cs typeface="+mn-cs"/>
+              </a:defRPr>
+            </a:lvl9pPr>
+          </a:lstStyle>
+          <a:p>
+            <a:pPr marL="0" marR="0" lvl="0" indent="0" algn="ctr" defTabSz="914400" rtl="0" eaLnBrk="1" fontAlgn="auto" latinLnBrk="0" hangingPunct="1">
+              <a:lnSpc>
+                <a:spcPct val="100000"/>
+              </a:lnSpc>
+              <a:spcBef>
+                <a:spcPts val="0"/>
+              </a:spcBef>
+              <a:spcAft>
+                <a:spcPts val="0"/>
+              </a:spcAft>
+              <a:buClrTx/>
+              <a:buSzTx/>
+              <a:buFontTx/>
+              <a:buNone/>
+              <a:tabLst/>
+              <a:defRPr/>
+            </a:pPr>
+            <a:r>
+              <a:rPr kumimoji="0" lang="en-US" sz="1200" b="0" i="0" u="none" strike="noStrike" kern="1200" cap="none" spc="0" normalizeH="0" baseline="0" noProof="0" dirty="0">
+                <a:ln>
+                  <a:noFill/>
+                </a:ln>
+                <a:solidFill>
+                  <a:prstClr val="black">
+                    <a:tint val="75000"/>
+                  </a:prstClr>
+                </a:solidFill>
+                <a:effectLst/>
+                <a:uLnTx/>
+                <a:uFillTx/>
+                <a:latin typeface="Helvetica Neue" panose="02000503000000020004" pitchFamily="2" charset="0"/>
+                <a:ea typeface="Helvetica Neue" panose="02000503000000020004" pitchFamily="2" charset="0"/>
+                <a:cs typeface="Helvetica Neue" panose="02000503000000020004" pitchFamily="2" charset="0"/>
+              </a:rPr>
+              <a:t>architrino.com</a:t>
+            </a:r>
+          </a:p>
+        </p:txBody>
+      </p:sp>
     </p:spTree>
     <p:extLst>
       <p:ext uri="{BB962C8B-B14F-4D97-AF65-F5344CB8AC3E}">
-        <p14:creationId xmlns:p14="http://schemas.microsoft.com/office/powerpoint/2010/main" val="4250219711"/>
+        <ns3:creationId val="4250219711"/>
       </p:ext>
     </p:extLst>
   </p:cSld>
@@ -12506,7 +14222,7 @@
 </file>
 
 <file path=ppt/slides/slide2.xml><?xml version="1.0" encoding="utf-8"?>
-<p:sld xmlns:a="http://schemas.openxmlformats.org/drawingml/2006/main" xmlns:r="http://schemas.openxmlformats.org/officeDocument/2006/relationships" xmlns:p="http://schemas.openxmlformats.org/presentationml/2006/main">
+<p:sld xmlns:a="http://schemas.openxmlformats.org/drawingml/2006/main" xmlns:a16="http://schemas.microsoft.com/office/drawing/2014/main" xmlns:ns4="http://schemas.microsoft.com/office/powerpoint/2010/main" xmlns:p="http://schemas.openxmlformats.org/presentationml/2006/main" xmlns:r="http://schemas.openxmlformats.org/officeDocument/2006/relationships">
   <p:cSld>
     <p:bg>
       <p:bgPr>
@@ -12535,7 +14251,7 @@
           <p:cNvPr id="2" name="TextBox 1">
             <a:extLst>
               <a:ext uri="{FF2B5EF4-FFF2-40B4-BE49-F238E27FC236}">
-                <a16:creationId xmlns:a16="http://schemas.microsoft.com/office/drawing/2014/main" id="{1D77ACA5-3691-8FEB-0266-8D47BBCCF4C6}"/>
+                <a16:creationId id="{1D77ACA5-3691-8FEB-0266-8D47BBCCF4C6}"/>
               </a:ext>
             </a:extLst>
           </p:cNvPr>
@@ -12579,7 +14295,7 @@
                 <a:ea typeface="Helvetica Neue Thin" panose="020B0403020202020204" pitchFamily="34" charset="0"/>
                 <a:cs typeface="Helvetica Neue" panose="02000503000000020004" pitchFamily="2" charset="0"/>
               </a:rPr>
-              <a:t>neoclassical.ai</a:t>
+              <a:t/>
             </a:r>
           </a:p>
           <a:p>
@@ -12655,7 +14371,7 @@
           <p:cNvPr id="3" name="Picture 2">
             <a:extLst>
               <a:ext uri="{FF2B5EF4-FFF2-40B4-BE49-F238E27FC236}">
-                <a16:creationId xmlns:a16="http://schemas.microsoft.com/office/drawing/2014/main" id="{608F758E-94B5-074B-1301-340B594BAE0E}"/>
+                <a16:creationId id="{608F758E-94B5-074B-1301-340B594BAE0E}"/>
               </a:ext>
             </a:extLst>
           </p:cNvPr>
@@ -12685,7 +14401,7 @@
           <p:cNvPr id="4" name="TextBox 3">
             <a:extLst>
               <a:ext uri="{FF2B5EF4-FFF2-40B4-BE49-F238E27FC236}">
-                <a16:creationId xmlns:a16="http://schemas.microsoft.com/office/drawing/2014/main" id="{CB18998F-2FD9-0C21-DB11-0772A53D8050}"/>
+                <a16:creationId id="{CB18998F-2FD9-0C21-DB11-0772A53D8050}"/>
               </a:ext>
             </a:extLst>
           </p:cNvPr>
@@ -12722,10 +14438,166 @@
           </a:p>
         </p:txBody>
       </p:sp>
+      <p:sp>
+        <p:nvSpPr>
+          <p:cNvPr id="5" name="Footer Placeholder 3"/>
+          <p:cNvSpPr txBox="1">
+            <a:spLocks/>
+          </p:cNvSpPr>
+          <p:nvPr/>
+        </p:nvSpPr>
+        <p:spPr>
+          <a:xfrm>
+            <a:off x="10942204" y="6481737"/>
+            <a:ext cx="1217443" cy="365125"/>
+          </a:xfrm>
+          <a:prstGeom prst="rect">
+            <a:avLst/>
+          </a:prstGeom>
+        </p:spPr>
+        <p:txBody>
+          <a:bodyPr vert="horz" lIns="91440" tIns="45720" rIns="91440" bIns="45720" rtlCol="0" anchor="ctr"/>
+          <a:lstStyle>
+            <a:defPPr>
+              <a:defRPr lang="en-US"/>
+            </a:defPPr>
+            <a:lvl1pPr marL="0" algn="ctr" defTabSz="914400" rtl="0" eaLnBrk="1" latinLnBrk="0" hangingPunct="1">
+              <a:defRPr sz="1200" kern="1200">
+                <a:solidFill>
+                  <a:schemeClr val="tx1">
+                    <a:tint val="75000"/>
+                  </a:schemeClr>
+                </a:solidFill>
+                <a:latin typeface="+mn-lt"/>
+                <a:ea typeface="+mn-ea"/>
+                <a:cs typeface="+mn-cs"/>
+              </a:defRPr>
+            </a:lvl1pPr>
+            <a:lvl2pPr marL="457200" algn="l" defTabSz="914400" rtl="0" eaLnBrk="1" latinLnBrk="0" hangingPunct="1">
+              <a:defRPr sz="1800" kern="1200">
+                <a:solidFill>
+                  <a:schemeClr val="tx1"/>
+                </a:solidFill>
+                <a:latin typeface="+mn-lt"/>
+                <a:ea typeface="+mn-ea"/>
+                <a:cs typeface="+mn-cs"/>
+              </a:defRPr>
+            </a:lvl2pPr>
+            <a:lvl3pPr marL="914400" algn="l" defTabSz="914400" rtl="0" eaLnBrk="1" latinLnBrk="0" hangingPunct="1">
+              <a:defRPr sz="1800" kern="1200">
+                <a:solidFill>
+                  <a:schemeClr val="tx1"/>
+                </a:solidFill>
+                <a:latin typeface="+mn-lt"/>
+                <a:ea typeface="+mn-ea"/>
+                <a:cs typeface="+mn-cs"/>
+              </a:defRPr>
+            </a:lvl3pPr>
+            <a:lvl4pPr marL="1371600" algn="l" defTabSz="914400" rtl="0" eaLnBrk="1" latinLnBrk="0" hangingPunct="1">
+              <a:defRPr sz="1800" kern="1200">
+                <a:solidFill>
+                  <a:schemeClr val="tx1"/>
+                </a:solidFill>
+                <a:latin typeface="+mn-lt"/>
+                <a:ea typeface="+mn-ea"/>
+                <a:cs typeface="+mn-cs"/>
+              </a:defRPr>
+            </a:lvl4pPr>
+            <a:lvl5pPr marL="1828800" algn="l" defTabSz="914400" rtl="0" eaLnBrk="1" latinLnBrk="0" hangingPunct="1">
+              <a:defRPr sz="1800" kern="1200">
+                <a:solidFill>
+                  <a:schemeClr val="tx1"/>
+                </a:solidFill>
+                <a:latin typeface="+mn-lt"/>
+                <a:ea typeface="+mn-ea"/>
+                <a:cs typeface="+mn-cs"/>
+              </a:defRPr>
+            </a:lvl5pPr>
+            <a:lvl6pPr marL="2286000" algn="l" defTabSz="914400" rtl="0" eaLnBrk="1" latinLnBrk="0" hangingPunct="1">
+              <a:defRPr sz="1800" kern="1200">
+                <a:solidFill>
+                  <a:schemeClr val="tx1"/>
+                </a:solidFill>
+                <a:latin typeface="+mn-lt"/>
+                <a:ea typeface="+mn-ea"/>
+                <a:cs typeface="+mn-cs"/>
+              </a:defRPr>
+            </a:lvl6pPr>
+            <a:lvl7pPr marL="2743200" algn="l" defTabSz="914400" rtl="0" eaLnBrk="1" latinLnBrk="0" hangingPunct="1">
+              <a:defRPr sz="1800" kern="1200">
+                <a:solidFill>
+                  <a:schemeClr val="tx1"/>
+                </a:solidFill>
+                <a:latin typeface="+mn-lt"/>
+                <a:ea typeface="+mn-ea"/>
+                <a:cs typeface="+mn-cs"/>
+              </a:defRPr>
+            </a:lvl7pPr>
+            <a:lvl8pPr marL="3200400" algn="l" defTabSz="914400" rtl="0" eaLnBrk="1" latinLnBrk="0" hangingPunct="1">
+              <a:defRPr sz="1800" kern="1200">
+                <a:solidFill>
+                  <a:schemeClr val="tx1"/>
+                </a:solidFill>
+                <a:latin typeface="+mn-lt"/>
+                <a:ea typeface="+mn-ea"/>
+                <a:cs typeface="+mn-cs"/>
+              </a:defRPr>
+            </a:lvl8pPr>
+            <a:lvl9pPr marL="3657600" algn="l" defTabSz="914400" rtl="0" eaLnBrk="1" latinLnBrk="0" hangingPunct="1">
+              <a:defRPr sz="1800" kern="1200">
+                <a:solidFill>
+                  <a:schemeClr val="tx1"/>
+                </a:solidFill>
+                <a:latin typeface="+mn-lt"/>
+                <a:ea typeface="+mn-ea"/>
+                <a:cs typeface="+mn-cs"/>
+              </a:defRPr>
+            </a:lvl9pPr>
+          </a:lstStyle>
+          <a:p>
+            <a:pPr marL="0" marR="0" lvl="0" indent="0" algn="ctr" defTabSz="914400" rtl="0" eaLnBrk="1" fontAlgn="auto" latinLnBrk="0" hangingPunct="1">
+              <a:lnSpc>
+                <a:spcPct val="100000"/>
+              </a:lnSpc>
+              <a:spcBef>
+                <a:spcPts val="0"/>
+              </a:spcBef>
+              <a:spcAft>
+                <a:spcPts val="0"/>
+              </a:spcAft>
+              <a:buClrTx/>
+              <a:buSzTx/>
+              <a:buFontTx/>
+              <a:buNone/>
+              <a:tabLst/>
+              <a:defRPr/>
+            </a:pPr>
+            <a:r>
+              <a:rPr kumimoji="0" lang="en-US" sz="1200" b="0" i="0" u="none" strike="noStrike" kern="1200" cap="none" spc="0" normalizeH="0" baseline="0" noProof="0" dirty="0">
+                <a:ln>
+                  <a:noFill/>
+                </a:ln>
+                <a:solidFill>
+                  <a:prstClr val="black">
+                    <a:tint val="75000"/>
+                  </a:prstClr>
+                </a:solidFill>
+                <a:effectLst/>
+                <a:uLnTx/>
+                <a:uFillTx/>
+                <a:latin typeface="Helvetica Neue" panose="02000503000000020004" pitchFamily="2" charset="0"/>
+                <a:ea typeface="Helvetica Neue" panose="02000503000000020004" pitchFamily="2" charset="0"/>
+                <a:cs typeface="Helvetica Neue" panose="02000503000000020004" pitchFamily="2" charset="0"/>
+              </a:rPr>
+              <a:t>architrino.com</a:t>
+            </a:r>
+          </a:p>
+        </p:txBody>
+      </p:sp>
     </p:spTree>
     <p:extLst>
       <p:ext uri="{BB962C8B-B14F-4D97-AF65-F5344CB8AC3E}">
-        <p14:creationId xmlns:p14="http://schemas.microsoft.com/office/powerpoint/2010/main" val="3941009621"/>
+        <ns4:creationId val="3941009621"/>
       </p:ext>
     </p:extLst>
   </p:cSld>
@@ -12736,7 +14608,7 @@
 </file>
 
 <file path=ppt/slides/slide20.xml><?xml version="1.0" encoding="utf-8"?>
-<p:sld xmlns:a="http://schemas.openxmlformats.org/drawingml/2006/main" xmlns:r="http://schemas.openxmlformats.org/officeDocument/2006/relationships" xmlns:p="http://schemas.openxmlformats.org/presentationml/2006/main">
+<p:sld xmlns:a="http://schemas.openxmlformats.org/drawingml/2006/main" xmlns:a16="http://schemas.microsoft.com/office/drawing/2014/main" xmlns:ns3="http://schemas.microsoft.com/office/powerpoint/2010/main" xmlns:p="http://schemas.openxmlformats.org/presentationml/2006/main">
   <p:cSld>
     <p:bg>
       <p:bgPr>
@@ -12751,7 +14623,7 @@
         <p:cNvPr id="1" name="">
           <a:extLst>
             <a:ext uri="{FF2B5EF4-FFF2-40B4-BE49-F238E27FC236}">
-              <a16:creationId xmlns:a16="http://schemas.microsoft.com/office/drawing/2014/main" id="{97562E83-9294-BF8B-CF72-BC3C97B88B22}"/>
+              <a16:creationId id="{97562E83-9294-BF8B-CF72-BC3C97B88B22}"/>
             </a:ext>
           </a:extLst>
         </p:cNvPr>
@@ -12771,7 +14643,7 @@
           <p:cNvPr id="2" name="TextBox 1">
             <a:extLst>
               <a:ext uri="{FF2B5EF4-FFF2-40B4-BE49-F238E27FC236}">
-                <a16:creationId xmlns:a16="http://schemas.microsoft.com/office/drawing/2014/main" id="{F5CF185C-9A2C-34BB-0E6E-62D58065332C}"/>
+                <a16:creationId id="{F5CF185C-9A2C-34BB-0E6E-62D58065332C}"/>
               </a:ext>
             </a:extLst>
           </p:cNvPr>
@@ -12815,7 +14687,7 @@
                 <a:ea typeface="Helvetica Neue Thin" panose="020B0403020202020204" pitchFamily="34" charset="0"/>
                 <a:cs typeface="Helvetica Neue" panose="02000503000000020004" pitchFamily="2" charset="0"/>
               </a:rPr>
-              <a:t>neoclassical.ai</a:t>
+              <a:t/>
             </a:r>
           </a:p>
           <a:p>
@@ -12955,10 +14827,166 @@
           </a:p>
         </p:txBody>
       </p:sp>
+      <p:sp>
+        <p:nvSpPr>
+          <p:cNvPr id="3" name="Footer Placeholder 3"/>
+          <p:cNvSpPr txBox="1">
+            <a:spLocks/>
+          </p:cNvSpPr>
+          <p:nvPr/>
+        </p:nvSpPr>
+        <p:spPr>
+          <a:xfrm>
+            <a:off x="10942204" y="6481737"/>
+            <a:ext cx="1217443" cy="365125"/>
+          </a:xfrm>
+          <a:prstGeom prst="rect">
+            <a:avLst/>
+          </a:prstGeom>
+        </p:spPr>
+        <p:txBody>
+          <a:bodyPr vert="horz" lIns="91440" tIns="45720" rIns="91440" bIns="45720" rtlCol="0" anchor="ctr"/>
+          <a:lstStyle>
+            <a:defPPr>
+              <a:defRPr lang="en-US"/>
+            </a:defPPr>
+            <a:lvl1pPr marL="0" algn="ctr" defTabSz="914400" rtl="0" eaLnBrk="1" latinLnBrk="0" hangingPunct="1">
+              <a:defRPr sz="1200" kern="1200">
+                <a:solidFill>
+                  <a:schemeClr val="tx1">
+                    <a:tint val="75000"/>
+                  </a:schemeClr>
+                </a:solidFill>
+                <a:latin typeface="+mn-lt"/>
+                <a:ea typeface="+mn-ea"/>
+                <a:cs typeface="+mn-cs"/>
+              </a:defRPr>
+            </a:lvl1pPr>
+            <a:lvl2pPr marL="457200" algn="l" defTabSz="914400" rtl="0" eaLnBrk="1" latinLnBrk="0" hangingPunct="1">
+              <a:defRPr sz="1800" kern="1200">
+                <a:solidFill>
+                  <a:schemeClr val="tx1"/>
+                </a:solidFill>
+                <a:latin typeface="+mn-lt"/>
+                <a:ea typeface="+mn-ea"/>
+                <a:cs typeface="+mn-cs"/>
+              </a:defRPr>
+            </a:lvl2pPr>
+            <a:lvl3pPr marL="914400" algn="l" defTabSz="914400" rtl="0" eaLnBrk="1" latinLnBrk="0" hangingPunct="1">
+              <a:defRPr sz="1800" kern="1200">
+                <a:solidFill>
+                  <a:schemeClr val="tx1"/>
+                </a:solidFill>
+                <a:latin typeface="+mn-lt"/>
+                <a:ea typeface="+mn-ea"/>
+                <a:cs typeface="+mn-cs"/>
+              </a:defRPr>
+            </a:lvl3pPr>
+            <a:lvl4pPr marL="1371600" algn="l" defTabSz="914400" rtl="0" eaLnBrk="1" latinLnBrk="0" hangingPunct="1">
+              <a:defRPr sz="1800" kern="1200">
+                <a:solidFill>
+                  <a:schemeClr val="tx1"/>
+                </a:solidFill>
+                <a:latin typeface="+mn-lt"/>
+                <a:ea typeface="+mn-ea"/>
+                <a:cs typeface="+mn-cs"/>
+              </a:defRPr>
+            </a:lvl4pPr>
+            <a:lvl5pPr marL="1828800" algn="l" defTabSz="914400" rtl="0" eaLnBrk="1" latinLnBrk="0" hangingPunct="1">
+              <a:defRPr sz="1800" kern="1200">
+                <a:solidFill>
+                  <a:schemeClr val="tx1"/>
+                </a:solidFill>
+                <a:latin typeface="+mn-lt"/>
+                <a:ea typeface="+mn-ea"/>
+                <a:cs typeface="+mn-cs"/>
+              </a:defRPr>
+            </a:lvl5pPr>
+            <a:lvl6pPr marL="2286000" algn="l" defTabSz="914400" rtl="0" eaLnBrk="1" latinLnBrk="0" hangingPunct="1">
+              <a:defRPr sz="1800" kern="1200">
+                <a:solidFill>
+                  <a:schemeClr val="tx1"/>
+                </a:solidFill>
+                <a:latin typeface="+mn-lt"/>
+                <a:ea typeface="+mn-ea"/>
+                <a:cs typeface="+mn-cs"/>
+              </a:defRPr>
+            </a:lvl6pPr>
+            <a:lvl7pPr marL="2743200" algn="l" defTabSz="914400" rtl="0" eaLnBrk="1" latinLnBrk="0" hangingPunct="1">
+              <a:defRPr sz="1800" kern="1200">
+                <a:solidFill>
+                  <a:schemeClr val="tx1"/>
+                </a:solidFill>
+                <a:latin typeface="+mn-lt"/>
+                <a:ea typeface="+mn-ea"/>
+                <a:cs typeface="+mn-cs"/>
+              </a:defRPr>
+            </a:lvl7pPr>
+            <a:lvl8pPr marL="3200400" algn="l" defTabSz="914400" rtl="0" eaLnBrk="1" latinLnBrk="0" hangingPunct="1">
+              <a:defRPr sz="1800" kern="1200">
+                <a:solidFill>
+                  <a:schemeClr val="tx1"/>
+                </a:solidFill>
+                <a:latin typeface="+mn-lt"/>
+                <a:ea typeface="+mn-ea"/>
+                <a:cs typeface="+mn-cs"/>
+              </a:defRPr>
+            </a:lvl8pPr>
+            <a:lvl9pPr marL="3657600" algn="l" defTabSz="914400" rtl="0" eaLnBrk="1" latinLnBrk="0" hangingPunct="1">
+              <a:defRPr sz="1800" kern="1200">
+                <a:solidFill>
+                  <a:schemeClr val="tx1"/>
+                </a:solidFill>
+                <a:latin typeface="+mn-lt"/>
+                <a:ea typeface="+mn-ea"/>
+                <a:cs typeface="+mn-cs"/>
+              </a:defRPr>
+            </a:lvl9pPr>
+          </a:lstStyle>
+          <a:p>
+            <a:pPr marL="0" marR="0" lvl="0" indent="0" algn="ctr" defTabSz="914400" rtl="0" eaLnBrk="1" fontAlgn="auto" latinLnBrk="0" hangingPunct="1">
+              <a:lnSpc>
+                <a:spcPct val="100000"/>
+              </a:lnSpc>
+              <a:spcBef>
+                <a:spcPts val="0"/>
+              </a:spcBef>
+              <a:spcAft>
+                <a:spcPts val="0"/>
+              </a:spcAft>
+              <a:buClrTx/>
+              <a:buSzTx/>
+              <a:buFontTx/>
+              <a:buNone/>
+              <a:tabLst/>
+              <a:defRPr/>
+            </a:pPr>
+            <a:r>
+              <a:rPr kumimoji="0" lang="en-US" sz="1200" b="0" i="0" u="none" strike="noStrike" kern="1200" cap="none" spc="0" normalizeH="0" baseline="0" noProof="0" dirty="0">
+                <a:ln>
+                  <a:noFill/>
+                </a:ln>
+                <a:solidFill>
+                  <a:prstClr val="black">
+                    <a:tint val="75000"/>
+                  </a:prstClr>
+                </a:solidFill>
+                <a:effectLst/>
+                <a:uLnTx/>
+                <a:uFillTx/>
+                <a:latin typeface="Helvetica Neue" panose="02000503000000020004" pitchFamily="2" charset="0"/>
+                <a:ea typeface="Helvetica Neue" panose="02000503000000020004" pitchFamily="2" charset="0"/>
+                <a:cs typeface="Helvetica Neue" panose="02000503000000020004" pitchFamily="2" charset="0"/>
+              </a:rPr>
+              <a:t>architrino.com</a:t>
+            </a:r>
+          </a:p>
+        </p:txBody>
+      </p:sp>
     </p:spTree>
     <p:extLst>
       <p:ext uri="{BB962C8B-B14F-4D97-AF65-F5344CB8AC3E}">
-        <p14:creationId xmlns:p14="http://schemas.microsoft.com/office/powerpoint/2010/main" val="1943155439"/>
+        <ns3:creationId val="1943155439"/>
       </p:ext>
     </p:extLst>
   </p:cSld>
@@ -12969,7 +14997,7 @@
 </file>
 
 <file path=ppt/slides/slide21.xml><?xml version="1.0" encoding="utf-8"?>
-<p:sld xmlns:a="http://schemas.openxmlformats.org/drawingml/2006/main" xmlns:r="http://schemas.openxmlformats.org/officeDocument/2006/relationships" xmlns:p="http://schemas.openxmlformats.org/presentationml/2006/main">
+<p:sld xmlns:a="http://schemas.openxmlformats.org/drawingml/2006/main" xmlns:a16="http://schemas.microsoft.com/office/drawing/2014/main" xmlns:ns3="http://schemas.microsoft.com/office/powerpoint/2010/main" xmlns:p="http://schemas.openxmlformats.org/presentationml/2006/main">
   <p:cSld>
     <p:bg>
       <p:bgPr>
@@ -12998,7 +15026,7 @@
           <p:cNvPr id="2" name="TextBox 1">
             <a:extLst>
               <a:ext uri="{FF2B5EF4-FFF2-40B4-BE49-F238E27FC236}">
-                <a16:creationId xmlns:a16="http://schemas.microsoft.com/office/drawing/2014/main" id="{1D77ACA5-3691-8FEB-0266-8D47BBCCF4C6}"/>
+                <a16:creationId id="{1D77ACA5-3691-8FEB-0266-8D47BBCCF4C6}"/>
               </a:ext>
             </a:extLst>
           </p:cNvPr>
@@ -13042,7 +15070,7 @@
                 <a:ea typeface="Helvetica Neue Thin" panose="020B0403020202020204" pitchFamily="34" charset="0"/>
                 <a:cs typeface="Helvetica Neue" panose="02000503000000020004" pitchFamily="2" charset="0"/>
               </a:rPr>
-              <a:t>neoclassical.ai</a:t>
+              <a:t/>
             </a:r>
           </a:p>
           <a:p>
@@ -13164,10 +15192,166 @@
           </a:p>
         </p:txBody>
       </p:sp>
+      <p:sp>
+        <p:nvSpPr>
+          <p:cNvPr id="3" name="Footer Placeholder 3"/>
+          <p:cNvSpPr txBox="1">
+            <a:spLocks/>
+          </p:cNvSpPr>
+          <p:nvPr/>
+        </p:nvSpPr>
+        <p:spPr>
+          <a:xfrm>
+            <a:off x="10942204" y="6481737"/>
+            <a:ext cx="1217443" cy="365125"/>
+          </a:xfrm>
+          <a:prstGeom prst="rect">
+            <a:avLst/>
+          </a:prstGeom>
+        </p:spPr>
+        <p:txBody>
+          <a:bodyPr vert="horz" lIns="91440" tIns="45720" rIns="91440" bIns="45720" rtlCol="0" anchor="ctr"/>
+          <a:lstStyle>
+            <a:defPPr>
+              <a:defRPr lang="en-US"/>
+            </a:defPPr>
+            <a:lvl1pPr marL="0" algn="ctr" defTabSz="914400" rtl="0" eaLnBrk="1" latinLnBrk="0" hangingPunct="1">
+              <a:defRPr sz="1200" kern="1200">
+                <a:solidFill>
+                  <a:schemeClr val="tx1">
+                    <a:tint val="75000"/>
+                  </a:schemeClr>
+                </a:solidFill>
+                <a:latin typeface="+mn-lt"/>
+                <a:ea typeface="+mn-ea"/>
+                <a:cs typeface="+mn-cs"/>
+              </a:defRPr>
+            </a:lvl1pPr>
+            <a:lvl2pPr marL="457200" algn="l" defTabSz="914400" rtl="0" eaLnBrk="1" latinLnBrk="0" hangingPunct="1">
+              <a:defRPr sz="1800" kern="1200">
+                <a:solidFill>
+                  <a:schemeClr val="tx1"/>
+                </a:solidFill>
+                <a:latin typeface="+mn-lt"/>
+                <a:ea typeface="+mn-ea"/>
+                <a:cs typeface="+mn-cs"/>
+              </a:defRPr>
+            </a:lvl2pPr>
+            <a:lvl3pPr marL="914400" algn="l" defTabSz="914400" rtl="0" eaLnBrk="1" latinLnBrk="0" hangingPunct="1">
+              <a:defRPr sz="1800" kern="1200">
+                <a:solidFill>
+                  <a:schemeClr val="tx1"/>
+                </a:solidFill>
+                <a:latin typeface="+mn-lt"/>
+                <a:ea typeface="+mn-ea"/>
+                <a:cs typeface="+mn-cs"/>
+              </a:defRPr>
+            </a:lvl3pPr>
+            <a:lvl4pPr marL="1371600" algn="l" defTabSz="914400" rtl="0" eaLnBrk="1" latinLnBrk="0" hangingPunct="1">
+              <a:defRPr sz="1800" kern="1200">
+                <a:solidFill>
+                  <a:schemeClr val="tx1"/>
+                </a:solidFill>
+                <a:latin typeface="+mn-lt"/>
+                <a:ea typeface="+mn-ea"/>
+                <a:cs typeface="+mn-cs"/>
+              </a:defRPr>
+            </a:lvl4pPr>
+            <a:lvl5pPr marL="1828800" algn="l" defTabSz="914400" rtl="0" eaLnBrk="1" latinLnBrk="0" hangingPunct="1">
+              <a:defRPr sz="1800" kern="1200">
+                <a:solidFill>
+                  <a:schemeClr val="tx1"/>
+                </a:solidFill>
+                <a:latin typeface="+mn-lt"/>
+                <a:ea typeface="+mn-ea"/>
+                <a:cs typeface="+mn-cs"/>
+              </a:defRPr>
+            </a:lvl5pPr>
+            <a:lvl6pPr marL="2286000" algn="l" defTabSz="914400" rtl="0" eaLnBrk="1" latinLnBrk="0" hangingPunct="1">
+              <a:defRPr sz="1800" kern="1200">
+                <a:solidFill>
+                  <a:schemeClr val="tx1"/>
+                </a:solidFill>
+                <a:latin typeface="+mn-lt"/>
+                <a:ea typeface="+mn-ea"/>
+                <a:cs typeface="+mn-cs"/>
+              </a:defRPr>
+            </a:lvl6pPr>
+            <a:lvl7pPr marL="2743200" algn="l" defTabSz="914400" rtl="0" eaLnBrk="1" latinLnBrk="0" hangingPunct="1">
+              <a:defRPr sz="1800" kern="1200">
+                <a:solidFill>
+                  <a:schemeClr val="tx1"/>
+                </a:solidFill>
+                <a:latin typeface="+mn-lt"/>
+                <a:ea typeface="+mn-ea"/>
+                <a:cs typeface="+mn-cs"/>
+              </a:defRPr>
+            </a:lvl7pPr>
+            <a:lvl8pPr marL="3200400" algn="l" defTabSz="914400" rtl="0" eaLnBrk="1" latinLnBrk="0" hangingPunct="1">
+              <a:defRPr sz="1800" kern="1200">
+                <a:solidFill>
+                  <a:schemeClr val="tx1"/>
+                </a:solidFill>
+                <a:latin typeface="+mn-lt"/>
+                <a:ea typeface="+mn-ea"/>
+                <a:cs typeface="+mn-cs"/>
+              </a:defRPr>
+            </a:lvl8pPr>
+            <a:lvl9pPr marL="3657600" algn="l" defTabSz="914400" rtl="0" eaLnBrk="1" latinLnBrk="0" hangingPunct="1">
+              <a:defRPr sz="1800" kern="1200">
+                <a:solidFill>
+                  <a:schemeClr val="tx1"/>
+                </a:solidFill>
+                <a:latin typeface="+mn-lt"/>
+                <a:ea typeface="+mn-ea"/>
+                <a:cs typeface="+mn-cs"/>
+              </a:defRPr>
+            </a:lvl9pPr>
+          </a:lstStyle>
+          <a:p>
+            <a:pPr marL="0" marR="0" lvl="0" indent="0" algn="ctr" defTabSz="914400" rtl="0" eaLnBrk="1" fontAlgn="auto" latinLnBrk="0" hangingPunct="1">
+              <a:lnSpc>
+                <a:spcPct val="100000"/>
+              </a:lnSpc>
+              <a:spcBef>
+                <a:spcPts val="0"/>
+              </a:spcBef>
+              <a:spcAft>
+                <a:spcPts val="0"/>
+              </a:spcAft>
+              <a:buClrTx/>
+              <a:buSzTx/>
+              <a:buFontTx/>
+              <a:buNone/>
+              <a:tabLst/>
+              <a:defRPr/>
+            </a:pPr>
+            <a:r>
+              <a:rPr kumimoji="0" lang="en-US" sz="1200" b="0" i="0" u="none" strike="noStrike" kern="1200" cap="none" spc="0" normalizeH="0" baseline="0" noProof="0" dirty="0">
+                <a:ln>
+                  <a:noFill/>
+                </a:ln>
+                <a:solidFill>
+                  <a:prstClr val="black">
+                    <a:tint val="75000"/>
+                  </a:prstClr>
+                </a:solidFill>
+                <a:effectLst/>
+                <a:uLnTx/>
+                <a:uFillTx/>
+                <a:latin typeface="Helvetica Neue" panose="02000503000000020004" pitchFamily="2" charset="0"/>
+                <a:ea typeface="Helvetica Neue" panose="02000503000000020004" pitchFamily="2" charset="0"/>
+                <a:cs typeface="Helvetica Neue" panose="02000503000000020004" pitchFamily="2" charset="0"/>
+              </a:rPr>
+              <a:t>architrino.com</a:t>
+            </a:r>
+          </a:p>
+        </p:txBody>
+      </p:sp>
     </p:spTree>
     <p:extLst>
       <p:ext uri="{BB962C8B-B14F-4D97-AF65-F5344CB8AC3E}">
-        <p14:creationId xmlns:p14="http://schemas.microsoft.com/office/powerpoint/2010/main" val="3996681802"/>
+        <ns3:creationId val="3996681802"/>
       </p:ext>
     </p:extLst>
   </p:cSld>
@@ -13178,7 +15362,7 @@
 </file>
 
 <file path=ppt/slides/slide3.xml><?xml version="1.0" encoding="utf-8"?>
-<p:sld xmlns:a="http://schemas.openxmlformats.org/drawingml/2006/main" xmlns:r="http://schemas.openxmlformats.org/officeDocument/2006/relationships" xmlns:p="http://schemas.openxmlformats.org/presentationml/2006/main">
+<p:sld xmlns:a="http://schemas.openxmlformats.org/drawingml/2006/main" xmlns:a16="http://schemas.microsoft.com/office/drawing/2014/main" xmlns:ns4="http://schemas.microsoft.com/office/powerpoint/2010/main" xmlns:p="http://schemas.openxmlformats.org/presentationml/2006/main" xmlns:r="http://schemas.openxmlformats.org/officeDocument/2006/relationships">
   <p:cSld>
     <p:bg>
       <p:bgPr>
@@ -13207,7 +15391,7 @@
           <p:cNvPr id="2" name="TextBox 1">
             <a:extLst>
               <a:ext uri="{FF2B5EF4-FFF2-40B4-BE49-F238E27FC236}">
-                <a16:creationId xmlns:a16="http://schemas.microsoft.com/office/drawing/2014/main" id="{1D77ACA5-3691-8FEB-0266-8D47BBCCF4C6}"/>
+                <a16:creationId id="{1D77ACA5-3691-8FEB-0266-8D47BBCCF4C6}"/>
               </a:ext>
             </a:extLst>
           </p:cNvPr>
@@ -13251,7 +15435,7 @@
                 <a:ea typeface="Helvetica Neue Thin" panose="020B0403020202020204" pitchFamily="34" charset="0"/>
                 <a:cs typeface="Helvetica Neue" panose="02000503000000020004" pitchFamily="2" charset="0"/>
               </a:rPr>
-              <a:t>neoclassical.ai</a:t>
+              <a:t/>
             </a:r>
           </a:p>
           <a:p>
@@ -13348,7 +15532,7 @@
           <p:cNvPr id="9" name="Straight Connector 8">
             <a:extLst>
               <a:ext uri="{FF2B5EF4-FFF2-40B4-BE49-F238E27FC236}">
-                <a16:creationId xmlns:a16="http://schemas.microsoft.com/office/drawing/2014/main" id="{B7531AA8-BC8D-3FA1-88EA-A0EF15521F67}"/>
+                <a16:creationId id="{B7531AA8-BC8D-3FA1-88EA-A0EF15521F67}"/>
               </a:ext>
             </a:extLst>
           </p:cNvPr>
@@ -13392,7 +15576,7 @@
           <p:cNvPr id="12" name="Straight Connector 11">
             <a:extLst>
               <a:ext uri="{FF2B5EF4-FFF2-40B4-BE49-F238E27FC236}">
-                <a16:creationId xmlns:a16="http://schemas.microsoft.com/office/drawing/2014/main" id="{4CEF2825-EF07-0BB5-9470-127560E7B9E1}"/>
+                <a16:creationId id="{4CEF2825-EF07-0BB5-9470-127560E7B9E1}"/>
               </a:ext>
             </a:extLst>
           </p:cNvPr>
@@ -13436,7 +15620,7 @@
           <p:cNvPr id="13" name="Picture 12">
             <a:extLst>
               <a:ext uri="{FF2B5EF4-FFF2-40B4-BE49-F238E27FC236}">
-                <a16:creationId xmlns:a16="http://schemas.microsoft.com/office/drawing/2014/main" id="{25FA6717-7C61-4FFB-16E8-7DAD12D507D6}"/>
+                <a16:creationId id="{25FA6717-7C61-4FFB-16E8-7DAD12D507D6}"/>
               </a:ext>
             </a:extLst>
           </p:cNvPr>
@@ -13460,10 +15644,166 @@
           </a:prstGeom>
         </p:spPr>
       </p:pic>
+      <p:sp>
+        <p:nvSpPr>
+          <p:cNvPr id="3" name="Footer Placeholder 3"/>
+          <p:cNvSpPr txBox="1">
+            <a:spLocks/>
+          </p:cNvSpPr>
+          <p:nvPr/>
+        </p:nvSpPr>
+        <p:spPr>
+          <a:xfrm>
+            <a:off x="10942204" y="6481737"/>
+            <a:ext cx="1217443" cy="365125"/>
+          </a:xfrm>
+          <a:prstGeom prst="rect">
+            <a:avLst/>
+          </a:prstGeom>
+        </p:spPr>
+        <p:txBody>
+          <a:bodyPr vert="horz" lIns="91440" tIns="45720" rIns="91440" bIns="45720" rtlCol="0" anchor="ctr"/>
+          <a:lstStyle>
+            <a:defPPr>
+              <a:defRPr lang="en-US"/>
+            </a:defPPr>
+            <a:lvl1pPr marL="0" algn="ctr" defTabSz="914400" rtl="0" eaLnBrk="1" latinLnBrk="0" hangingPunct="1">
+              <a:defRPr sz="1200" kern="1200">
+                <a:solidFill>
+                  <a:schemeClr val="tx1">
+                    <a:tint val="75000"/>
+                  </a:schemeClr>
+                </a:solidFill>
+                <a:latin typeface="+mn-lt"/>
+                <a:ea typeface="+mn-ea"/>
+                <a:cs typeface="+mn-cs"/>
+              </a:defRPr>
+            </a:lvl1pPr>
+            <a:lvl2pPr marL="457200" algn="l" defTabSz="914400" rtl="0" eaLnBrk="1" latinLnBrk="0" hangingPunct="1">
+              <a:defRPr sz="1800" kern="1200">
+                <a:solidFill>
+                  <a:schemeClr val="tx1"/>
+                </a:solidFill>
+                <a:latin typeface="+mn-lt"/>
+                <a:ea typeface="+mn-ea"/>
+                <a:cs typeface="+mn-cs"/>
+              </a:defRPr>
+            </a:lvl2pPr>
+            <a:lvl3pPr marL="914400" algn="l" defTabSz="914400" rtl="0" eaLnBrk="1" latinLnBrk="0" hangingPunct="1">
+              <a:defRPr sz="1800" kern="1200">
+                <a:solidFill>
+                  <a:schemeClr val="tx1"/>
+                </a:solidFill>
+                <a:latin typeface="+mn-lt"/>
+                <a:ea typeface="+mn-ea"/>
+                <a:cs typeface="+mn-cs"/>
+              </a:defRPr>
+            </a:lvl3pPr>
+            <a:lvl4pPr marL="1371600" algn="l" defTabSz="914400" rtl="0" eaLnBrk="1" latinLnBrk="0" hangingPunct="1">
+              <a:defRPr sz="1800" kern="1200">
+                <a:solidFill>
+                  <a:schemeClr val="tx1"/>
+                </a:solidFill>
+                <a:latin typeface="+mn-lt"/>
+                <a:ea typeface="+mn-ea"/>
+                <a:cs typeface="+mn-cs"/>
+              </a:defRPr>
+            </a:lvl4pPr>
+            <a:lvl5pPr marL="1828800" algn="l" defTabSz="914400" rtl="0" eaLnBrk="1" latinLnBrk="0" hangingPunct="1">
+              <a:defRPr sz="1800" kern="1200">
+                <a:solidFill>
+                  <a:schemeClr val="tx1"/>
+                </a:solidFill>
+                <a:latin typeface="+mn-lt"/>
+                <a:ea typeface="+mn-ea"/>
+                <a:cs typeface="+mn-cs"/>
+              </a:defRPr>
+            </a:lvl5pPr>
+            <a:lvl6pPr marL="2286000" algn="l" defTabSz="914400" rtl="0" eaLnBrk="1" latinLnBrk="0" hangingPunct="1">
+              <a:defRPr sz="1800" kern="1200">
+                <a:solidFill>
+                  <a:schemeClr val="tx1"/>
+                </a:solidFill>
+                <a:latin typeface="+mn-lt"/>
+                <a:ea typeface="+mn-ea"/>
+                <a:cs typeface="+mn-cs"/>
+              </a:defRPr>
+            </a:lvl6pPr>
+            <a:lvl7pPr marL="2743200" algn="l" defTabSz="914400" rtl="0" eaLnBrk="1" latinLnBrk="0" hangingPunct="1">
+              <a:defRPr sz="1800" kern="1200">
+                <a:solidFill>
+                  <a:schemeClr val="tx1"/>
+                </a:solidFill>
+                <a:latin typeface="+mn-lt"/>
+                <a:ea typeface="+mn-ea"/>
+                <a:cs typeface="+mn-cs"/>
+              </a:defRPr>
+            </a:lvl7pPr>
+            <a:lvl8pPr marL="3200400" algn="l" defTabSz="914400" rtl="0" eaLnBrk="1" latinLnBrk="0" hangingPunct="1">
+              <a:defRPr sz="1800" kern="1200">
+                <a:solidFill>
+                  <a:schemeClr val="tx1"/>
+                </a:solidFill>
+                <a:latin typeface="+mn-lt"/>
+                <a:ea typeface="+mn-ea"/>
+                <a:cs typeface="+mn-cs"/>
+              </a:defRPr>
+            </a:lvl8pPr>
+            <a:lvl9pPr marL="3657600" algn="l" defTabSz="914400" rtl="0" eaLnBrk="1" latinLnBrk="0" hangingPunct="1">
+              <a:defRPr sz="1800" kern="1200">
+                <a:solidFill>
+                  <a:schemeClr val="tx1"/>
+                </a:solidFill>
+                <a:latin typeface="+mn-lt"/>
+                <a:ea typeface="+mn-ea"/>
+                <a:cs typeface="+mn-cs"/>
+              </a:defRPr>
+            </a:lvl9pPr>
+          </a:lstStyle>
+          <a:p>
+            <a:pPr marL="0" marR="0" lvl="0" indent="0" algn="ctr" defTabSz="914400" rtl="0" eaLnBrk="1" fontAlgn="auto" latinLnBrk="0" hangingPunct="1">
+              <a:lnSpc>
+                <a:spcPct val="100000"/>
+              </a:lnSpc>
+              <a:spcBef>
+                <a:spcPts val="0"/>
+              </a:spcBef>
+              <a:spcAft>
+                <a:spcPts val="0"/>
+              </a:spcAft>
+              <a:buClrTx/>
+              <a:buSzTx/>
+              <a:buFontTx/>
+              <a:buNone/>
+              <a:tabLst/>
+              <a:defRPr/>
+            </a:pPr>
+            <a:r>
+              <a:rPr kumimoji="0" lang="en-US" sz="1200" b="0" i="0" u="none" strike="noStrike" kern="1200" cap="none" spc="0" normalizeH="0" baseline="0" noProof="0" dirty="0">
+                <a:ln>
+                  <a:noFill/>
+                </a:ln>
+                <a:solidFill>
+                  <a:prstClr val="black">
+                    <a:tint val="75000"/>
+                  </a:prstClr>
+                </a:solidFill>
+                <a:effectLst/>
+                <a:uLnTx/>
+                <a:uFillTx/>
+                <a:latin typeface="Helvetica Neue" panose="02000503000000020004" pitchFamily="2" charset="0"/>
+                <a:ea typeface="Helvetica Neue" panose="02000503000000020004" pitchFamily="2" charset="0"/>
+                <a:cs typeface="Helvetica Neue" panose="02000503000000020004" pitchFamily="2" charset="0"/>
+              </a:rPr>
+              <a:t>architrino.com</a:t>
+            </a:r>
+          </a:p>
+        </p:txBody>
+      </p:sp>
     </p:spTree>
     <p:extLst>
       <p:ext uri="{BB962C8B-B14F-4D97-AF65-F5344CB8AC3E}">
-        <p14:creationId xmlns:p14="http://schemas.microsoft.com/office/powerpoint/2010/main" val="713162349"/>
+        <ns4:creationId val="713162349"/>
       </p:ext>
     </p:extLst>
   </p:cSld>
@@ -13474,7 +15814,7 @@
 </file>
 
 <file path=ppt/slides/slide4.xml><?xml version="1.0" encoding="utf-8"?>
-<p:sld xmlns:a="http://schemas.openxmlformats.org/drawingml/2006/main" xmlns:r="http://schemas.openxmlformats.org/officeDocument/2006/relationships" xmlns:p="http://schemas.openxmlformats.org/presentationml/2006/main">
+<p:sld xmlns:a="http://schemas.openxmlformats.org/drawingml/2006/main" xmlns:a16="http://schemas.microsoft.com/office/drawing/2014/main" xmlns:ns4="http://schemas.microsoft.com/office/powerpoint/2010/main" xmlns:p="http://schemas.openxmlformats.org/presentationml/2006/main" xmlns:r="http://schemas.openxmlformats.org/officeDocument/2006/relationships">
   <p:cSld>
     <p:bg>
       <p:bgPr>
@@ -13503,7 +15843,7 @@
           <p:cNvPr id="2" name="TextBox 1">
             <a:extLst>
               <a:ext uri="{FF2B5EF4-FFF2-40B4-BE49-F238E27FC236}">
-                <a16:creationId xmlns:a16="http://schemas.microsoft.com/office/drawing/2014/main" id="{1D77ACA5-3691-8FEB-0266-8D47BBCCF4C6}"/>
+                <a16:creationId id="{1D77ACA5-3691-8FEB-0266-8D47BBCCF4C6}"/>
               </a:ext>
             </a:extLst>
           </p:cNvPr>
@@ -13547,7 +15887,7 @@
                 <a:ea typeface="Helvetica Neue Thin" panose="020B0403020202020204" pitchFamily="34" charset="0"/>
                 <a:cs typeface="Helvetica Neue" panose="02000503000000020004" pitchFamily="2" charset="0"/>
               </a:rPr>
-              <a:t>neoclassical.ai</a:t>
+              <a:t/>
             </a:r>
           </a:p>
           <a:p>
@@ -13655,7 +15995,7 @@
             <a:hlinkClick r:id="" action="ppaction://media"/>
             <a:extLst>
               <a:ext uri="{FF2B5EF4-FFF2-40B4-BE49-F238E27FC236}">
-                <a16:creationId xmlns:a16="http://schemas.microsoft.com/office/drawing/2014/main" id="{517B54EF-D7B1-E948-D130-5B2C54B785CA}"/>
+                <a16:creationId id="{517B54EF-D7B1-E948-D130-5B2C54B785CA}"/>
               </a:ext>
             </a:extLst>
           </p:cNvPr>
@@ -13666,7 +16006,7 @@
             <a:audioFile r:link="rId2"/>
             <p:extLst>
               <p:ext uri="{DAA4B4D4-6D71-4841-9C94-3DE7FCFB9230}">
-                <p14:media xmlns:p14="http://schemas.microsoft.com/office/powerpoint/2010/main" r:embed="rId1"/>
+                <ns4:media r:embed="rId1"/>
               </p:ext>
             </p:extLst>
           </p:nvPr>
@@ -13687,10 +16027,166 @@
           </a:prstGeom>
         </p:spPr>
       </p:pic>
+      <p:sp>
+        <p:nvSpPr>
+          <p:cNvPr id="3" name="Footer Placeholder 3"/>
+          <p:cNvSpPr txBox="1">
+            <a:spLocks/>
+          </p:cNvSpPr>
+          <p:nvPr/>
+        </p:nvSpPr>
+        <p:spPr>
+          <a:xfrm>
+            <a:off x="10942204" y="6481737"/>
+            <a:ext cx="1217443" cy="365125"/>
+          </a:xfrm>
+          <a:prstGeom prst="rect">
+            <a:avLst/>
+          </a:prstGeom>
+        </p:spPr>
+        <p:txBody>
+          <a:bodyPr vert="horz" lIns="91440" tIns="45720" rIns="91440" bIns="45720" rtlCol="0" anchor="ctr"/>
+          <a:lstStyle>
+            <a:defPPr>
+              <a:defRPr lang="en-US"/>
+            </a:defPPr>
+            <a:lvl1pPr marL="0" algn="ctr" defTabSz="914400" rtl="0" eaLnBrk="1" latinLnBrk="0" hangingPunct="1">
+              <a:defRPr sz="1200" kern="1200">
+                <a:solidFill>
+                  <a:schemeClr val="tx1">
+                    <a:tint val="75000"/>
+                  </a:schemeClr>
+                </a:solidFill>
+                <a:latin typeface="+mn-lt"/>
+                <a:ea typeface="+mn-ea"/>
+                <a:cs typeface="+mn-cs"/>
+              </a:defRPr>
+            </a:lvl1pPr>
+            <a:lvl2pPr marL="457200" algn="l" defTabSz="914400" rtl="0" eaLnBrk="1" latinLnBrk="0" hangingPunct="1">
+              <a:defRPr sz="1800" kern="1200">
+                <a:solidFill>
+                  <a:schemeClr val="tx1"/>
+                </a:solidFill>
+                <a:latin typeface="+mn-lt"/>
+                <a:ea typeface="+mn-ea"/>
+                <a:cs typeface="+mn-cs"/>
+              </a:defRPr>
+            </a:lvl2pPr>
+            <a:lvl3pPr marL="914400" algn="l" defTabSz="914400" rtl="0" eaLnBrk="1" latinLnBrk="0" hangingPunct="1">
+              <a:defRPr sz="1800" kern="1200">
+                <a:solidFill>
+                  <a:schemeClr val="tx1"/>
+                </a:solidFill>
+                <a:latin typeface="+mn-lt"/>
+                <a:ea typeface="+mn-ea"/>
+                <a:cs typeface="+mn-cs"/>
+              </a:defRPr>
+            </a:lvl3pPr>
+            <a:lvl4pPr marL="1371600" algn="l" defTabSz="914400" rtl="0" eaLnBrk="1" latinLnBrk="0" hangingPunct="1">
+              <a:defRPr sz="1800" kern="1200">
+                <a:solidFill>
+                  <a:schemeClr val="tx1"/>
+                </a:solidFill>
+                <a:latin typeface="+mn-lt"/>
+                <a:ea typeface="+mn-ea"/>
+                <a:cs typeface="+mn-cs"/>
+              </a:defRPr>
+            </a:lvl4pPr>
+            <a:lvl5pPr marL="1828800" algn="l" defTabSz="914400" rtl="0" eaLnBrk="1" latinLnBrk="0" hangingPunct="1">
+              <a:defRPr sz="1800" kern="1200">
+                <a:solidFill>
+                  <a:schemeClr val="tx1"/>
+                </a:solidFill>
+                <a:latin typeface="+mn-lt"/>
+                <a:ea typeface="+mn-ea"/>
+                <a:cs typeface="+mn-cs"/>
+              </a:defRPr>
+            </a:lvl5pPr>
+            <a:lvl6pPr marL="2286000" algn="l" defTabSz="914400" rtl="0" eaLnBrk="1" latinLnBrk="0" hangingPunct="1">
+              <a:defRPr sz="1800" kern="1200">
+                <a:solidFill>
+                  <a:schemeClr val="tx1"/>
+                </a:solidFill>
+                <a:latin typeface="+mn-lt"/>
+                <a:ea typeface="+mn-ea"/>
+                <a:cs typeface="+mn-cs"/>
+              </a:defRPr>
+            </a:lvl6pPr>
+            <a:lvl7pPr marL="2743200" algn="l" defTabSz="914400" rtl="0" eaLnBrk="1" latinLnBrk="0" hangingPunct="1">
+              <a:defRPr sz="1800" kern="1200">
+                <a:solidFill>
+                  <a:schemeClr val="tx1"/>
+                </a:solidFill>
+                <a:latin typeface="+mn-lt"/>
+                <a:ea typeface="+mn-ea"/>
+                <a:cs typeface="+mn-cs"/>
+              </a:defRPr>
+            </a:lvl7pPr>
+            <a:lvl8pPr marL="3200400" algn="l" defTabSz="914400" rtl="0" eaLnBrk="1" latinLnBrk="0" hangingPunct="1">
+              <a:defRPr sz="1800" kern="1200">
+                <a:solidFill>
+                  <a:schemeClr val="tx1"/>
+                </a:solidFill>
+                <a:latin typeface="+mn-lt"/>
+                <a:ea typeface="+mn-ea"/>
+                <a:cs typeface="+mn-cs"/>
+              </a:defRPr>
+            </a:lvl8pPr>
+            <a:lvl9pPr marL="3657600" algn="l" defTabSz="914400" rtl="0" eaLnBrk="1" latinLnBrk="0" hangingPunct="1">
+              <a:defRPr sz="1800" kern="1200">
+                <a:solidFill>
+                  <a:schemeClr val="tx1"/>
+                </a:solidFill>
+                <a:latin typeface="+mn-lt"/>
+                <a:ea typeface="+mn-ea"/>
+                <a:cs typeface="+mn-cs"/>
+              </a:defRPr>
+            </a:lvl9pPr>
+          </a:lstStyle>
+          <a:p>
+            <a:pPr marL="0" marR="0" lvl="0" indent="0" algn="ctr" defTabSz="914400" rtl="0" eaLnBrk="1" fontAlgn="auto" latinLnBrk="0" hangingPunct="1">
+              <a:lnSpc>
+                <a:spcPct val="100000"/>
+              </a:lnSpc>
+              <a:spcBef>
+                <a:spcPts val="0"/>
+              </a:spcBef>
+              <a:spcAft>
+                <a:spcPts val="0"/>
+              </a:spcAft>
+              <a:buClrTx/>
+              <a:buSzTx/>
+              <a:buFontTx/>
+              <a:buNone/>
+              <a:tabLst/>
+              <a:defRPr/>
+            </a:pPr>
+            <a:r>
+              <a:rPr kumimoji="0" lang="en-US" sz="1200" b="0" i="0" u="none" strike="noStrike" kern="1200" cap="none" spc="0" normalizeH="0" baseline="0" noProof="0" dirty="0">
+                <a:ln>
+                  <a:noFill/>
+                </a:ln>
+                <a:solidFill>
+                  <a:prstClr val="black">
+                    <a:tint val="75000"/>
+                  </a:prstClr>
+                </a:solidFill>
+                <a:effectLst/>
+                <a:uLnTx/>
+                <a:uFillTx/>
+                <a:latin typeface="Helvetica Neue" panose="02000503000000020004" pitchFamily="2" charset="0"/>
+                <a:ea typeface="Helvetica Neue" panose="02000503000000020004" pitchFamily="2" charset="0"/>
+                <a:cs typeface="Helvetica Neue" panose="02000503000000020004" pitchFamily="2" charset="0"/>
+              </a:rPr>
+              <a:t>architrino.com</a:t>
+            </a:r>
+          </a:p>
+        </p:txBody>
+      </p:sp>
     </p:spTree>
     <p:extLst>
       <p:ext uri="{BB962C8B-B14F-4D97-AF65-F5344CB8AC3E}">
-        <p14:creationId xmlns:p14="http://schemas.microsoft.com/office/powerpoint/2010/main" val="2348934641"/>
+        <ns4:creationId val="2348934641"/>
       </p:ext>
     </p:extLst>
   </p:cSld>
@@ -13785,7 +16281,7 @@
 </file>
 
 <file path=ppt/slides/slide5.xml><?xml version="1.0" encoding="utf-8"?>
-<p:sld xmlns:a="http://schemas.openxmlformats.org/drawingml/2006/main" xmlns:r="http://schemas.openxmlformats.org/officeDocument/2006/relationships" xmlns:p="http://schemas.openxmlformats.org/presentationml/2006/main">
+<p:sld xmlns:a="http://schemas.openxmlformats.org/drawingml/2006/main" xmlns:a16="http://schemas.microsoft.com/office/drawing/2014/main" xmlns:ns3="http://schemas.microsoft.com/office/powerpoint/2010/main" xmlns:p="http://schemas.openxmlformats.org/presentationml/2006/main">
   <p:cSld>
     <p:bg>
       <p:bgPr>
@@ -13814,7 +16310,7 @@
           <p:cNvPr id="2" name="TextBox 1">
             <a:extLst>
               <a:ext uri="{FF2B5EF4-FFF2-40B4-BE49-F238E27FC236}">
-                <a16:creationId xmlns:a16="http://schemas.microsoft.com/office/drawing/2014/main" id="{1D77ACA5-3691-8FEB-0266-8D47BBCCF4C6}"/>
+                <a16:creationId id="{1D77ACA5-3691-8FEB-0266-8D47BBCCF4C6}"/>
               </a:ext>
             </a:extLst>
           </p:cNvPr>
@@ -13858,7 +16354,7 @@
                 <a:ea typeface="Helvetica Neue Thin" panose="020B0403020202020204" pitchFamily="34" charset="0"/>
                 <a:cs typeface="Helvetica Neue" panose="02000503000000020004" pitchFamily="2" charset="0"/>
               </a:rPr>
-              <a:t>neoclassical.ai</a:t>
+              <a:t/>
             </a:r>
           </a:p>
           <a:p>
@@ -13968,10 +16464,166 @@
           </a:p>
         </p:txBody>
       </p:sp>
+      <p:sp>
+        <p:nvSpPr>
+          <p:cNvPr id="3" name="Footer Placeholder 3"/>
+          <p:cNvSpPr txBox="1">
+            <a:spLocks/>
+          </p:cNvSpPr>
+          <p:nvPr/>
+        </p:nvSpPr>
+        <p:spPr>
+          <a:xfrm>
+            <a:off x="10942204" y="6481737"/>
+            <a:ext cx="1217443" cy="365125"/>
+          </a:xfrm>
+          <a:prstGeom prst="rect">
+            <a:avLst/>
+          </a:prstGeom>
+        </p:spPr>
+        <p:txBody>
+          <a:bodyPr vert="horz" lIns="91440" tIns="45720" rIns="91440" bIns="45720" rtlCol="0" anchor="ctr"/>
+          <a:lstStyle>
+            <a:defPPr>
+              <a:defRPr lang="en-US"/>
+            </a:defPPr>
+            <a:lvl1pPr marL="0" algn="ctr" defTabSz="914400" rtl="0" eaLnBrk="1" latinLnBrk="0" hangingPunct="1">
+              <a:defRPr sz="1200" kern="1200">
+                <a:solidFill>
+                  <a:schemeClr val="tx1">
+                    <a:tint val="75000"/>
+                  </a:schemeClr>
+                </a:solidFill>
+                <a:latin typeface="+mn-lt"/>
+                <a:ea typeface="+mn-ea"/>
+                <a:cs typeface="+mn-cs"/>
+              </a:defRPr>
+            </a:lvl1pPr>
+            <a:lvl2pPr marL="457200" algn="l" defTabSz="914400" rtl="0" eaLnBrk="1" latinLnBrk="0" hangingPunct="1">
+              <a:defRPr sz="1800" kern="1200">
+                <a:solidFill>
+                  <a:schemeClr val="tx1"/>
+                </a:solidFill>
+                <a:latin typeface="+mn-lt"/>
+                <a:ea typeface="+mn-ea"/>
+                <a:cs typeface="+mn-cs"/>
+              </a:defRPr>
+            </a:lvl2pPr>
+            <a:lvl3pPr marL="914400" algn="l" defTabSz="914400" rtl="0" eaLnBrk="1" latinLnBrk="0" hangingPunct="1">
+              <a:defRPr sz="1800" kern="1200">
+                <a:solidFill>
+                  <a:schemeClr val="tx1"/>
+                </a:solidFill>
+                <a:latin typeface="+mn-lt"/>
+                <a:ea typeface="+mn-ea"/>
+                <a:cs typeface="+mn-cs"/>
+              </a:defRPr>
+            </a:lvl3pPr>
+            <a:lvl4pPr marL="1371600" algn="l" defTabSz="914400" rtl="0" eaLnBrk="1" latinLnBrk="0" hangingPunct="1">
+              <a:defRPr sz="1800" kern="1200">
+                <a:solidFill>
+                  <a:schemeClr val="tx1"/>
+                </a:solidFill>
+                <a:latin typeface="+mn-lt"/>
+                <a:ea typeface="+mn-ea"/>
+                <a:cs typeface="+mn-cs"/>
+              </a:defRPr>
+            </a:lvl4pPr>
+            <a:lvl5pPr marL="1828800" algn="l" defTabSz="914400" rtl="0" eaLnBrk="1" latinLnBrk="0" hangingPunct="1">
+              <a:defRPr sz="1800" kern="1200">
+                <a:solidFill>
+                  <a:schemeClr val="tx1"/>
+                </a:solidFill>
+                <a:latin typeface="+mn-lt"/>
+                <a:ea typeface="+mn-ea"/>
+                <a:cs typeface="+mn-cs"/>
+              </a:defRPr>
+            </a:lvl5pPr>
+            <a:lvl6pPr marL="2286000" algn="l" defTabSz="914400" rtl="0" eaLnBrk="1" latinLnBrk="0" hangingPunct="1">
+              <a:defRPr sz="1800" kern="1200">
+                <a:solidFill>
+                  <a:schemeClr val="tx1"/>
+                </a:solidFill>
+                <a:latin typeface="+mn-lt"/>
+                <a:ea typeface="+mn-ea"/>
+                <a:cs typeface="+mn-cs"/>
+              </a:defRPr>
+            </a:lvl6pPr>
+            <a:lvl7pPr marL="2743200" algn="l" defTabSz="914400" rtl="0" eaLnBrk="1" latinLnBrk="0" hangingPunct="1">
+              <a:defRPr sz="1800" kern="1200">
+                <a:solidFill>
+                  <a:schemeClr val="tx1"/>
+                </a:solidFill>
+                <a:latin typeface="+mn-lt"/>
+                <a:ea typeface="+mn-ea"/>
+                <a:cs typeface="+mn-cs"/>
+              </a:defRPr>
+            </a:lvl7pPr>
+            <a:lvl8pPr marL="3200400" algn="l" defTabSz="914400" rtl="0" eaLnBrk="1" latinLnBrk="0" hangingPunct="1">
+              <a:defRPr sz="1800" kern="1200">
+                <a:solidFill>
+                  <a:schemeClr val="tx1"/>
+                </a:solidFill>
+                <a:latin typeface="+mn-lt"/>
+                <a:ea typeface="+mn-ea"/>
+                <a:cs typeface="+mn-cs"/>
+              </a:defRPr>
+            </a:lvl8pPr>
+            <a:lvl9pPr marL="3657600" algn="l" defTabSz="914400" rtl="0" eaLnBrk="1" latinLnBrk="0" hangingPunct="1">
+              <a:defRPr sz="1800" kern="1200">
+                <a:solidFill>
+                  <a:schemeClr val="tx1"/>
+                </a:solidFill>
+                <a:latin typeface="+mn-lt"/>
+                <a:ea typeface="+mn-ea"/>
+                <a:cs typeface="+mn-cs"/>
+              </a:defRPr>
+            </a:lvl9pPr>
+          </a:lstStyle>
+          <a:p>
+            <a:pPr marL="0" marR="0" lvl="0" indent="0" algn="ctr" defTabSz="914400" rtl="0" eaLnBrk="1" fontAlgn="auto" latinLnBrk="0" hangingPunct="1">
+              <a:lnSpc>
+                <a:spcPct val="100000"/>
+              </a:lnSpc>
+              <a:spcBef>
+                <a:spcPts val="0"/>
+              </a:spcBef>
+              <a:spcAft>
+                <a:spcPts val="0"/>
+              </a:spcAft>
+              <a:buClrTx/>
+              <a:buSzTx/>
+              <a:buFontTx/>
+              <a:buNone/>
+              <a:tabLst/>
+              <a:defRPr/>
+            </a:pPr>
+            <a:r>
+              <a:rPr kumimoji="0" lang="en-US" sz="1200" b="0" i="0" u="none" strike="noStrike" kern="1200" cap="none" spc="0" normalizeH="0" baseline="0" noProof="0" dirty="0">
+                <a:ln>
+                  <a:noFill/>
+                </a:ln>
+                <a:solidFill>
+                  <a:prstClr val="black">
+                    <a:tint val="75000"/>
+                  </a:prstClr>
+                </a:solidFill>
+                <a:effectLst/>
+                <a:uLnTx/>
+                <a:uFillTx/>
+                <a:latin typeface="Helvetica Neue" panose="02000503000000020004" pitchFamily="2" charset="0"/>
+                <a:ea typeface="Helvetica Neue" panose="02000503000000020004" pitchFamily="2" charset="0"/>
+                <a:cs typeface="Helvetica Neue" panose="02000503000000020004" pitchFamily="2" charset="0"/>
+              </a:rPr>
+              <a:t>architrino.com</a:t>
+            </a:r>
+          </a:p>
+        </p:txBody>
+      </p:sp>
     </p:spTree>
     <p:extLst>
       <p:ext uri="{BB962C8B-B14F-4D97-AF65-F5344CB8AC3E}">
-        <p14:creationId xmlns:p14="http://schemas.microsoft.com/office/powerpoint/2010/main" val="1599249240"/>
+        <ns3:creationId val="1599249240"/>
       </p:ext>
     </p:extLst>
   </p:cSld>
@@ -13982,7 +16634,7 @@
 </file>
 
 <file path=ppt/slides/slide6.xml><?xml version="1.0" encoding="utf-8"?>
-<p:sld xmlns:a="http://schemas.openxmlformats.org/drawingml/2006/main" xmlns:r="http://schemas.openxmlformats.org/officeDocument/2006/relationships" xmlns:p="http://schemas.openxmlformats.org/presentationml/2006/main">
+<p:sld xmlns:a="http://schemas.openxmlformats.org/drawingml/2006/main" xmlns:a16="http://schemas.microsoft.com/office/drawing/2014/main" xmlns:ns3="http://schemas.microsoft.com/office/powerpoint/2010/main" xmlns:p="http://schemas.openxmlformats.org/presentationml/2006/main">
   <p:cSld>
     <p:bg>
       <p:bgPr>
@@ -14011,7 +16663,7 @@
           <p:cNvPr id="2" name="TextBox 1">
             <a:extLst>
               <a:ext uri="{FF2B5EF4-FFF2-40B4-BE49-F238E27FC236}">
-                <a16:creationId xmlns:a16="http://schemas.microsoft.com/office/drawing/2014/main" id="{1D77ACA5-3691-8FEB-0266-8D47BBCCF4C6}"/>
+                <a16:creationId id="{1D77ACA5-3691-8FEB-0266-8D47BBCCF4C6}"/>
               </a:ext>
             </a:extLst>
           </p:cNvPr>
@@ -14055,7 +16707,7 @@
                 <a:ea typeface="Helvetica Neue Thin" panose="020B0403020202020204" pitchFamily="34" charset="0"/>
                 <a:cs typeface="Helvetica Neue" panose="02000503000000020004" pitchFamily="2" charset="0"/>
               </a:rPr>
-              <a:t>neoclassical.ai</a:t>
+              <a:t/>
             </a:r>
           </a:p>
           <a:p>
@@ -14235,10 +16887,166 @@
           </a:p>
         </p:txBody>
       </p:sp>
+      <p:sp>
+        <p:nvSpPr>
+          <p:cNvPr id="3" name="Footer Placeholder 3"/>
+          <p:cNvSpPr txBox="1">
+            <a:spLocks/>
+          </p:cNvSpPr>
+          <p:nvPr/>
+        </p:nvSpPr>
+        <p:spPr>
+          <a:xfrm>
+            <a:off x="10942204" y="6481737"/>
+            <a:ext cx="1217443" cy="365125"/>
+          </a:xfrm>
+          <a:prstGeom prst="rect">
+            <a:avLst/>
+          </a:prstGeom>
+        </p:spPr>
+        <p:txBody>
+          <a:bodyPr vert="horz" lIns="91440" tIns="45720" rIns="91440" bIns="45720" rtlCol="0" anchor="ctr"/>
+          <a:lstStyle>
+            <a:defPPr>
+              <a:defRPr lang="en-US"/>
+            </a:defPPr>
+            <a:lvl1pPr marL="0" algn="ctr" defTabSz="914400" rtl="0" eaLnBrk="1" latinLnBrk="0" hangingPunct="1">
+              <a:defRPr sz="1200" kern="1200">
+                <a:solidFill>
+                  <a:schemeClr val="tx1">
+                    <a:tint val="75000"/>
+                  </a:schemeClr>
+                </a:solidFill>
+                <a:latin typeface="+mn-lt"/>
+                <a:ea typeface="+mn-ea"/>
+                <a:cs typeface="+mn-cs"/>
+              </a:defRPr>
+            </a:lvl1pPr>
+            <a:lvl2pPr marL="457200" algn="l" defTabSz="914400" rtl="0" eaLnBrk="1" latinLnBrk="0" hangingPunct="1">
+              <a:defRPr sz="1800" kern="1200">
+                <a:solidFill>
+                  <a:schemeClr val="tx1"/>
+                </a:solidFill>
+                <a:latin typeface="+mn-lt"/>
+                <a:ea typeface="+mn-ea"/>
+                <a:cs typeface="+mn-cs"/>
+              </a:defRPr>
+            </a:lvl2pPr>
+            <a:lvl3pPr marL="914400" algn="l" defTabSz="914400" rtl="0" eaLnBrk="1" latinLnBrk="0" hangingPunct="1">
+              <a:defRPr sz="1800" kern="1200">
+                <a:solidFill>
+                  <a:schemeClr val="tx1"/>
+                </a:solidFill>
+                <a:latin typeface="+mn-lt"/>
+                <a:ea typeface="+mn-ea"/>
+                <a:cs typeface="+mn-cs"/>
+              </a:defRPr>
+            </a:lvl3pPr>
+            <a:lvl4pPr marL="1371600" algn="l" defTabSz="914400" rtl="0" eaLnBrk="1" latinLnBrk="0" hangingPunct="1">
+              <a:defRPr sz="1800" kern="1200">
+                <a:solidFill>
+                  <a:schemeClr val="tx1"/>
+                </a:solidFill>
+                <a:latin typeface="+mn-lt"/>
+                <a:ea typeface="+mn-ea"/>
+                <a:cs typeface="+mn-cs"/>
+              </a:defRPr>
+            </a:lvl4pPr>
+            <a:lvl5pPr marL="1828800" algn="l" defTabSz="914400" rtl="0" eaLnBrk="1" latinLnBrk="0" hangingPunct="1">
+              <a:defRPr sz="1800" kern="1200">
+                <a:solidFill>
+                  <a:schemeClr val="tx1"/>
+                </a:solidFill>
+                <a:latin typeface="+mn-lt"/>
+                <a:ea typeface="+mn-ea"/>
+                <a:cs typeface="+mn-cs"/>
+              </a:defRPr>
+            </a:lvl5pPr>
+            <a:lvl6pPr marL="2286000" algn="l" defTabSz="914400" rtl="0" eaLnBrk="1" latinLnBrk="0" hangingPunct="1">
+              <a:defRPr sz="1800" kern="1200">
+                <a:solidFill>
+                  <a:schemeClr val="tx1"/>
+                </a:solidFill>
+                <a:latin typeface="+mn-lt"/>
+                <a:ea typeface="+mn-ea"/>
+                <a:cs typeface="+mn-cs"/>
+              </a:defRPr>
+            </a:lvl6pPr>
+            <a:lvl7pPr marL="2743200" algn="l" defTabSz="914400" rtl="0" eaLnBrk="1" latinLnBrk="0" hangingPunct="1">
+              <a:defRPr sz="1800" kern="1200">
+                <a:solidFill>
+                  <a:schemeClr val="tx1"/>
+                </a:solidFill>
+                <a:latin typeface="+mn-lt"/>
+                <a:ea typeface="+mn-ea"/>
+                <a:cs typeface="+mn-cs"/>
+              </a:defRPr>
+            </a:lvl7pPr>
+            <a:lvl8pPr marL="3200400" algn="l" defTabSz="914400" rtl="0" eaLnBrk="1" latinLnBrk="0" hangingPunct="1">
+              <a:defRPr sz="1800" kern="1200">
+                <a:solidFill>
+                  <a:schemeClr val="tx1"/>
+                </a:solidFill>
+                <a:latin typeface="+mn-lt"/>
+                <a:ea typeface="+mn-ea"/>
+                <a:cs typeface="+mn-cs"/>
+              </a:defRPr>
+            </a:lvl8pPr>
+            <a:lvl9pPr marL="3657600" algn="l" defTabSz="914400" rtl="0" eaLnBrk="1" latinLnBrk="0" hangingPunct="1">
+              <a:defRPr sz="1800" kern="1200">
+                <a:solidFill>
+                  <a:schemeClr val="tx1"/>
+                </a:solidFill>
+                <a:latin typeface="+mn-lt"/>
+                <a:ea typeface="+mn-ea"/>
+                <a:cs typeface="+mn-cs"/>
+              </a:defRPr>
+            </a:lvl9pPr>
+          </a:lstStyle>
+          <a:p>
+            <a:pPr marL="0" marR="0" lvl="0" indent="0" algn="ctr" defTabSz="914400" rtl="0" eaLnBrk="1" fontAlgn="auto" latinLnBrk="0" hangingPunct="1">
+              <a:lnSpc>
+                <a:spcPct val="100000"/>
+              </a:lnSpc>
+              <a:spcBef>
+                <a:spcPts val="0"/>
+              </a:spcBef>
+              <a:spcAft>
+                <a:spcPts val="0"/>
+              </a:spcAft>
+              <a:buClrTx/>
+              <a:buSzTx/>
+              <a:buFontTx/>
+              <a:buNone/>
+              <a:tabLst/>
+              <a:defRPr/>
+            </a:pPr>
+            <a:r>
+              <a:rPr kumimoji="0" lang="en-US" sz="1200" b="0" i="0" u="none" strike="noStrike" kern="1200" cap="none" spc="0" normalizeH="0" baseline="0" noProof="0" dirty="0">
+                <a:ln>
+                  <a:noFill/>
+                </a:ln>
+                <a:solidFill>
+                  <a:prstClr val="black">
+                    <a:tint val="75000"/>
+                  </a:prstClr>
+                </a:solidFill>
+                <a:effectLst/>
+                <a:uLnTx/>
+                <a:uFillTx/>
+                <a:latin typeface="Helvetica Neue" panose="02000503000000020004" pitchFamily="2" charset="0"/>
+                <a:ea typeface="Helvetica Neue" panose="02000503000000020004" pitchFamily="2" charset="0"/>
+                <a:cs typeface="Helvetica Neue" panose="02000503000000020004" pitchFamily="2" charset="0"/>
+              </a:rPr>
+              <a:t>architrino.com</a:t>
+            </a:r>
+          </a:p>
+        </p:txBody>
+      </p:sp>
     </p:spTree>
     <p:extLst>
       <p:ext uri="{BB962C8B-B14F-4D97-AF65-F5344CB8AC3E}">
-        <p14:creationId xmlns:p14="http://schemas.microsoft.com/office/powerpoint/2010/main" val="473784197"/>
+        <ns3:creationId val="473784197"/>
       </p:ext>
     </p:extLst>
   </p:cSld>
@@ -14249,7 +17057,7 @@
 </file>
 
 <file path=ppt/slides/slide7.xml><?xml version="1.0" encoding="utf-8"?>
-<p:sld xmlns:a="http://schemas.openxmlformats.org/drawingml/2006/main" xmlns:r="http://schemas.openxmlformats.org/officeDocument/2006/relationships" xmlns:p="http://schemas.openxmlformats.org/presentationml/2006/main">
+<p:sld xmlns:a="http://schemas.openxmlformats.org/drawingml/2006/main" xmlns:a16="http://schemas.microsoft.com/office/drawing/2014/main" xmlns:ns3="http://schemas.microsoft.com/office/powerpoint/2010/main" xmlns:p="http://schemas.openxmlformats.org/presentationml/2006/main">
   <p:cSld>
     <p:bg>
       <p:bgPr>
@@ -14264,7 +17072,7 @@
         <p:cNvPr id="1" name="">
           <a:extLst>
             <a:ext uri="{FF2B5EF4-FFF2-40B4-BE49-F238E27FC236}">
-              <a16:creationId xmlns:a16="http://schemas.microsoft.com/office/drawing/2014/main" id="{8BD2D8D3-4FC2-5B46-4A44-7A2085023C6B}"/>
+              <a16:creationId id="{8BD2D8D3-4FC2-5B46-4A44-7A2085023C6B}"/>
             </a:ext>
           </a:extLst>
         </p:cNvPr>
@@ -14284,7 +17092,7 @@
           <p:cNvPr id="2" name="TextBox 1">
             <a:extLst>
               <a:ext uri="{FF2B5EF4-FFF2-40B4-BE49-F238E27FC236}">
-                <a16:creationId xmlns:a16="http://schemas.microsoft.com/office/drawing/2014/main" id="{697EE182-5C47-C603-7102-03C62C1E8913}"/>
+                <a16:creationId id="{697EE182-5C47-C603-7102-03C62C1E8913}"/>
               </a:ext>
             </a:extLst>
           </p:cNvPr>
@@ -14328,7 +17136,7 @@
                 <a:ea typeface="Helvetica Neue Thin" panose="020B0403020202020204" pitchFamily="34" charset="0"/>
                 <a:cs typeface="Helvetica Neue" panose="02000503000000020004" pitchFamily="2" charset="0"/>
               </a:rPr>
-              <a:t>neoclassical.ai</a:t>
+              <a:t/>
             </a:r>
           </a:p>
           <a:p>
@@ -14468,10 +17276,166 @@
           </a:p>
         </p:txBody>
       </p:sp>
+      <p:sp>
+        <p:nvSpPr>
+          <p:cNvPr id="3" name="Footer Placeholder 3"/>
+          <p:cNvSpPr txBox="1">
+            <a:spLocks/>
+          </p:cNvSpPr>
+          <p:nvPr/>
+        </p:nvSpPr>
+        <p:spPr>
+          <a:xfrm>
+            <a:off x="10942204" y="6481737"/>
+            <a:ext cx="1217443" cy="365125"/>
+          </a:xfrm>
+          <a:prstGeom prst="rect">
+            <a:avLst/>
+          </a:prstGeom>
+        </p:spPr>
+        <p:txBody>
+          <a:bodyPr vert="horz" lIns="91440" tIns="45720" rIns="91440" bIns="45720" rtlCol="0" anchor="ctr"/>
+          <a:lstStyle>
+            <a:defPPr>
+              <a:defRPr lang="en-US"/>
+            </a:defPPr>
+            <a:lvl1pPr marL="0" algn="ctr" defTabSz="914400" rtl="0" eaLnBrk="1" latinLnBrk="0" hangingPunct="1">
+              <a:defRPr sz="1200" kern="1200">
+                <a:solidFill>
+                  <a:schemeClr val="tx1">
+                    <a:tint val="75000"/>
+                  </a:schemeClr>
+                </a:solidFill>
+                <a:latin typeface="+mn-lt"/>
+                <a:ea typeface="+mn-ea"/>
+                <a:cs typeface="+mn-cs"/>
+              </a:defRPr>
+            </a:lvl1pPr>
+            <a:lvl2pPr marL="457200" algn="l" defTabSz="914400" rtl="0" eaLnBrk="1" latinLnBrk="0" hangingPunct="1">
+              <a:defRPr sz="1800" kern="1200">
+                <a:solidFill>
+                  <a:schemeClr val="tx1"/>
+                </a:solidFill>
+                <a:latin typeface="+mn-lt"/>
+                <a:ea typeface="+mn-ea"/>
+                <a:cs typeface="+mn-cs"/>
+              </a:defRPr>
+            </a:lvl2pPr>
+            <a:lvl3pPr marL="914400" algn="l" defTabSz="914400" rtl="0" eaLnBrk="1" latinLnBrk="0" hangingPunct="1">
+              <a:defRPr sz="1800" kern="1200">
+                <a:solidFill>
+                  <a:schemeClr val="tx1"/>
+                </a:solidFill>
+                <a:latin typeface="+mn-lt"/>
+                <a:ea typeface="+mn-ea"/>
+                <a:cs typeface="+mn-cs"/>
+              </a:defRPr>
+            </a:lvl3pPr>
+            <a:lvl4pPr marL="1371600" algn="l" defTabSz="914400" rtl="0" eaLnBrk="1" latinLnBrk="0" hangingPunct="1">
+              <a:defRPr sz="1800" kern="1200">
+                <a:solidFill>
+                  <a:schemeClr val="tx1"/>
+                </a:solidFill>
+                <a:latin typeface="+mn-lt"/>
+                <a:ea typeface="+mn-ea"/>
+                <a:cs typeface="+mn-cs"/>
+              </a:defRPr>
+            </a:lvl4pPr>
+            <a:lvl5pPr marL="1828800" algn="l" defTabSz="914400" rtl="0" eaLnBrk="1" latinLnBrk="0" hangingPunct="1">
+              <a:defRPr sz="1800" kern="1200">
+                <a:solidFill>
+                  <a:schemeClr val="tx1"/>
+                </a:solidFill>
+                <a:latin typeface="+mn-lt"/>
+                <a:ea typeface="+mn-ea"/>
+                <a:cs typeface="+mn-cs"/>
+              </a:defRPr>
+            </a:lvl5pPr>
+            <a:lvl6pPr marL="2286000" algn="l" defTabSz="914400" rtl="0" eaLnBrk="1" latinLnBrk="0" hangingPunct="1">
+              <a:defRPr sz="1800" kern="1200">
+                <a:solidFill>
+                  <a:schemeClr val="tx1"/>
+                </a:solidFill>
+                <a:latin typeface="+mn-lt"/>
+                <a:ea typeface="+mn-ea"/>
+                <a:cs typeface="+mn-cs"/>
+              </a:defRPr>
+            </a:lvl6pPr>
+            <a:lvl7pPr marL="2743200" algn="l" defTabSz="914400" rtl="0" eaLnBrk="1" latinLnBrk="0" hangingPunct="1">
+              <a:defRPr sz="1800" kern="1200">
+                <a:solidFill>
+                  <a:schemeClr val="tx1"/>
+                </a:solidFill>
+                <a:latin typeface="+mn-lt"/>
+                <a:ea typeface="+mn-ea"/>
+                <a:cs typeface="+mn-cs"/>
+              </a:defRPr>
+            </a:lvl7pPr>
+            <a:lvl8pPr marL="3200400" algn="l" defTabSz="914400" rtl="0" eaLnBrk="1" latinLnBrk="0" hangingPunct="1">
+              <a:defRPr sz="1800" kern="1200">
+                <a:solidFill>
+                  <a:schemeClr val="tx1"/>
+                </a:solidFill>
+                <a:latin typeface="+mn-lt"/>
+                <a:ea typeface="+mn-ea"/>
+                <a:cs typeface="+mn-cs"/>
+              </a:defRPr>
+            </a:lvl8pPr>
+            <a:lvl9pPr marL="3657600" algn="l" defTabSz="914400" rtl="0" eaLnBrk="1" latinLnBrk="0" hangingPunct="1">
+              <a:defRPr sz="1800" kern="1200">
+                <a:solidFill>
+                  <a:schemeClr val="tx1"/>
+                </a:solidFill>
+                <a:latin typeface="+mn-lt"/>
+                <a:ea typeface="+mn-ea"/>
+                <a:cs typeface="+mn-cs"/>
+              </a:defRPr>
+            </a:lvl9pPr>
+          </a:lstStyle>
+          <a:p>
+            <a:pPr marL="0" marR="0" lvl="0" indent="0" algn="ctr" defTabSz="914400" rtl="0" eaLnBrk="1" fontAlgn="auto" latinLnBrk="0" hangingPunct="1">
+              <a:lnSpc>
+                <a:spcPct val="100000"/>
+              </a:lnSpc>
+              <a:spcBef>
+                <a:spcPts val="0"/>
+              </a:spcBef>
+              <a:spcAft>
+                <a:spcPts val="0"/>
+              </a:spcAft>
+              <a:buClrTx/>
+              <a:buSzTx/>
+              <a:buFontTx/>
+              <a:buNone/>
+              <a:tabLst/>
+              <a:defRPr/>
+            </a:pPr>
+            <a:r>
+              <a:rPr kumimoji="0" lang="en-US" sz="1200" b="0" i="0" u="none" strike="noStrike" kern="1200" cap="none" spc="0" normalizeH="0" baseline="0" noProof="0" dirty="0">
+                <a:ln>
+                  <a:noFill/>
+                </a:ln>
+                <a:solidFill>
+                  <a:prstClr val="black">
+                    <a:tint val="75000"/>
+                  </a:prstClr>
+                </a:solidFill>
+                <a:effectLst/>
+                <a:uLnTx/>
+                <a:uFillTx/>
+                <a:latin typeface="Helvetica Neue" panose="02000503000000020004" pitchFamily="2" charset="0"/>
+                <a:ea typeface="Helvetica Neue" panose="02000503000000020004" pitchFamily="2" charset="0"/>
+                <a:cs typeface="Helvetica Neue" panose="02000503000000020004" pitchFamily="2" charset="0"/>
+              </a:rPr>
+              <a:t>architrino.com</a:t>
+            </a:r>
+          </a:p>
+        </p:txBody>
+      </p:sp>
     </p:spTree>
     <p:extLst>
       <p:ext uri="{BB962C8B-B14F-4D97-AF65-F5344CB8AC3E}">
-        <p14:creationId xmlns:p14="http://schemas.microsoft.com/office/powerpoint/2010/main" val="3898337369"/>
+        <ns3:creationId val="3898337369"/>
       </p:ext>
     </p:extLst>
   </p:cSld>
@@ -14482,7 +17446,7 @@
 </file>
 
 <file path=ppt/slides/slide8.xml><?xml version="1.0" encoding="utf-8"?>
-<p:sld xmlns:a="http://schemas.openxmlformats.org/drawingml/2006/main" xmlns:r="http://schemas.openxmlformats.org/officeDocument/2006/relationships" xmlns:p="http://schemas.openxmlformats.org/presentationml/2006/main">
+<p:sld xmlns:a="http://schemas.openxmlformats.org/drawingml/2006/main" xmlns:a16="http://schemas.microsoft.com/office/drawing/2014/main" xmlns:ns3="http://schemas.microsoft.com/office/powerpoint/2010/main" xmlns:p="http://schemas.openxmlformats.org/presentationml/2006/main">
   <p:cSld>
     <p:bg>
       <p:bgPr>
@@ -14497,7 +17461,7 @@
         <p:cNvPr id="1" name="">
           <a:extLst>
             <a:ext uri="{FF2B5EF4-FFF2-40B4-BE49-F238E27FC236}">
-              <a16:creationId xmlns:a16="http://schemas.microsoft.com/office/drawing/2014/main" id="{2CB8459F-9206-7CBC-FAD7-B1088E4DEBEF}"/>
+              <a16:creationId id="{2CB8459F-9206-7CBC-FAD7-B1088E4DEBEF}"/>
             </a:ext>
           </a:extLst>
         </p:cNvPr>
@@ -14517,7 +17481,7 @@
           <p:cNvPr id="2" name="TextBox 1">
             <a:extLst>
               <a:ext uri="{FF2B5EF4-FFF2-40B4-BE49-F238E27FC236}">
-                <a16:creationId xmlns:a16="http://schemas.microsoft.com/office/drawing/2014/main" id="{7F371C28-8E58-2334-EE8D-181D406BE474}"/>
+                <a16:creationId id="{7F371C28-8E58-2334-EE8D-181D406BE474}"/>
               </a:ext>
             </a:extLst>
           </p:cNvPr>
@@ -14561,7 +17525,7 @@
                 <a:ea typeface="Helvetica Neue Thin" panose="020B0403020202020204" pitchFamily="34" charset="0"/>
                 <a:cs typeface="Helvetica Neue" panose="02000503000000020004" pitchFamily="2" charset="0"/>
               </a:rPr>
-              <a:t>neoclassical.ai</a:t>
+              <a:t/>
             </a:r>
           </a:p>
           <a:p>
@@ -14701,10 +17665,166 @@
           </a:p>
         </p:txBody>
       </p:sp>
+      <p:sp>
+        <p:nvSpPr>
+          <p:cNvPr id="3" name="Footer Placeholder 3"/>
+          <p:cNvSpPr txBox="1">
+            <a:spLocks/>
+          </p:cNvSpPr>
+          <p:nvPr/>
+        </p:nvSpPr>
+        <p:spPr>
+          <a:xfrm>
+            <a:off x="10942204" y="6481737"/>
+            <a:ext cx="1217443" cy="365125"/>
+          </a:xfrm>
+          <a:prstGeom prst="rect">
+            <a:avLst/>
+          </a:prstGeom>
+        </p:spPr>
+        <p:txBody>
+          <a:bodyPr vert="horz" lIns="91440" tIns="45720" rIns="91440" bIns="45720" rtlCol="0" anchor="ctr"/>
+          <a:lstStyle>
+            <a:defPPr>
+              <a:defRPr lang="en-US"/>
+            </a:defPPr>
+            <a:lvl1pPr marL="0" algn="ctr" defTabSz="914400" rtl="0" eaLnBrk="1" latinLnBrk="0" hangingPunct="1">
+              <a:defRPr sz="1200" kern="1200">
+                <a:solidFill>
+                  <a:schemeClr val="tx1">
+                    <a:tint val="75000"/>
+                  </a:schemeClr>
+                </a:solidFill>
+                <a:latin typeface="+mn-lt"/>
+                <a:ea typeface="+mn-ea"/>
+                <a:cs typeface="+mn-cs"/>
+              </a:defRPr>
+            </a:lvl1pPr>
+            <a:lvl2pPr marL="457200" algn="l" defTabSz="914400" rtl="0" eaLnBrk="1" latinLnBrk="0" hangingPunct="1">
+              <a:defRPr sz="1800" kern="1200">
+                <a:solidFill>
+                  <a:schemeClr val="tx1"/>
+                </a:solidFill>
+                <a:latin typeface="+mn-lt"/>
+                <a:ea typeface="+mn-ea"/>
+                <a:cs typeface="+mn-cs"/>
+              </a:defRPr>
+            </a:lvl2pPr>
+            <a:lvl3pPr marL="914400" algn="l" defTabSz="914400" rtl="0" eaLnBrk="1" latinLnBrk="0" hangingPunct="1">
+              <a:defRPr sz="1800" kern="1200">
+                <a:solidFill>
+                  <a:schemeClr val="tx1"/>
+                </a:solidFill>
+                <a:latin typeface="+mn-lt"/>
+                <a:ea typeface="+mn-ea"/>
+                <a:cs typeface="+mn-cs"/>
+              </a:defRPr>
+            </a:lvl3pPr>
+            <a:lvl4pPr marL="1371600" algn="l" defTabSz="914400" rtl="0" eaLnBrk="1" latinLnBrk="0" hangingPunct="1">
+              <a:defRPr sz="1800" kern="1200">
+                <a:solidFill>
+                  <a:schemeClr val="tx1"/>
+                </a:solidFill>
+                <a:latin typeface="+mn-lt"/>
+                <a:ea typeface="+mn-ea"/>
+                <a:cs typeface="+mn-cs"/>
+              </a:defRPr>
+            </a:lvl4pPr>
+            <a:lvl5pPr marL="1828800" algn="l" defTabSz="914400" rtl="0" eaLnBrk="1" latinLnBrk="0" hangingPunct="1">
+              <a:defRPr sz="1800" kern="1200">
+                <a:solidFill>
+                  <a:schemeClr val="tx1"/>
+                </a:solidFill>
+                <a:latin typeface="+mn-lt"/>
+                <a:ea typeface="+mn-ea"/>
+                <a:cs typeface="+mn-cs"/>
+              </a:defRPr>
+            </a:lvl5pPr>
+            <a:lvl6pPr marL="2286000" algn="l" defTabSz="914400" rtl="0" eaLnBrk="1" latinLnBrk="0" hangingPunct="1">
+              <a:defRPr sz="1800" kern="1200">
+                <a:solidFill>
+                  <a:schemeClr val="tx1"/>
+                </a:solidFill>
+                <a:latin typeface="+mn-lt"/>
+                <a:ea typeface="+mn-ea"/>
+                <a:cs typeface="+mn-cs"/>
+              </a:defRPr>
+            </a:lvl6pPr>
+            <a:lvl7pPr marL="2743200" algn="l" defTabSz="914400" rtl="0" eaLnBrk="1" latinLnBrk="0" hangingPunct="1">
+              <a:defRPr sz="1800" kern="1200">
+                <a:solidFill>
+                  <a:schemeClr val="tx1"/>
+                </a:solidFill>
+                <a:latin typeface="+mn-lt"/>
+                <a:ea typeface="+mn-ea"/>
+                <a:cs typeface="+mn-cs"/>
+              </a:defRPr>
+            </a:lvl7pPr>
+            <a:lvl8pPr marL="3200400" algn="l" defTabSz="914400" rtl="0" eaLnBrk="1" latinLnBrk="0" hangingPunct="1">
+              <a:defRPr sz="1800" kern="1200">
+                <a:solidFill>
+                  <a:schemeClr val="tx1"/>
+                </a:solidFill>
+                <a:latin typeface="+mn-lt"/>
+                <a:ea typeface="+mn-ea"/>
+                <a:cs typeface="+mn-cs"/>
+              </a:defRPr>
+            </a:lvl8pPr>
+            <a:lvl9pPr marL="3657600" algn="l" defTabSz="914400" rtl="0" eaLnBrk="1" latinLnBrk="0" hangingPunct="1">
+              <a:defRPr sz="1800" kern="1200">
+                <a:solidFill>
+                  <a:schemeClr val="tx1"/>
+                </a:solidFill>
+                <a:latin typeface="+mn-lt"/>
+                <a:ea typeface="+mn-ea"/>
+                <a:cs typeface="+mn-cs"/>
+              </a:defRPr>
+            </a:lvl9pPr>
+          </a:lstStyle>
+          <a:p>
+            <a:pPr marL="0" marR="0" lvl="0" indent="0" algn="ctr" defTabSz="914400" rtl="0" eaLnBrk="1" fontAlgn="auto" latinLnBrk="0" hangingPunct="1">
+              <a:lnSpc>
+                <a:spcPct val="100000"/>
+              </a:lnSpc>
+              <a:spcBef>
+                <a:spcPts val="0"/>
+              </a:spcBef>
+              <a:spcAft>
+                <a:spcPts val="0"/>
+              </a:spcAft>
+              <a:buClrTx/>
+              <a:buSzTx/>
+              <a:buFontTx/>
+              <a:buNone/>
+              <a:tabLst/>
+              <a:defRPr/>
+            </a:pPr>
+            <a:r>
+              <a:rPr kumimoji="0" lang="en-US" sz="1200" b="0" i="0" u="none" strike="noStrike" kern="1200" cap="none" spc="0" normalizeH="0" baseline="0" noProof="0" dirty="0">
+                <a:ln>
+                  <a:noFill/>
+                </a:ln>
+                <a:solidFill>
+                  <a:prstClr val="black">
+                    <a:tint val="75000"/>
+                  </a:prstClr>
+                </a:solidFill>
+                <a:effectLst/>
+                <a:uLnTx/>
+                <a:uFillTx/>
+                <a:latin typeface="Helvetica Neue" panose="02000503000000020004" pitchFamily="2" charset="0"/>
+                <a:ea typeface="Helvetica Neue" panose="02000503000000020004" pitchFamily="2" charset="0"/>
+                <a:cs typeface="Helvetica Neue" panose="02000503000000020004" pitchFamily="2" charset="0"/>
+              </a:rPr>
+              <a:t>architrino.com</a:t>
+            </a:r>
+          </a:p>
+        </p:txBody>
+      </p:sp>
     </p:spTree>
     <p:extLst>
       <p:ext uri="{BB962C8B-B14F-4D97-AF65-F5344CB8AC3E}">
-        <p14:creationId xmlns:p14="http://schemas.microsoft.com/office/powerpoint/2010/main" val="769894471"/>
+        <ns3:creationId val="769894471"/>
       </p:ext>
     </p:extLst>
   </p:cSld>
@@ -14715,7 +17835,7 @@
 </file>
 
 <file path=ppt/slides/slide9.xml><?xml version="1.0" encoding="utf-8"?>
-<p:sld xmlns:a="http://schemas.openxmlformats.org/drawingml/2006/main" xmlns:r="http://schemas.openxmlformats.org/officeDocument/2006/relationships" xmlns:p="http://schemas.openxmlformats.org/presentationml/2006/main">
+<p:sld xmlns:a="http://schemas.openxmlformats.org/drawingml/2006/main" xmlns:a16="http://schemas.microsoft.com/office/drawing/2014/main" xmlns:ns3="http://schemas.microsoft.com/office/powerpoint/2010/main" xmlns:p="http://schemas.openxmlformats.org/presentationml/2006/main">
   <p:cSld>
     <p:bg>
       <p:bgPr>
@@ -14744,7 +17864,7 @@
           <p:cNvPr id="2" name="TextBox 1">
             <a:extLst>
               <a:ext uri="{FF2B5EF4-FFF2-40B4-BE49-F238E27FC236}">
-                <a16:creationId xmlns:a16="http://schemas.microsoft.com/office/drawing/2014/main" id="{1D77ACA5-3691-8FEB-0266-8D47BBCCF4C6}"/>
+                <a16:creationId id="{1D77ACA5-3691-8FEB-0266-8D47BBCCF4C6}"/>
               </a:ext>
             </a:extLst>
           </p:cNvPr>
@@ -14788,7 +17908,7 @@
                 <a:ea typeface="Helvetica Neue Thin" panose="020B0403020202020204" pitchFamily="34" charset="0"/>
                 <a:cs typeface="Helvetica Neue" panose="02000503000000020004" pitchFamily="2" charset="0"/>
               </a:rPr>
-              <a:t>neoclassical.ai</a:t>
+              <a:t/>
             </a:r>
           </a:p>
           <a:p>
@@ -14926,10 +18046,166 @@
           </a:p>
         </p:txBody>
       </p:sp>
+      <p:sp>
+        <p:nvSpPr>
+          <p:cNvPr id="3" name="Footer Placeholder 3"/>
+          <p:cNvSpPr txBox="1">
+            <a:spLocks/>
+          </p:cNvSpPr>
+          <p:nvPr/>
+        </p:nvSpPr>
+        <p:spPr>
+          <a:xfrm>
+            <a:off x="10942204" y="6481737"/>
+            <a:ext cx="1217443" cy="365125"/>
+          </a:xfrm>
+          <a:prstGeom prst="rect">
+            <a:avLst/>
+          </a:prstGeom>
+        </p:spPr>
+        <p:txBody>
+          <a:bodyPr vert="horz" lIns="91440" tIns="45720" rIns="91440" bIns="45720" rtlCol="0" anchor="ctr"/>
+          <a:lstStyle>
+            <a:defPPr>
+              <a:defRPr lang="en-US"/>
+            </a:defPPr>
+            <a:lvl1pPr marL="0" algn="ctr" defTabSz="914400" rtl="0" eaLnBrk="1" latinLnBrk="0" hangingPunct="1">
+              <a:defRPr sz="1200" kern="1200">
+                <a:solidFill>
+                  <a:schemeClr val="tx1">
+                    <a:tint val="75000"/>
+                  </a:schemeClr>
+                </a:solidFill>
+                <a:latin typeface="+mn-lt"/>
+                <a:ea typeface="+mn-ea"/>
+                <a:cs typeface="+mn-cs"/>
+              </a:defRPr>
+            </a:lvl1pPr>
+            <a:lvl2pPr marL="457200" algn="l" defTabSz="914400" rtl="0" eaLnBrk="1" latinLnBrk="0" hangingPunct="1">
+              <a:defRPr sz="1800" kern="1200">
+                <a:solidFill>
+                  <a:schemeClr val="tx1"/>
+                </a:solidFill>
+                <a:latin typeface="+mn-lt"/>
+                <a:ea typeface="+mn-ea"/>
+                <a:cs typeface="+mn-cs"/>
+              </a:defRPr>
+            </a:lvl2pPr>
+            <a:lvl3pPr marL="914400" algn="l" defTabSz="914400" rtl="0" eaLnBrk="1" latinLnBrk="0" hangingPunct="1">
+              <a:defRPr sz="1800" kern="1200">
+                <a:solidFill>
+                  <a:schemeClr val="tx1"/>
+                </a:solidFill>
+                <a:latin typeface="+mn-lt"/>
+                <a:ea typeface="+mn-ea"/>
+                <a:cs typeface="+mn-cs"/>
+              </a:defRPr>
+            </a:lvl3pPr>
+            <a:lvl4pPr marL="1371600" algn="l" defTabSz="914400" rtl="0" eaLnBrk="1" latinLnBrk="0" hangingPunct="1">
+              <a:defRPr sz="1800" kern="1200">
+                <a:solidFill>
+                  <a:schemeClr val="tx1"/>
+                </a:solidFill>
+                <a:latin typeface="+mn-lt"/>
+                <a:ea typeface="+mn-ea"/>
+                <a:cs typeface="+mn-cs"/>
+              </a:defRPr>
+            </a:lvl4pPr>
+            <a:lvl5pPr marL="1828800" algn="l" defTabSz="914400" rtl="0" eaLnBrk="1" latinLnBrk="0" hangingPunct="1">
+              <a:defRPr sz="1800" kern="1200">
+                <a:solidFill>
+                  <a:schemeClr val="tx1"/>
+                </a:solidFill>
+                <a:latin typeface="+mn-lt"/>
+                <a:ea typeface="+mn-ea"/>
+                <a:cs typeface="+mn-cs"/>
+              </a:defRPr>
+            </a:lvl5pPr>
+            <a:lvl6pPr marL="2286000" algn="l" defTabSz="914400" rtl="0" eaLnBrk="1" latinLnBrk="0" hangingPunct="1">
+              <a:defRPr sz="1800" kern="1200">
+                <a:solidFill>
+                  <a:schemeClr val="tx1"/>
+                </a:solidFill>
+                <a:latin typeface="+mn-lt"/>
+                <a:ea typeface="+mn-ea"/>
+                <a:cs typeface="+mn-cs"/>
+              </a:defRPr>
+            </a:lvl6pPr>
+            <a:lvl7pPr marL="2743200" algn="l" defTabSz="914400" rtl="0" eaLnBrk="1" latinLnBrk="0" hangingPunct="1">
+              <a:defRPr sz="1800" kern="1200">
+                <a:solidFill>
+                  <a:schemeClr val="tx1"/>
+                </a:solidFill>
+                <a:latin typeface="+mn-lt"/>
+                <a:ea typeface="+mn-ea"/>
+                <a:cs typeface="+mn-cs"/>
+              </a:defRPr>
+            </a:lvl7pPr>
+            <a:lvl8pPr marL="3200400" algn="l" defTabSz="914400" rtl="0" eaLnBrk="1" latinLnBrk="0" hangingPunct="1">
+              <a:defRPr sz="1800" kern="1200">
+                <a:solidFill>
+                  <a:schemeClr val="tx1"/>
+                </a:solidFill>
+                <a:latin typeface="+mn-lt"/>
+                <a:ea typeface="+mn-ea"/>
+                <a:cs typeface="+mn-cs"/>
+              </a:defRPr>
+            </a:lvl8pPr>
+            <a:lvl9pPr marL="3657600" algn="l" defTabSz="914400" rtl="0" eaLnBrk="1" latinLnBrk="0" hangingPunct="1">
+              <a:defRPr sz="1800" kern="1200">
+                <a:solidFill>
+                  <a:schemeClr val="tx1"/>
+                </a:solidFill>
+                <a:latin typeface="+mn-lt"/>
+                <a:ea typeface="+mn-ea"/>
+                <a:cs typeface="+mn-cs"/>
+              </a:defRPr>
+            </a:lvl9pPr>
+          </a:lstStyle>
+          <a:p>
+            <a:pPr marL="0" marR="0" lvl="0" indent="0" algn="ctr" defTabSz="914400" rtl="0" eaLnBrk="1" fontAlgn="auto" latinLnBrk="0" hangingPunct="1">
+              <a:lnSpc>
+                <a:spcPct val="100000"/>
+              </a:lnSpc>
+              <a:spcBef>
+                <a:spcPts val="0"/>
+              </a:spcBef>
+              <a:spcAft>
+                <a:spcPts val="0"/>
+              </a:spcAft>
+              <a:buClrTx/>
+              <a:buSzTx/>
+              <a:buFontTx/>
+              <a:buNone/>
+              <a:tabLst/>
+              <a:defRPr/>
+            </a:pPr>
+            <a:r>
+              <a:rPr kumimoji="0" lang="en-US" sz="1200" b="0" i="0" u="none" strike="noStrike" kern="1200" cap="none" spc="0" normalizeH="0" baseline="0" noProof="0" dirty="0">
+                <a:ln>
+                  <a:noFill/>
+                </a:ln>
+                <a:solidFill>
+                  <a:prstClr val="black">
+                    <a:tint val="75000"/>
+                  </a:prstClr>
+                </a:solidFill>
+                <a:effectLst/>
+                <a:uLnTx/>
+                <a:uFillTx/>
+                <a:latin typeface="Helvetica Neue" panose="02000503000000020004" pitchFamily="2" charset="0"/>
+                <a:ea typeface="Helvetica Neue" panose="02000503000000020004" pitchFamily="2" charset="0"/>
+                <a:cs typeface="Helvetica Neue" panose="02000503000000020004" pitchFamily="2" charset="0"/>
+              </a:rPr>
+              <a:t>architrino.com</a:t>
+            </a:r>
+          </a:p>
+        </p:txBody>
+      </p:sp>
     </p:spTree>
     <p:extLst>
       <p:ext uri="{BB962C8B-B14F-4D97-AF65-F5344CB8AC3E}">
-        <p14:creationId xmlns:p14="http://schemas.microsoft.com/office/powerpoint/2010/main" val="3882716158"/>
+        <ns3:creationId val="3882716158"/>
       </p:ext>
     </p:extLst>
   </p:cSld>
